--- a/Lectures/16-interpretability-part-1.pptx
+++ b/Lectures/16-interpretability-part-1.pptx
@@ -5,7 +5,7 @@
     <p:sldMasterId id="2147483648" r:id="rId1"/>
   </p:sldMasterIdLst>
   <p:notesMasterIdLst>
-    <p:notesMasterId r:id="rId32"/>
+    <p:notesMasterId r:id="rId34"/>
   </p:notesMasterIdLst>
   <p:sldIdLst>
     <p:sldId id="256" r:id="rId2"/>
@@ -14,30 +14,32 @@
     <p:sldId id="515" r:id="rId5"/>
     <p:sldId id="318" r:id="rId6"/>
     <p:sldId id="259" r:id="rId7"/>
-    <p:sldId id="260" r:id="rId8"/>
-    <p:sldId id="261" r:id="rId9"/>
-    <p:sldId id="262" r:id="rId10"/>
-    <p:sldId id="263" r:id="rId11"/>
-    <p:sldId id="264" r:id="rId12"/>
-    <p:sldId id="265" r:id="rId13"/>
-    <p:sldId id="525" r:id="rId14"/>
-    <p:sldId id="266" r:id="rId15"/>
-    <p:sldId id="267" r:id="rId16"/>
-    <p:sldId id="270" r:id="rId17"/>
-    <p:sldId id="271" r:id="rId18"/>
-    <p:sldId id="272" r:id="rId19"/>
-    <p:sldId id="273" r:id="rId20"/>
-    <p:sldId id="274" r:id="rId21"/>
-    <p:sldId id="275" r:id="rId22"/>
-    <p:sldId id="500" r:id="rId23"/>
-    <p:sldId id="527" r:id="rId24"/>
-    <p:sldId id="513" r:id="rId25"/>
-    <p:sldId id="276" r:id="rId26"/>
-    <p:sldId id="277" r:id="rId27"/>
-    <p:sldId id="278" r:id="rId28"/>
-    <p:sldId id="279" r:id="rId29"/>
-    <p:sldId id="280" r:id="rId30"/>
-    <p:sldId id="529" r:id="rId31"/>
+    <p:sldId id="530" r:id="rId8"/>
+    <p:sldId id="531" r:id="rId9"/>
+    <p:sldId id="260" r:id="rId10"/>
+    <p:sldId id="261" r:id="rId11"/>
+    <p:sldId id="262" r:id="rId12"/>
+    <p:sldId id="263" r:id="rId13"/>
+    <p:sldId id="264" r:id="rId14"/>
+    <p:sldId id="265" r:id="rId15"/>
+    <p:sldId id="525" r:id="rId16"/>
+    <p:sldId id="266" r:id="rId17"/>
+    <p:sldId id="267" r:id="rId18"/>
+    <p:sldId id="270" r:id="rId19"/>
+    <p:sldId id="271" r:id="rId20"/>
+    <p:sldId id="272" r:id="rId21"/>
+    <p:sldId id="273" r:id="rId22"/>
+    <p:sldId id="274" r:id="rId23"/>
+    <p:sldId id="275" r:id="rId24"/>
+    <p:sldId id="500" r:id="rId25"/>
+    <p:sldId id="527" r:id="rId26"/>
+    <p:sldId id="513" r:id="rId27"/>
+    <p:sldId id="276" r:id="rId28"/>
+    <p:sldId id="277" r:id="rId29"/>
+    <p:sldId id="278" r:id="rId30"/>
+    <p:sldId id="279" r:id="rId31"/>
+    <p:sldId id="280" r:id="rId32"/>
+    <p:sldId id="529" r:id="rId33"/>
   </p:sldIdLst>
   <p:sldSz cx="12192000" cy="6858000"/>
   <p:notesSz cx="6858000" cy="9144000"/>
@@ -275,7 +277,7 @@
       <p15:sldGuideLst xmlns:p15="http://schemas.microsoft.com/office/powerpoint/2012/main"/>
     </p:ext>
     <p:ext uri="http://customooxmlschemas.google.com/">
-      <go:slidesCustomData xmlns="" xmlns:mc="http://schemas.openxmlformats.org/markup-compatibility/2006" xmlns:mv="urn:schemas-microsoft-com:mac:vml" xmlns:c="http://schemas.openxmlformats.org/drawingml/2006/chart" xmlns:dgm="http://schemas.openxmlformats.org/drawingml/2006/diagram" xmlns:o="urn:schemas-microsoft-com:office:office" xmlns:v="urn:schemas-microsoft-com:vml" xmlns:pvml="urn:schemas-microsoft-com:office:powerpoint" xmlns:com="http://schemas.openxmlformats.org/drawingml/2006/compatibility" xmlns:p14="http://schemas.microsoft.com/office/powerpoint/2010/main" xmlns:p15="http://schemas.microsoft.com/office/powerpoint/2012/main" xmlns:go="http://customooxmlschemas.google.com/" r:id="rId33" roundtripDataSignature="AMtx7mhE+28Dr6x2pr2JNXfuZKhsL7KtRg=="/>
+      <go:slidesCustomData xmlns:go="http://customooxmlschemas.google.com/" xmlns:p15="http://schemas.microsoft.com/office/powerpoint/2012/main" xmlns:p14="http://schemas.microsoft.com/office/powerpoint/2010/main" xmlns:com="http://schemas.openxmlformats.org/drawingml/2006/compatibility" xmlns:pvml="urn:schemas-microsoft-com:office:powerpoint" xmlns:v="urn:schemas-microsoft-com:vml" xmlns:o="urn:schemas-microsoft-com:office:office" xmlns:dgm="http://schemas.openxmlformats.org/drawingml/2006/diagram" xmlns:c="http://schemas.openxmlformats.org/drawingml/2006/chart" xmlns:mv="urn:schemas-microsoft-com:mac:vml" xmlns:mc="http://schemas.openxmlformats.org/markup-compatibility/2006" xmlns="" r:id="rId35" roundtripDataSignature="AMtx7mhE+28Dr6x2pr2JNXfuZKhsL7KtRg=="/>
     </p:ext>
   </p:extLst>
 </p:presentation>
@@ -1167,6 +1169,753 @@
     <dgm:fillClrLst meth="repeat">
       <a:schemeClr val="accent2">
         <a:tint val="40000"/>
+      </a:schemeClr>
+    </dgm:fillClrLst>
+    <dgm:linClrLst meth="repeat">
+      <a:schemeClr val="lt1"/>
+    </dgm:linClrLst>
+    <dgm:effectClrLst/>
+    <dgm:txLinClrLst/>
+    <dgm:txFillClrLst meth="repeat">
+      <a:schemeClr val="dk1"/>
+    </dgm:txFillClrLst>
+    <dgm:txEffectClrLst/>
+  </dgm:styleLbl>
+  <dgm:styleLbl name="revTx">
+    <dgm:fillClrLst meth="repeat">
+      <a:schemeClr val="lt1">
+        <a:alpha val="0"/>
+      </a:schemeClr>
+    </dgm:fillClrLst>
+    <dgm:linClrLst meth="repeat">
+      <a:schemeClr val="dk1">
+        <a:alpha val="0"/>
+      </a:schemeClr>
+    </dgm:linClrLst>
+    <dgm:effectClrLst/>
+    <dgm:txLinClrLst/>
+    <dgm:txFillClrLst meth="repeat">
+      <a:schemeClr val="tx1"/>
+    </dgm:txFillClrLst>
+    <dgm:txEffectClrLst/>
+  </dgm:styleLbl>
+</dgm:colorsDef>
+</file>
+
+<file path=ppt/diagrams/colors2.xml><?xml version="1.0" encoding="utf-8"?>
+<dgm:colorsDef xmlns:dgm="http://schemas.openxmlformats.org/drawingml/2006/diagram" xmlns:a="http://schemas.openxmlformats.org/drawingml/2006/main" uniqueId="urn:microsoft.com/office/officeart/2005/8/colors/accent1_2">
+  <dgm:title val=""/>
+  <dgm:desc val=""/>
+  <dgm:catLst>
+    <dgm:cat type="accent1" pri="11200"/>
+  </dgm:catLst>
+  <dgm:styleLbl name="node0">
+    <dgm:fillClrLst meth="repeat">
+      <a:schemeClr val="accent1"/>
+    </dgm:fillClrLst>
+    <dgm:linClrLst meth="repeat">
+      <a:schemeClr val="lt1"/>
+    </dgm:linClrLst>
+    <dgm:effectClrLst/>
+    <dgm:txLinClrLst/>
+    <dgm:txFillClrLst/>
+    <dgm:txEffectClrLst/>
+  </dgm:styleLbl>
+  <dgm:styleLbl name="alignNode1">
+    <dgm:fillClrLst meth="repeat">
+      <a:schemeClr val="accent1"/>
+    </dgm:fillClrLst>
+    <dgm:linClrLst meth="repeat">
+      <a:schemeClr val="accent1"/>
+    </dgm:linClrLst>
+    <dgm:effectClrLst/>
+    <dgm:txLinClrLst/>
+    <dgm:txFillClrLst/>
+    <dgm:txEffectClrLst/>
+  </dgm:styleLbl>
+  <dgm:styleLbl name="node1">
+    <dgm:fillClrLst meth="repeat">
+      <a:schemeClr val="accent1"/>
+    </dgm:fillClrLst>
+    <dgm:linClrLst meth="repeat">
+      <a:schemeClr val="lt1"/>
+    </dgm:linClrLst>
+    <dgm:effectClrLst/>
+    <dgm:txLinClrLst/>
+    <dgm:txFillClrLst/>
+    <dgm:txEffectClrLst/>
+  </dgm:styleLbl>
+  <dgm:styleLbl name="lnNode1">
+    <dgm:fillClrLst meth="repeat">
+      <a:schemeClr val="accent1"/>
+    </dgm:fillClrLst>
+    <dgm:linClrLst meth="repeat">
+      <a:schemeClr val="lt1"/>
+    </dgm:linClrLst>
+    <dgm:effectClrLst/>
+    <dgm:txLinClrLst/>
+    <dgm:txFillClrLst/>
+    <dgm:txEffectClrLst/>
+  </dgm:styleLbl>
+  <dgm:styleLbl name="vennNode1">
+    <dgm:fillClrLst meth="repeat">
+      <a:schemeClr val="accent1">
+        <a:alpha val="50000"/>
+      </a:schemeClr>
+    </dgm:fillClrLst>
+    <dgm:linClrLst meth="repeat">
+      <a:schemeClr val="lt1"/>
+    </dgm:linClrLst>
+    <dgm:effectClrLst/>
+    <dgm:txLinClrLst/>
+    <dgm:txFillClrLst/>
+    <dgm:txEffectClrLst/>
+  </dgm:styleLbl>
+  <dgm:styleLbl name="node2">
+    <dgm:fillClrLst meth="repeat">
+      <a:schemeClr val="accent1"/>
+    </dgm:fillClrLst>
+    <dgm:linClrLst meth="repeat">
+      <a:schemeClr val="lt1"/>
+    </dgm:linClrLst>
+    <dgm:effectClrLst/>
+    <dgm:txLinClrLst/>
+    <dgm:txFillClrLst/>
+    <dgm:txEffectClrLst/>
+  </dgm:styleLbl>
+  <dgm:styleLbl name="node3">
+    <dgm:fillClrLst meth="repeat">
+      <a:schemeClr val="accent1"/>
+    </dgm:fillClrLst>
+    <dgm:linClrLst meth="repeat">
+      <a:schemeClr val="lt1"/>
+    </dgm:linClrLst>
+    <dgm:effectClrLst/>
+    <dgm:txLinClrLst/>
+    <dgm:txFillClrLst/>
+    <dgm:txEffectClrLst/>
+  </dgm:styleLbl>
+  <dgm:styleLbl name="node4">
+    <dgm:fillClrLst meth="repeat">
+      <a:schemeClr val="accent1"/>
+    </dgm:fillClrLst>
+    <dgm:linClrLst meth="repeat">
+      <a:schemeClr val="lt1"/>
+    </dgm:linClrLst>
+    <dgm:effectClrLst/>
+    <dgm:txLinClrLst/>
+    <dgm:txFillClrLst/>
+    <dgm:txEffectClrLst/>
+  </dgm:styleLbl>
+  <dgm:styleLbl name="fgImgPlace1">
+    <dgm:fillClrLst meth="repeat">
+      <a:schemeClr val="accent1">
+        <a:tint val="50000"/>
+      </a:schemeClr>
+    </dgm:fillClrLst>
+    <dgm:linClrLst meth="repeat">
+      <a:schemeClr val="lt1"/>
+    </dgm:linClrLst>
+    <dgm:effectClrLst/>
+    <dgm:txLinClrLst/>
+    <dgm:txFillClrLst meth="repeat">
+      <a:schemeClr val="lt1"/>
+    </dgm:txFillClrLst>
+    <dgm:txEffectClrLst/>
+  </dgm:styleLbl>
+  <dgm:styleLbl name="alignImgPlace1">
+    <dgm:fillClrLst meth="repeat">
+      <a:schemeClr val="accent1">
+        <a:tint val="50000"/>
+      </a:schemeClr>
+    </dgm:fillClrLst>
+    <dgm:linClrLst meth="repeat">
+      <a:schemeClr val="lt1"/>
+    </dgm:linClrLst>
+    <dgm:effectClrLst/>
+    <dgm:txLinClrLst/>
+    <dgm:txFillClrLst meth="repeat">
+      <a:schemeClr val="lt1"/>
+    </dgm:txFillClrLst>
+    <dgm:txEffectClrLst/>
+  </dgm:styleLbl>
+  <dgm:styleLbl name="bgImgPlace1">
+    <dgm:fillClrLst meth="repeat">
+      <a:schemeClr val="accent1">
+        <a:tint val="50000"/>
+      </a:schemeClr>
+    </dgm:fillClrLst>
+    <dgm:linClrLst meth="repeat">
+      <a:schemeClr val="lt1"/>
+    </dgm:linClrLst>
+    <dgm:effectClrLst/>
+    <dgm:txLinClrLst/>
+    <dgm:txFillClrLst meth="repeat">
+      <a:schemeClr val="lt1"/>
+    </dgm:txFillClrLst>
+    <dgm:txEffectClrLst/>
+  </dgm:styleLbl>
+  <dgm:styleLbl name="sibTrans2D1">
+    <dgm:fillClrLst meth="repeat">
+      <a:schemeClr val="accent1">
+        <a:tint val="60000"/>
+      </a:schemeClr>
+    </dgm:fillClrLst>
+    <dgm:linClrLst meth="repeat">
+      <a:schemeClr val="accent1">
+        <a:tint val="60000"/>
+      </a:schemeClr>
+    </dgm:linClrLst>
+    <dgm:effectClrLst/>
+    <dgm:txLinClrLst/>
+    <dgm:txFillClrLst/>
+    <dgm:txEffectClrLst/>
+  </dgm:styleLbl>
+  <dgm:styleLbl name="fgSibTrans2D1">
+    <dgm:fillClrLst meth="repeat">
+      <a:schemeClr val="accent1">
+        <a:tint val="60000"/>
+      </a:schemeClr>
+    </dgm:fillClrLst>
+    <dgm:linClrLst meth="repeat">
+      <a:schemeClr val="accent1">
+        <a:tint val="60000"/>
+      </a:schemeClr>
+    </dgm:linClrLst>
+    <dgm:effectClrLst/>
+    <dgm:txLinClrLst/>
+    <dgm:txFillClrLst/>
+    <dgm:txEffectClrLst/>
+  </dgm:styleLbl>
+  <dgm:styleLbl name="bgSibTrans2D1">
+    <dgm:fillClrLst meth="repeat">
+      <a:schemeClr val="accent1">
+        <a:tint val="60000"/>
+      </a:schemeClr>
+    </dgm:fillClrLst>
+    <dgm:linClrLst meth="repeat">
+      <a:schemeClr val="accent1">
+        <a:tint val="60000"/>
+      </a:schemeClr>
+    </dgm:linClrLst>
+    <dgm:effectClrLst/>
+    <dgm:txLinClrLst/>
+    <dgm:txFillClrLst/>
+    <dgm:txEffectClrLst/>
+  </dgm:styleLbl>
+  <dgm:styleLbl name="sibTrans1D1">
+    <dgm:fillClrLst meth="repeat">
+      <a:schemeClr val="accent1"/>
+    </dgm:fillClrLst>
+    <dgm:linClrLst meth="repeat">
+      <a:schemeClr val="accent1"/>
+    </dgm:linClrLst>
+    <dgm:effectClrLst/>
+    <dgm:txLinClrLst/>
+    <dgm:txFillClrLst meth="repeat">
+      <a:schemeClr val="tx1"/>
+    </dgm:txFillClrLst>
+    <dgm:txEffectClrLst/>
+  </dgm:styleLbl>
+  <dgm:styleLbl name="callout">
+    <dgm:fillClrLst meth="repeat">
+      <a:schemeClr val="accent1"/>
+    </dgm:fillClrLst>
+    <dgm:linClrLst meth="repeat">
+      <a:schemeClr val="accent1">
+        <a:tint val="50000"/>
+      </a:schemeClr>
+    </dgm:linClrLst>
+    <dgm:effectClrLst/>
+    <dgm:txLinClrLst/>
+    <dgm:txFillClrLst meth="repeat">
+      <a:schemeClr val="tx1"/>
+    </dgm:txFillClrLst>
+    <dgm:txEffectClrLst/>
+  </dgm:styleLbl>
+  <dgm:styleLbl name="asst0">
+    <dgm:fillClrLst meth="repeat">
+      <a:schemeClr val="accent1"/>
+    </dgm:fillClrLst>
+    <dgm:linClrLst meth="repeat">
+      <a:schemeClr val="lt1"/>
+    </dgm:linClrLst>
+    <dgm:effectClrLst/>
+    <dgm:txLinClrLst/>
+    <dgm:txFillClrLst/>
+    <dgm:txEffectClrLst/>
+  </dgm:styleLbl>
+  <dgm:styleLbl name="asst1">
+    <dgm:fillClrLst meth="repeat">
+      <a:schemeClr val="accent1"/>
+    </dgm:fillClrLst>
+    <dgm:linClrLst meth="repeat">
+      <a:schemeClr val="lt1"/>
+    </dgm:linClrLst>
+    <dgm:effectClrLst/>
+    <dgm:txLinClrLst/>
+    <dgm:txFillClrLst/>
+    <dgm:txEffectClrLst/>
+  </dgm:styleLbl>
+  <dgm:styleLbl name="asst2">
+    <dgm:fillClrLst meth="repeat">
+      <a:schemeClr val="accent1"/>
+    </dgm:fillClrLst>
+    <dgm:linClrLst meth="repeat">
+      <a:schemeClr val="lt1"/>
+    </dgm:linClrLst>
+    <dgm:effectClrLst/>
+    <dgm:txLinClrLst/>
+    <dgm:txFillClrLst/>
+    <dgm:txEffectClrLst/>
+  </dgm:styleLbl>
+  <dgm:styleLbl name="asst3">
+    <dgm:fillClrLst meth="repeat">
+      <a:schemeClr val="accent1"/>
+    </dgm:fillClrLst>
+    <dgm:linClrLst meth="repeat">
+      <a:schemeClr val="lt1"/>
+    </dgm:linClrLst>
+    <dgm:effectClrLst/>
+    <dgm:txLinClrLst/>
+    <dgm:txFillClrLst/>
+    <dgm:txEffectClrLst/>
+  </dgm:styleLbl>
+  <dgm:styleLbl name="asst4">
+    <dgm:fillClrLst meth="repeat">
+      <a:schemeClr val="accent1"/>
+    </dgm:fillClrLst>
+    <dgm:linClrLst meth="repeat">
+      <a:schemeClr val="lt1"/>
+    </dgm:linClrLst>
+    <dgm:effectClrLst/>
+    <dgm:txLinClrLst/>
+    <dgm:txFillClrLst/>
+    <dgm:txEffectClrLst/>
+  </dgm:styleLbl>
+  <dgm:styleLbl name="parChTrans2D1">
+    <dgm:fillClrLst meth="repeat">
+      <a:schemeClr val="accent1">
+        <a:tint val="60000"/>
+      </a:schemeClr>
+    </dgm:fillClrLst>
+    <dgm:linClrLst meth="repeat">
+      <a:schemeClr val="accent1">
+        <a:tint val="60000"/>
+      </a:schemeClr>
+    </dgm:linClrLst>
+    <dgm:effectClrLst/>
+    <dgm:txLinClrLst/>
+    <dgm:txFillClrLst meth="repeat">
+      <a:schemeClr val="lt1"/>
+    </dgm:txFillClrLst>
+    <dgm:txEffectClrLst/>
+  </dgm:styleLbl>
+  <dgm:styleLbl name="parChTrans2D2">
+    <dgm:fillClrLst meth="repeat">
+      <a:schemeClr val="accent1"/>
+    </dgm:fillClrLst>
+    <dgm:linClrLst meth="repeat">
+      <a:schemeClr val="accent1"/>
+    </dgm:linClrLst>
+    <dgm:effectClrLst/>
+    <dgm:txLinClrLst/>
+    <dgm:txFillClrLst meth="repeat">
+      <a:schemeClr val="lt1"/>
+    </dgm:txFillClrLst>
+    <dgm:txEffectClrLst/>
+  </dgm:styleLbl>
+  <dgm:styleLbl name="parChTrans2D3">
+    <dgm:fillClrLst meth="repeat">
+      <a:schemeClr val="accent1"/>
+    </dgm:fillClrLst>
+    <dgm:linClrLst meth="repeat">
+      <a:schemeClr val="accent1"/>
+    </dgm:linClrLst>
+    <dgm:effectClrLst/>
+    <dgm:txLinClrLst/>
+    <dgm:txFillClrLst meth="repeat">
+      <a:schemeClr val="lt1"/>
+    </dgm:txFillClrLst>
+    <dgm:txEffectClrLst/>
+  </dgm:styleLbl>
+  <dgm:styleLbl name="parChTrans2D4">
+    <dgm:fillClrLst meth="repeat">
+      <a:schemeClr val="accent1"/>
+    </dgm:fillClrLst>
+    <dgm:linClrLst meth="repeat">
+      <a:schemeClr val="accent1"/>
+    </dgm:linClrLst>
+    <dgm:effectClrLst/>
+    <dgm:txLinClrLst/>
+    <dgm:txFillClrLst meth="repeat">
+      <a:schemeClr val="lt1"/>
+    </dgm:txFillClrLst>
+    <dgm:txEffectClrLst/>
+  </dgm:styleLbl>
+  <dgm:styleLbl name="parChTrans1D1">
+    <dgm:fillClrLst meth="repeat">
+      <a:schemeClr val="accent1"/>
+    </dgm:fillClrLst>
+    <dgm:linClrLst meth="repeat">
+      <a:schemeClr val="accent1">
+        <a:shade val="60000"/>
+      </a:schemeClr>
+    </dgm:linClrLst>
+    <dgm:effectClrLst/>
+    <dgm:txLinClrLst/>
+    <dgm:txFillClrLst meth="repeat">
+      <a:schemeClr val="tx1"/>
+    </dgm:txFillClrLst>
+    <dgm:txEffectClrLst/>
+  </dgm:styleLbl>
+  <dgm:styleLbl name="parChTrans1D2">
+    <dgm:fillClrLst meth="repeat">
+      <a:schemeClr val="accent1"/>
+    </dgm:fillClrLst>
+    <dgm:linClrLst meth="repeat">
+      <a:schemeClr val="accent1">
+        <a:shade val="60000"/>
+      </a:schemeClr>
+    </dgm:linClrLst>
+    <dgm:effectClrLst/>
+    <dgm:txLinClrLst/>
+    <dgm:txFillClrLst meth="repeat">
+      <a:schemeClr val="tx1"/>
+    </dgm:txFillClrLst>
+    <dgm:txEffectClrLst/>
+  </dgm:styleLbl>
+  <dgm:styleLbl name="parChTrans1D3">
+    <dgm:fillClrLst meth="repeat">
+      <a:schemeClr val="accent1"/>
+    </dgm:fillClrLst>
+    <dgm:linClrLst meth="repeat">
+      <a:schemeClr val="accent1">
+        <a:shade val="80000"/>
+      </a:schemeClr>
+    </dgm:linClrLst>
+    <dgm:effectClrLst/>
+    <dgm:txLinClrLst/>
+    <dgm:txFillClrLst meth="repeat">
+      <a:schemeClr val="tx1"/>
+    </dgm:txFillClrLst>
+    <dgm:txEffectClrLst/>
+  </dgm:styleLbl>
+  <dgm:styleLbl name="parChTrans1D4">
+    <dgm:fillClrLst meth="repeat">
+      <a:schemeClr val="accent1"/>
+    </dgm:fillClrLst>
+    <dgm:linClrLst meth="repeat">
+      <a:schemeClr val="accent1">
+        <a:shade val="80000"/>
+      </a:schemeClr>
+    </dgm:linClrLst>
+    <dgm:effectClrLst/>
+    <dgm:txLinClrLst/>
+    <dgm:txFillClrLst meth="repeat">
+      <a:schemeClr val="tx1"/>
+    </dgm:txFillClrLst>
+    <dgm:txEffectClrLst/>
+  </dgm:styleLbl>
+  <dgm:styleLbl name="fgAcc1">
+    <dgm:fillClrLst meth="repeat">
+      <a:schemeClr val="lt1">
+        <a:alpha val="90000"/>
+      </a:schemeClr>
+    </dgm:fillClrLst>
+    <dgm:linClrLst meth="repeat">
+      <a:schemeClr val="accent1"/>
+    </dgm:linClrLst>
+    <dgm:effectClrLst/>
+    <dgm:txLinClrLst/>
+    <dgm:txFillClrLst meth="repeat">
+      <a:schemeClr val="dk1"/>
+    </dgm:txFillClrLst>
+    <dgm:txEffectClrLst/>
+  </dgm:styleLbl>
+  <dgm:styleLbl name="conFgAcc1">
+    <dgm:fillClrLst meth="repeat">
+      <a:schemeClr val="lt1">
+        <a:alpha val="90000"/>
+      </a:schemeClr>
+    </dgm:fillClrLst>
+    <dgm:linClrLst meth="repeat">
+      <a:schemeClr val="accent1"/>
+    </dgm:linClrLst>
+    <dgm:effectClrLst/>
+    <dgm:txLinClrLst/>
+    <dgm:txFillClrLst meth="repeat">
+      <a:schemeClr val="dk1"/>
+    </dgm:txFillClrLst>
+    <dgm:txEffectClrLst/>
+  </dgm:styleLbl>
+  <dgm:styleLbl name="alignAcc1">
+    <dgm:fillClrLst meth="repeat">
+      <a:schemeClr val="lt1">
+        <a:alpha val="90000"/>
+      </a:schemeClr>
+    </dgm:fillClrLst>
+    <dgm:linClrLst meth="repeat">
+      <a:schemeClr val="accent1"/>
+    </dgm:linClrLst>
+    <dgm:effectClrLst/>
+    <dgm:txLinClrLst/>
+    <dgm:txFillClrLst meth="repeat">
+      <a:schemeClr val="dk1"/>
+    </dgm:txFillClrLst>
+    <dgm:txEffectClrLst/>
+  </dgm:styleLbl>
+  <dgm:styleLbl name="trAlignAcc1">
+    <dgm:fillClrLst meth="repeat">
+      <a:schemeClr val="lt1">
+        <a:alpha val="40000"/>
+      </a:schemeClr>
+    </dgm:fillClrLst>
+    <dgm:linClrLst meth="repeat">
+      <a:schemeClr val="accent1"/>
+    </dgm:linClrLst>
+    <dgm:effectClrLst/>
+    <dgm:txLinClrLst/>
+    <dgm:txFillClrLst meth="repeat">
+      <a:schemeClr val="dk1"/>
+    </dgm:txFillClrLst>
+    <dgm:txEffectClrLst/>
+  </dgm:styleLbl>
+  <dgm:styleLbl name="bgAcc1">
+    <dgm:fillClrLst meth="repeat">
+      <a:schemeClr val="lt1">
+        <a:alpha val="90000"/>
+      </a:schemeClr>
+    </dgm:fillClrLst>
+    <dgm:linClrLst meth="repeat">
+      <a:schemeClr val="accent1"/>
+    </dgm:linClrLst>
+    <dgm:effectClrLst/>
+    <dgm:txLinClrLst/>
+    <dgm:txFillClrLst meth="repeat">
+      <a:schemeClr val="dk1"/>
+    </dgm:txFillClrLst>
+    <dgm:txEffectClrLst/>
+  </dgm:styleLbl>
+  <dgm:styleLbl name="solidFgAcc1">
+    <dgm:fillClrLst meth="repeat">
+      <a:schemeClr val="lt1"/>
+    </dgm:fillClrLst>
+    <dgm:linClrLst meth="repeat">
+      <a:schemeClr val="accent1"/>
+    </dgm:linClrLst>
+    <dgm:effectClrLst/>
+    <dgm:txLinClrLst/>
+    <dgm:txFillClrLst meth="repeat">
+      <a:schemeClr val="dk1"/>
+    </dgm:txFillClrLst>
+    <dgm:txEffectClrLst/>
+  </dgm:styleLbl>
+  <dgm:styleLbl name="solidAlignAcc1">
+    <dgm:fillClrLst meth="repeat">
+      <a:schemeClr val="lt1"/>
+    </dgm:fillClrLst>
+    <dgm:linClrLst meth="repeat">
+      <a:schemeClr val="accent1"/>
+    </dgm:linClrLst>
+    <dgm:effectClrLst/>
+    <dgm:txLinClrLst/>
+    <dgm:txFillClrLst meth="repeat">
+      <a:schemeClr val="dk1"/>
+    </dgm:txFillClrLst>
+    <dgm:txEffectClrLst/>
+  </dgm:styleLbl>
+  <dgm:styleLbl name="solidBgAcc1">
+    <dgm:fillClrLst meth="repeat">
+      <a:schemeClr val="lt1"/>
+    </dgm:fillClrLst>
+    <dgm:linClrLst meth="repeat">
+      <a:schemeClr val="accent1"/>
+    </dgm:linClrLst>
+    <dgm:effectClrLst/>
+    <dgm:txLinClrLst/>
+    <dgm:txFillClrLst meth="repeat">
+      <a:schemeClr val="dk1"/>
+    </dgm:txFillClrLst>
+    <dgm:txEffectClrLst/>
+  </dgm:styleLbl>
+  <dgm:styleLbl name="fgAccFollowNode1">
+    <dgm:fillClrLst meth="repeat">
+      <a:schemeClr val="accent1">
+        <a:alpha val="90000"/>
+        <a:tint val="40000"/>
+      </a:schemeClr>
+    </dgm:fillClrLst>
+    <dgm:linClrLst meth="repeat">
+      <a:schemeClr val="accent1">
+        <a:alpha val="90000"/>
+        <a:tint val="40000"/>
+      </a:schemeClr>
+    </dgm:linClrLst>
+    <dgm:effectClrLst/>
+    <dgm:txLinClrLst/>
+    <dgm:txFillClrLst meth="repeat">
+      <a:schemeClr val="dk1"/>
+    </dgm:txFillClrLst>
+    <dgm:txEffectClrLst/>
+  </dgm:styleLbl>
+  <dgm:styleLbl name="alignAccFollowNode1">
+    <dgm:fillClrLst meth="repeat">
+      <a:schemeClr val="accent1">
+        <a:alpha val="90000"/>
+        <a:tint val="40000"/>
+      </a:schemeClr>
+    </dgm:fillClrLst>
+    <dgm:linClrLst meth="repeat">
+      <a:schemeClr val="accent1">
+        <a:alpha val="90000"/>
+        <a:tint val="40000"/>
+      </a:schemeClr>
+    </dgm:linClrLst>
+    <dgm:effectClrLst/>
+    <dgm:txLinClrLst/>
+    <dgm:txFillClrLst meth="repeat">
+      <a:schemeClr val="dk1"/>
+    </dgm:txFillClrLst>
+    <dgm:txEffectClrLst/>
+  </dgm:styleLbl>
+  <dgm:styleLbl name="bgAccFollowNode1">
+    <dgm:fillClrLst meth="repeat">
+      <a:schemeClr val="accent1">
+        <a:alpha val="90000"/>
+        <a:tint val="40000"/>
+      </a:schemeClr>
+    </dgm:fillClrLst>
+    <dgm:linClrLst meth="repeat">
+      <a:schemeClr val="accent1">
+        <a:alpha val="90000"/>
+        <a:tint val="40000"/>
+      </a:schemeClr>
+    </dgm:linClrLst>
+    <dgm:effectClrLst/>
+    <dgm:txLinClrLst/>
+    <dgm:txFillClrLst meth="repeat">
+      <a:schemeClr val="dk1"/>
+    </dgm:txFillClrLst>
+    <dgm:txEffectClrLst/>
+  </dgm:styleLbl>
+  <dgm:styleLbl name="fgAcc0">
+    <dgm:fillClrLst meth="repeat">
+      <a:schemeClr val="lt1">
+        <a:alpha val="90000"/>
+      </a:schemeClr>
+    </dgm:fillClrLst>
+    <dgm:linClrLst meth="repeat">
+      <a:schemeClr val="accent1"/>
+    </dgm:linClrLst>
+    <dgm:effectClrLst/>
+    <dgm:txLinClrLst/>
+    <dgm:txFillClrLst meth="repeat">
+      <a:schemeClr val="dk1"/>
+    </dgm:txFillClrLst>
+    <dgm:txEffectClrLst/>
+  </dgm:styleLbl>
+  <dgm:styleLbl name="fgAcc2">
+    <dgm:fillClrLst meth="repeat">
+      <a:schemeClr val="lt1">
+        <a:alpha val="90000"/>
+      </a:schemeClr>
+    </dgm:fillClrLst>
+    <dgm:linClrLst meth="repeat">
+      <a:schemeClr val="accent1"/>
+    </dgm:linClrLst>
+    <dgm:effectClrLst/>
+    <dgm:txLinClrLst/>
+    <dgm:txFillClrLst meth="repeat">
+      <a:schemeClr val="dk1"/>
+    </dgm:txFillClrLst>
+    <dgm:txEffectClrLst/>
+  </dgm:styleLbl>
+  <dgm:styleLbl name="fgAcc3">
+    <dgm:fillClrLst meth="repeat">
+      <a:schemeClr val="lt1">
+        <a:alpha val="90000"/>
+      </a:schemeClr>
+    </dgm:fillClrLst>
+    <dgm:linClrLst meth="repeat">
+      <a:schemeClr val="accent1"/>
+    </dgm:linClrLst>
+    <dgm:effectClrLst/>
+    <dgm:txLinClrLst/>
+    <dgm:txFillClrLst meth="repeat">
+      <a:schemeClr val="dk1"/>
+    </dgm:txFillClrLst>
+    <dgm:txEffectClrLst/>
+  </dgm:styleLbl>
+  <dgm:styleLbl name="fgAcc4">
+    <dgm:fillClrLst meth="repeat">
+      <a:schemeClr val="lt1">
+        <a:alpha val="90000"/>
+      </a:schemeClr>
+    </dgm:fillClrLst>
+    <dgm:linClrLst meth="repeat">
+      <a:schemeClr val="accent1"/>
+    </dgm:linClrLst>
+    <dgm:effectClrLst/>
+    <dgm:txLinClrLst/>
+    <dgm:txFillClrLst meth="repeat">
+      <a:schemeClr val="dk1"/>
+    </dgm:txFillClrLst>
+    <dgm:txEffectClrLst/>
+  </dgm:styleLbl>
+  <dgm:styleLbl name="bgShp">
+    <dgm:fillClrLst meth="repeat">
+      <a:schemeClr val="accent1">
+        <a:tint val="40000"/>
+      </a:schemeClr>
+    </dgm:fillClrLst>
+    <dgm:linClrLst meth="repeat">
+      <a:schemeClr val="accent1"/>
+    </dgm:linClrLst>
+    <dgm:effectClrLst/>
+    <dgm:txLinClrLst/>
+    <dgm:txFillClrLst meth="repeat">
+      <a:schemeClr val="dk1"/>
+    </dgm:txFillClrLst>
+    <dgm:txEffectClrLst/>
+  </dgm:styleLbl>
+  <dgm:styleLbl name="dkBgShp">
+    <dgm:fillClrLst meth="repeat">
+      <a:schemeClr val="accent1">
+        <a:shade val="80000"/>
+      </a:schemeClr>
+    </dgm:fillClrLst>
+    <dgm:linClrLst meth="repeat">
+      <a:schemeClr val="accent1"/>
+    </dgm:linClrLst>
+    <dgm:effectClrLst/>
+    <dgm:txLinClrLst/>
+    <dgm:txFillClrLst meth="repeat">
+      <a:schemeClr val="lt1"/>
+    </dgm:txFillClrLst>
+    <dgm:txEffectClrLst/>
+  </dgm:styleLbl>
+  <dgm:styleLbl name="trBgShp">
+    <dgm:fillClrLst meth="repeat">
+      <a:schemeClr val="accent1">
+        <a:tint val="50000"/>
+        <a:alpha val="40000"/>
+      </a:schemeClr>
+    </dgm:fillClrLst>
+    <dgm:linClrLst meth="repeat">
+      <a:schemeClr val="accent1"/>
+    </dgm:linClrLst>
+    <dgm:effectClrLst/>
+    <dgm:txLinClrLst/>
+    <dgm:txFillClrLst meth="repeat">
+      <a:schemeClr val="lt1"/>
+    </dgm:txFillClrLst>
+    <dgm:txEffectClrLst/>
+  </dgm:styleLbl>
+  <dgm:styleLbl name="fgShp">
+    <dgm:fillClrLst meth="repeat">
+      <a:schemeClr val="accent1">
+        <a:tint val="60000"/>
       </a:schemeClr>
     </dgm:fillClrLst>
     <dgm:linClrLst meth="repeat">
@@ -2442,6 +3191,528 @@
     </a:ext>
     <a:ext uri="{C62137D5-CB1D-491B-B009-E17868A290BF}">
       <dgm14:recolorImg xmlns:dgm14="http://schemas.microsoft.com/office/drawing/2010/diagram" val="1"/>
+    </a:ext>
+  </dgm:extLst>
+</dgm:dataModel>
+</file>
+
+<file path=ppt/diagrams/data2.xml><?xml version="1.0" encoding="utf-8"?>
+<dgm:dataModel xmlns:dgm="http://schemas.openxmlformats.org/drawingml/2006/diagram" xmlns:a="http://schemas.openxmlformats.org/drawingml/2006/main">
+  <dgm:ptLst>
+    <dgm:pt modelId="{BCC1B15F-2401-4D71-B7F3-CEEEB7204BCD}" type="doc">
+      <dgm:prSet loTypeId="urn:microsoft.com/office/officeart/2018/2/layout/IconVerticalSolidList" loCatId="icon" qsTypeId="urn:microsoft.com/office/officeart/2005/8/quickstyle/simple1" qsCatId="simple" csTypeId="urn:microsoft.com/office/officeart/2005/8/colors/accent1_2" csCatId="accent1" phldr="1"/>
+      <dgm:spPr/>
+      <dgm:t>
+        <a:bodyPr/>
+        <a:lstStyle/>
+        <a:p>
+          <a:endParaRPr lang="en-US"/>
+        </a:p>
+      </dgm:t>
+    </dgm:pt>
+    <dgm:pt modelId="{23194A46-2EE8-48C7-A793-738A91C52DED}">
+      <dgm:prSet/>
+      <dgm:spPr/>
+      <dgm:t>
+        <a:bodyPr/>
+        <a:lstStyle/>
+        <a:p>
+          <a:r>
+            <a:rPr lang="en-US" b="0" i="0"/>
+            <a:t>Debugging the Model</a:t>
+          </a:r>
+          <a:endParaRPr lang="en-US"/>
+        </a:p>
+      </dgm:t>
+    </dgm:pt>
+    <dgm:pt modelId="{103AE3C7-B977-488F-BD33-6C606B81E2B0}" type="parTrans" cxnId="{98B58327-4C8E-4A49-8E54-BDB2FEF41AE9}">
+      <dgm:prSet/>
+      <dgm:spPr/>
+      <dgm:t>
+        <a:bodyPr/>
+        <a:lstStyle/>
+        <a:p>
+          <a:endParaRPr lang="en-US"/>
+        </a:p>
+      </dgm:t>
+    </dgm:pt>
+    <dgm:pt modelId="{0E4DC467-821D-463E-84E3-7CB33FA33DAA}" type="sibTrans" cxnId="{98B58327-4C8E-4A49-8E54-BDB2FEF41AE9}">
+      <dgm:prSet/>
+      <dgm:spPr/>
+      <dgm:t>
+        <a:bodyPr/>
+        <a:lstStyle/>
+        <a:p>
+          <a:endParaRPr lang="en-US"/>
+        </a:p>
+      </dgm:t>
+    </dgm:pt>
+    <dgm:pt modelId="{0A3BE803-7F08-44B4-8F57-764A475B0B4D}">
+      <dgm:prSet/>
+      <dgm:spPr/>
+      <dgm:t>
+        <a:bodyPr/>
+        <a:lstStyle/>
+        <a:p>
+          <a:r>
+            <a:rPr lang="en-US" b="0" i="0"/>
+            <a:t>Improving the performance of the system</a:t>
+          </a:r>
+          <a:endParaRPr lang="en-US"/>
+        </a:p>
+      </dgm:t>
+    </dgm:pt>
+    <dgm:pt modelId="{963AF3DC-38D5-4018-B7EC-AF9439D8186A}" type="parTrans" cxnId="{19300D7D-DDAF-42B3-94A6-3AAFEC4D5972}">
+      <dgm:prSet/>
+      <dgm:spPr/>
+      <dgm:t>
+        <a:bodyPr/>
+        <a:lstStyle/>
+        <a:p>
+          <a:endParaRPr lang="en-US"/>
+        </a:p>
+      </dgm:t>
+    </dgm:pt>
+    <dgm:pt modelId="{0B6071B8-9C2C-41A8-9A54-3B6211B36280}" type="sibTrans" cxnId="{19300D7D-DDAF-42B3-94A6-3AAFEC4D5972}">
+      <dgm:prSet/>
+      <dgm:spPr/>
+      <dgm:t>
+        <a:bodyPr/>
+        <a:lstStyle/>
+        <a:p>
+          <a:endParaRPr lang="en-US"/>
+        </a:p>
+      </dgm:t>
+    </dgm:pt>
+    <dgm:pt modelId="{4F321679-97E5-4EB7-9DF2-728F392ADA0C}">
+      <dgm:prSet/>
+      <dgm:spPr/>
+      <dgm:t>
+        <a:bodyPr/>
+        <a:lstStyle/>
+        <a:p>
+          <a:r>
+            <a:rPr lang="en-US" b="0" i="0"/>
+            <a:t>Creating and increasing trust and adoption</a:t>
+          </a:r>
+          <a:endParaRPr lang="en-US"/>
+        </a:p>
+      </dgm:t>
+    </dgm:pt>
+    <dgm:pt modelId="{E9AF83AE-CB9D-4D27-9783-1846317802C0}" type="parTrans" cxnId="{EA826A92-3342-4562-B1AD-78B9B1FDF28E}">
+      <dgm:prSet/>
+      <dgm:spPr/>
+      <dgm:t>
+        <a:bodyPr/>
+        <a:lstStyle/>
+        <a:p>
+          <a:endParaRPr lang="en-US"/>
+        </a:p>
+      </dgm:t>
+    </dgm:pt>
+    <dgm:pt modelId="{5A6EC841-FC60-445E-84C0-2CDA1E06E7B5}" type="sibTrans" cxnId="{EA826A92-3342-4562-B1AD-78B9B1FDF28E}">
+      <dgm:prSet/>
+      <dgm:spPr/>
+      <dgm:t>
+        <a:bodyPr/>
+        <a:lstStyle/>
+        <a:p>
+          <a:endParaRPr lang="en-US"/>
+        </a:p>
+      </dgm:t>
+    </dgm:pt>
+    <dgm:pt modelId="{B3264A1D-A59E-45C1-9380-2BC658B3959B}">
+      <dgm:prSet/>
+      <dgm:spPr/>
+      <dgm:t>
+        <a:bodyPr/>
+        <a:lstStyle/>
+        <a:p>
+          <a:r>
+            <a:rPr lang="en-US" b="0" i="0"/>
+            <a:t>Selecting appropriate actions/interventions</a:t>
+          </a:r>
+          <a:endParaRPr lang="en-US"/>
+        </a:p>
+      </dgm:t>
+    </dgm:pt>
+    <dgm:pt modelId="{C644C079-6474-46E4-8BA0-46215A1AF136}" type="parTrans" cxnId="{02D0D8E6-F62D-4DB4-91A8-ABD636F0B55A}">
+      <dgm:prSet/>
+      <dgm:spPr/>
+      <dgm:t>
+        <a:bodyPr/>
+        <a:lstStyle/>
+        <a:p>
+          <a:endParaRPr lang="en-US"/>
+        </a:p>
+      </dgm:t>
+    </dgm:pt>
+    <dgm:pt modelId="{2A76E98C-94F9-4F38-B56C-37157551DDCF}" type="sibTrans" cxnId="{02D0D8E6-F62D-4DB4-91A8-ABD636F0B55A}">
+      <dgm:prSet/>
+      <dgm:spPr/>
+      <dgm:t>
+        <a:bodyPr/>
+        <a:lstStyle/>
+        <a:p>
+          <a:endParaRPr lang="en-US"/>
+        </a:p>
+      </dgm:t>
+    </dgm:pt>
+    <dgm:pt modelId="{8E20CFA6-2DE1-415C-A9C5-C4C73CE85E9B}">
+      <dgm:prSet/>
+      <dgm:spPr/>
+      <dgm:t>
+        <a:bodyPr/>
+        <a:lstStyle/>
+        <a:p>
+          <a:r>
+            <a:rPr lang="en-US" b="0" i="0"/>
+            <a:t>Legal Recourse </a:t>
+          </a:r>
+          <a:endParaRPr lang="en-US"/>
+        </a:p>
+      </dgm:t>
+    </dgm:pt>
+    <dgm:pt modelId="{5EE5D230-00FA-445C-8BAF-DC9E02E8E7AD}" type="parTrans" cxnId="{C7FE1FD2-18D2-4AE4-8036-B5F6699CA218}">
+      <dgm:prSet/>
+      <dgm:spPr/>
+      <dgm:t>
+        <a:bodyPr/>
+        <a:lstStyle/>
+        <a:p>
+          <a:endParaRPr lang="en-US"/>
+        </a:p>
+      </dgm:t>
+    </dgm:pt>
+    <dgm:pt modelId="{7A109293-5CE5-4D30-88EE-5F187AA13F0B}" type="sibTrans" cxnId="{C7FE1FD2-18D2-4AE4-8036-B5F6699CA218}">
+      <dgm:prSet/>
+      <dgm:spPr/>
+      <dgm:t>
+        <a:bodyPr/>
+        <a:lstStyle/>
+        <a:p>
+          <a:endParaRPr lang="en-US"/>
+        </a:p>
+      </dgm:t>
+    </dgm:pt>
+    <dgm:pt modelId="{E8AEE07D-8DC7-4BAB-9133-D120CCE2798D}" type="pres">
+      <dgm:prSet presAssocID="{BCC1B15F-2401-4D71-B7F3-CEEEB7204BCD}" presName="root" presStyleCnt="0">
+        <dgm:presLayoutVars>
+          <dgm:dir/>
+          <dgm:resizeHandles val="exact"/>
+        </dgm:presLayoutVars>
+      </dgm:prSet>
+      <dgm:spPr/>
+    </dgm:pt>
+    <dgm:pt modelId="{BABB7F58-7FF9-4861-921E-F0D3ECA5F9CB}" type="pres">
+      <dgm:prSet presAssocID="{23194A46-2EE8-48C7-A793-738A91C52DED}" presName="compNode" presStyleCnt="0"/>
+      <dgm:spPr/>
+    </dgm:pt>
+    <dgm:pt modelId="{BD30CE05-30B4-4AA2-A329-93E5A9BEB80D}" type="pres">
+      <dgm:prSet presAssocID="{23194A46-2EE8-48C7-A793-738A91C52DED}" presName="bgRect" presStyleLbl="bgShp" presStyleIdx="0" presStyleCnt="5"/>
+      <dgm:spPr/>
+    </dgm:pt>
+    <dgm:pt modelId="{8C9D2655-6EEB-493E-95AD-CBB5130E3C9A}" type="pres">
+      <dgm:prSet presAssocID="{23194A46-2EE8-48C7-A793-738A91C52DED}" presName="iconRect" presStyleLbl="node1" presStyleIdx="0" presStyleCnt="5"/>
+      <dgm:spPr>
+        <a:blipFill>
+          <a:blip xmlns:r="http://schemas.openxmlformats.org/officeDocument/2006/relationships" r:embed="rId1">
+            <a:extLst>
+              <a:ext uri="{28A0092B-C50C-407E-A947-70E740481C1C}">
+                <a14:useLocalDpi xmlns:a14="http://schemas.microsoft.com/office/drawing/2010/main" val="0"/>
+              </a:ext>
+              <a:ext uri="{96DAC541-7B7A-43D3-8B79-37D633B846F1}">
+                <asvg:svgBlip xmlns:asvg="http://schemas.microsoft.com/office/drawing/2016/SVG/main" r:embed="rId2"/>
+              </a:ext>
+            </a:extLst>
+          </a:blip>
+          <a:stretch>
+            <a:fillRect/>
+          </a:stretch>
+        </a:blipFill>
+        <a:ln>
+          <a:noFill/>
+        </a:ln>
+      </dgm:spPr>
+      <dgm:extLst>
+        <a:ext uri="{E40237B7-FDA0-4F09-8148-C483321AD2D9}">
+          <dgm14:cNvPr xmlns:dgm14="http://schemas.microsoft.com/office/drawing/2010/diagram" id="0" name="" descr="Gears"/>
+        </a:ext>
+      </dgm:extLst>
+    </dgm:pt>
+    <dgm:pt modelId="{BE07A383-4209-406A-AB38-8D7461D692B3}" type="pres">
+      <dgm:prSet presAssocID="{23194A46-2EE8-48C7-A793-738A91C52DED}" presName="spaceRect" presStyleCnt="0"/>
+      <dgm:spPr/>
+    </dgm:pt>
+    <dgm:pt modelId="{2533B704-BEE3-4A21-885B-E774B79C2C2C}" type="pres">
+      <dgm:prSet presAssocID="{23194A46-2EE8-48C7-A793-738A91C52DED}" presName="parTx" presStyleLbl="revTx" presStyleIdx="0" presStyleCnt="5">
+        <dgm:presLayoutVars>
+          <dgm:chMax val="0"/>
+          <dgm:chPref val="0"/>
+        </dgm:presLayoutVars>
+      </dgm:prSet>
+      <dgm:spPr/>
+    </dgm:pt>
+    <dgm:pt modelId="{B52C4E29-6BA0-4CA0-BA72-7D946F18D54F}" type="pres">
+      <dgm:prSet presAssocID="{0E4DC467-821D-463E-84E3-7CB33FA33DAA}" presName="sibTrans" presStyleCnt="0"/>
+      <dgm:spPr/>
+    </dgm:pt>
+    <dgm:pt modelId="{8A20C1BA-0F8E-448C-AB78-015F013FD2E1}" type="pres">
+      <dgm:prSet presAssocID="{0A3BE803-7F08-44B4-8F57-764A475B0B4D}" presName="compNode" presStyleCnt="0"/>
+      <dgm:spPr/>
+    </dgm:pt>
+    <dgm:pt modelId="{75312BF4-984F-4C74-94CD-79B29958A9A0}" type="pres">
+      <dgm:prSet presAssocID="{0A3BE803-7F08-44B4-8F57-764A475B0B4D}" presName="bgRect" presStyleLbl="bgShp" presStyleIdx="1" presStyleCnt="5"/>
+      <dgm:spPr/>
+    </dgm:pt>
+    <dgm:pt modelId="{36769F8E-ED04-4EC3-9995-5E4D0839C476}" type="pres">
+      <dgm:prSet presAssocID="{0A3BE803-7F08-44B4-8F57-764A475B0B4D}" presName="iconRect" presStyleLbl="node1" presStyleIdx="1" presStyleCnt="5"/>
+      <dgm:spPr>
+        <a:blipFill>
+          <a:blip xmlns:r="http://schemas.openxmlformats.org/officeDocument/2006/relationships" r:embed="rId3">
+            <a:extLst>
+              <a:ext uri="{28A0092B-C50C-407E-A947-70E740481C1C}">
+                <a14:useLocalDpi xmlns:a14="http://schemas.microsoft.com/office/drawing/2010/main" val="0"/>
+              </a:ext>
+              <a:ext uri="{96DAC541-7B7A-43D3-8B79-37D633B846F1}">
+                <asvg:svgBlip xmlns:asvg="http://schemas.microsoft.com/office/drawing/2016/SVG/main" r:embed="rId4"/>
+              </a:ext>
+            </a:extLst>
+          </a:blip>
+          <a:stretch>
+            <a:fillRect/>
+          </a:stretch>
+        </a:blipFill>
+        <a:ln>
+          <a:noFill/>
+        </a:ln>
+      </dgm:spPr>
+      <dgm:extLst>
+        <a:ext uri="{E40237B7-FDA0-4F09-8148-C483321AD2D9}">
+          <dgm14:cNvPr xmlns:dgm14="http://schemas.microsoft.com/office/drawing/2010/diagram" id="0" name="" descr="Upward trend"/>
+        </a:ext>
+      </dgm:extLst>
+    </dgm:pt>
+    <dgm:pt modelId="{5AFB9BE9-C460-4C8B-9B29-74C07ED8F23E}" type="pres">
+      <dgm:prSet presAssocID="{0A3BE803-7F08-44B4-8F57-764A475B0B4D}" presName="spaceRect" presStyleCnt="0"/>
+      <dgm:spPr/>
+    </dgm:pt>
+    <dgm:pt modelId="{B00BA586-1864-4955-9FD5-2E081602D8D7}" type="pres">
+      <dgm:prSet presAssocID="{0A3BE803-7F08-44B4-8F57-764A475B0B4D}" presName="parTx" presStyleLbl="revTx" presStyleIdx="1" presStyleCnt="5">
+        <dgm:presLayoutVars>
+          <dgm:chMax val="0"/>
+          <dgm:chPref val="0"/>
+        </dgm:presLayoutVars>
+      </dgm:prSet>
+      <dgm:spPr/>
+    </dgm:pt>
+    <dgm:pt modelId="{C9337A2D-DADB-49DF-A4B3-7EF121AAD063}" type="pres">
+      <dgm:prSet presAssocID="{0B6071B8-9C2C-41A8-9A54-3B6211B36280}" presName="sibTrans" presStyleCnt="0"/>
+      <dgm:spPr/>
+    </dgm:pt>
+    <dgm:pt modelId="{7F22110D-066B-4175-AC50-41EF7DC4D10B}" type="pres">
+      <dgm:prSet presAssocID="{4F321679-97E5-4EB7-9DF2-728F392ADA0C}" presName="compNode" presStyleCnt="0"/>
+      <dgm:spPr/>
+    </dgm:pt>
+    <dgm:pt modelId="{7AB4BA2F-5E82-4308-B4AF-47D871F19746}" type="pres">
+      <dgm:prSet presAssocID="{4F321679-97E5-4EB7-9DF2-728F392ADA0C}" presName="bgRect" presStyleLbl="bgShp" presStyleIdx="2" presStyleCnt="5"/>
+      <dgm:spPr/>
+    </dgm:pt>
+    <dgm:pt modelId="{B1E26981-B1DE-4892-90E1-660CC7FC4C2B}" type="pres">
+      <dgm:prSet presAssocID="{4F321679-97E5-4EB7-9DF2-728F392ADA0C}" presName="iconRect" presStyleLbl="node1" presStyleIdx="2" presStyleCnt="5"/>
+      <dgm:spPr>
+        <a:blipFill>
+          <a:blip xmlns:r="http://schemas.openxmlformats.org/officeDocument/2006/relationships" r:embed="rId5">
+            <a:extLst>
+              <a:ext uri="{28A0092B-C50C-407E-A947-70E740481C1C}">
+                <a14:useLocalDpi xmlns:a14="http://schemas.microsoft.com/office/drawing/2010/main" val="0"/>
+              </a:ext>
+              <a:ext uri="{96DAC541-7B7A-43D3-8B79-37D633B846F1}">
+                <asvg:svgBlip xmlns:asvg="http://schemas.microsoft.com/office/drawing/2016/SVG/main" r:embed="rId6"/>
+              </a:ext>
+            </a:extLst>
+          </a:blip>
+          <a:stretch>
+            <a:fillRect/>
+          </a:stretch>
+        </a:blipFill>
+        <a:ln>
+          <a:noFill/>
+        </a:ln>
+      </dgm:spPr>
+      <dgm:extLst>
+        <a:ext uri="{E40237B7-FDA0-4F09-8148-C483321AD2D9}">
+          <dgm14:cNvPr xmlns:dgm14="http://schemas.microsoft.com/office/drawing/2010/diagram" id="0" name="" descr="Handshake"/>
+        </a:ext>
+      </dgm:extLst>
+    </dgm:pt>
+    <dgm:pt modelId="{1DEBDA33-9645-4FA3-A87C-867111D7CB29}" type="pres">
+      <dgm:prSet presAssocID="{4F321679-97E5-4EB7-9DF2-728F392ADA0C}" presName="spaceRect" presStyleCnt="0"/>
+      <dgm:spPr/>
+    </dgm:pt>
+    <dgm:pt modelId="{61459F1A-C44F-479A-AE11-82E91EEC9223}" type="pres">
+      <dgm:prSet presAssocID="{4F321679-97E5-4EB7-9DF2-728F392ADA0C}" presName="parTx" presStyleLbl="revTx" presStyleIdx="2" presStyleCnt="5">
+        <dgm:presLayoutVars>
+          <dgm:chMax val="0"/>
+          <dgm:chPref val="0"/>
+        </dgm:presLayoutVars>
+      </dgm:prSet>
+      <dgm:spPr/>
+    </dgm:pt>
+    <dgm:pt modelId="{2047CDD6-56C7-4644-B0DD-6DE956F538F6}" type="pres">
+      <dgm:prSet presAssocID="{5A6EC841-FC60-445E-84C0-2CDA1E06E7B5}" presName="sibTrans" presStyleCnt="0"/>
+      <dgm:spPr/>
+    </dgm:pt>
+    <dgm:pt modelId="{F7C145FD-8802-490E-A5BB-8465CA297F94}" type="pres">
+      <dgm:prSet presAssocID="{B3264A1D-A59E-45C1-9380-2BC658B3959B}" presName="compNode" presStyleCnt="0"/>
+      <dgm:spPr/>
+    </dgm:pt>
+    <dgm:pt modelId="{19103B3D-778B-459B-B537-759D97E82451}" type="pres">
+      <dgm:prSet presAssocID="{B3264A1D-A59E-45C1-9380-2BC658B3959B}" presName="bgRect" presStyleLbl="bgShp" presStyleIdx="3" presStyleCnt="5"/>
+      <dgm:spPr/>
+    </dgm:pt>
+    <dgm:pt modelId="{D34844D1-D6B0-45BB-9370-25A144C6BAB0}" type="pres">
+      <dgm:prSet presAssocID="{B3264A1D-A59E-45C1-9380-2BC658B3959B}" presName="iconRect" presStyleLbl="node1" presStyleIdx="3" presStyleCnt="5"/>
+      <dgm:spPr>
+        <a:blipFill>
+          <a:blip xmlns:r="http://schemas.openxmlformats.org/officeDocument/2006/relationships" r:embed="rId7">
+            <a:extLst>
+              <a:ext uri="{28A0092B-C50C-407E-A947-70E740481C1C}">
+                <a14:useLocalDpi xmlns:a14="http://schemas.microsoft.com/office/drawing/2010/main" val="0"/>
+              </a:ext>
+              <a:ext uri="{96DAC541-7B7A-43D3-8B79-37D633B846F1}">
+                <asvg:svgBlip xmlns:asvg="http://schemas.microsoft.com/office/drawing/2016/SVG/main" r:embed="rId8"/>
+              </a:ext>
+            </a:extLst>
+          </a:blip>
+          <a:stretch>
+            <a:fillRect/>
+          </a:stretch>
+        </a:blipFill>
+        <a:ln>
+          <a:noFill/>
+        </a:ln>
+      </dgm:spPr>
+      <dgm:extLst>
+        <a:ext uri="{E40237B7-FDA0-4F09-8148-C483321AD2D9}">
+          <dgm14:cNvPr xmlns:dgm14="http://schemas.microsoft.com/office/drawing/2010/diagram" id="0" name="" descr="Checkmark"/>
+        </a:ext>
+      </dgm:extLst>
+    </dgm:pt>
+    <dgm:pt modelId="{BD9B6E99-D851-412B-9E1E-C53A29FCE0AC}" type="pres">
+      <dgm:prSet presAssocID="{B3264A1D-A59E-45C1-9380-2BC658B3959B}" presName="spaceRect" presStyleCnt="0"/>
+      <dgm:spPr/>
+    </dgm:pt>
+    <dgm:pt modelId="{6135E35E-6B2E-47B4-8E5D-A67754C44FC3}" type="pres">
+      <dgm:prSet presAssocID="{B3264A1D-A59E-45C1-9380-2BC658B3959B}" presName="parTx" presStyleLbl="revTx" presStyleIdx="3" presStyleCnt="5">
+        <dgm:presLayoutVars>
+          <dgm:chMax val="0"/>
+          <dgm:chPref val="0"/>
+        </dgm:presLayoutVars>
+      </dgm:prSet>
+      <dgm:spPr/>
+    </dgm:pt>
+    <dgm:pt modelId="{C5BAA011-67B6-46BF-B9CD-44DADACE70C4}" type="pres">
+      <dgm:prSet presAssocID="{2A76E98C-94F9-4F38-B56C-37157551DDCF}" presName="sibTrans" presStyleCnt="0"/>
+      <dgm:spPr/>
+    </dgm:pt>
+    <dgm:pt modelId="{36147BF0-5707-4BA6-900D-7C05072382B6}" type="pres">
+      <dgm:prSet presAssocID="{8E20CFA6-2DE1-415C-A9C5-C4C73CE85E9B}" presName="compNode" presStyleCnt="0"/>
+      <dgm:spPr/>
+    </dgm:pt>
+    <dgm:pt modelId="{003A44AD-0087-4D7F-BB87-5AB717E886DE}" type="pres">
+      <dgm:prSet presAssocID="{8E20CFA6-2DE1-415C-A9C5-C4C73CE85E9B}" presName="bgRect" presStyleLbl="bgShp" presStyleIdx="4" presStyleCnt="5"/>
+      <dgm:spPr/>
+    </dgm:pt>
+    <dgm:pt modelId="{46580EE7-4FE6-44FA-9A58-C5171C7FCB9A}" type="pres">
+      <dgm:prSet presAssocID="{8E20CFA6-2DE1-415C-A9C5-C4C73CE85E9B}" presName="iconRect" presStyleLbl="node1" presStyleIdx="4" presStyleCnt="5"/>
+      <dgm:spPr>
+        <a:blipFill>
+          <a:blip xmlns:r="http://schemas.openxmlformats.org/officeDocument/2006/relationships" r:embed="rId9">
+            <a:extLst>
+              <a:ext uri="{28A0092B-C50C-407E-A947-70E740481C1C}">
+                <a14:useLocalDpi xmlns:a14="http://schemas.microsoft.com/office/drawing/2010/main" val="0"/>
+              </a:ext>
+              <a:ext uri="{96DAC541-7B7A-43D3-8B79-37D633B846F1}">
+                <asvg:svgBlip xmlns:asvg="http://schemas.microsoft.com/office/drawing/2016/SVG/main" r:embed="rId10"/>
+              </a:ext>
+            </a:extLst>
+          </a:blip>
+          <a:stretch>
+            <a:fillRect/>
+          </a:stretch>
+        </a:blipFill>
+        <a:ln>
+          <a:noFill/>
+        </a:ln>
+      </dgm:spPr>
+      <dgm:extLst>
+        <a:ext uri="{E40237B7-FDA0-4F09-8148-C483321AD2D9}">
+          <dgm14:cNvPr xmlns:dgm14="http://schemas.microsoft.com/office/drawing/2010/diagram" id="0" name="" descr="Gavel"/>
+        </a:ext>
+      </dgm:extLst>
+    </dgm:pt>
+    <dgm:pt modelId="{0796A4A0-07A2-4EBA-9BCE-4F86F43F94BC}" type="pres">
+      <dgm:prSet presAssocID="{8E20CFA6-2DE1-415C-A9C5-C4C73CE85E9B}" presName="spaceRect" presStyleCnt="0"/>
+      <dgm:spPr/>
+    </dgm:pt>
+    <dgm:pt modelId="{B31302FA-0459-40FD-BB10-9D42F93ACA7E}" type="pres">
+      <dgm:prSet presAssocID="{8E20CFA6-2DE1-415C-A9C5-C4C73CE85E9B}" presName="parTx" presStyleLbl="revTx" presStyleIdx="4" presStyleCnt="5">
+        <dgm:presLayoutVars>
+          <dgm:chMax val="0"/>
+          <dgm:chPref val="0"/>
+        </dgm:presLayoutVars>
+      </dgm:prSet>
+      <dgm:spPr/>
+    </dgm:pt>
+  </dgm:ptLst>
+  <dgm:cxnLst>
+    <dgm:cxn modelId="{EEF0A222-ECD3-4BA2-9E67-188ACD1E0A11}" type="presOf" srcId="{8E20CFA6-2DE1-415C-A9C5-C4C73CE85E9B}" destId="{B31302FA-0459-40FD-BB10-9D42F93ACA7E}" srcOrd="0" destOrd="0" presId="urn:microsoft.com/office/officeart/2018/2/layout/IconVerticalSolidList"/>
+    <dgm:cxn modelId="{98B58327-4C8E-4A49-8E54-BDB2FEF41AE9}" srcId="{BCC1B15F-2401-4D71-B7F3-CEEEB7204BCD}" destId="{23194A46-2EE8-48C7-A793-738A91C52DED}" srcOrd="0" destOrd="0" parTransId="{103AE3C7-B977-488F-BD33-6C606B81E2B0}" sibTransId="{0E4DC467-821D-463E-84E3-7CB33FA33DAA}"/>
+    <dgm:cxn modelId="{201DB47A-2A43-42F2-9578-07AEDE1FC79E}" type="presOf" srcId="{0A3BE803-7F08-44B4-8F57-764A475B0B4D}" destId="{B00BA586-1864-4955-9FD5-2E081602D8D7}" srcOrd="0" destOrd="0" presId="urn:microsoft.com/office/officeart/2018/2/layout/IconVerticalSolidList"/>
+    <dgm:cxn modelId="{19300D7D-DDAF-42B3-94A6-3AAFEC4D5972}" srcId="{BCC1B15F-2401-4D71-B7F3-CEEEB7204BCD}" destId="{0A3BE803-7F08-44B4-8F57-764A475B0B4D}" srcOrd="1" destOrd="0" parTransId="{963AF3DC-38D5-4018-B7EC-AF9439D8186A}" sibTransId="{0B6071B8-9C2C-41A8-9A54-3B6211B36280}"/>
+    <dgm:cxn modelId="{5F3F2484-93DF-498C-9BB9-B51735A758C1}" type="presOf" srcId="{23194A46-2EE8-48C7-A793-738A91C52DED}" destId="{2533B704-BEE3-4A21-885B-E774B79C2C2C}" srcOrd="0" destOrd="0" presId="urn:microsoft.com/office/officeart/2018/2/layout/IconVerticalSolidList"/>
+    <dgm:cxn modelId="{EA826A92-3342-4562-B1AD-78B9B1FDF28E}" srcId="{BCC1B15F-2401-4D71-B7F3-CEEEB7204BCD}" destId="{4F321679-97E5-4EB7-9DF2-728F392ADA0C}" srcOrd="2" destOrd="0" parTransId="{E9AF83AE-CB9D-4D27-9783-1846317802C0}" sibTransId="{5A6EC841-FC60-445E-84C0-2CDA1E06E7B5}"/>
+    <dgm:cxn modelId="{F6FF42AC-749E-44DB-81D0-50C1EFEA177C}" type="presOf" srcId="{BCC1B15F-2401-4D71-B7F3-CEEEB7204BCD}" destId="{E8AEE07D-8DC7-4BAB-9133-D120CCE2798D}" srcOrd="0" destOrd="0" presId="urn:microsoft.com/office/officeart/2018/2/layout/IconVerticalSolidList"/>
+    <dgm:cxn modelId="{320605C7-0812-48E7-AB0B-B780B5B76105}" type="presOf" srcId="{4F321679-97E5-4EB7-9DF2-728F392ADA0C}" destId="{61459F1A-C44F-479A-AE11-82E91EEC9223}" srcOrd="0" destOrd="0" presId="urn:microsoft.com/office/officeart/2018/2/layout/IconVerticalSolidList"/>
+    <dgm:cxn modelId="{C7FE1FD2-18D2-4AE4-8036-B5F6699CA218}" srcId="{BCC1B15F-2401-4D71-B7F3-CEEEB7204BCD}" destId="{8E20CFA6-2DE1-415C-A9C5-C4C73CE85E9B}" srcOrd="4" destOrd="0" parTransId="{5EE5D230-00FA-445C-8BAF-DC9E02E8E7AD}" sibTransId="{7A109293-5CE5-4D30-88EE-5F187AA13F0B}"/>
+    <dgm:cxn modelId="{02D0D8E6-F62D-4DB4-91A8-ABD636F0B55A}" srcId="{BCC1B15F-2401-4D71-B7F3-CEEEB7204BCD}" destId="{B3264A1D-A59E-45C1-9380-2BC658B3959B}" srcOrd="3" destOrd="0" parTransId="{C644C079-6474-46E4-8BA0-46215A1AF136}" sibTransId="{2A76E98C-94F9-4F38-B56C-37157551DDCF}"/>
+    <dgm:cxn modelId="{0FA2C6F3-3366-4667-B18E-6F8786D00FAD}" type="presOf" srcId="{B3264A1D-A59E-45C1-9380-2BC658B3959B}" destId="{6135E35E-6B2E-47B4-8E5D-A67754C44FC3}" srcOrd="0" destOrd="0" presId="urn:microsoft.com/office/officeart/2018/2/layout/IconVerticalSolidList"/>
+    <dgm:cxn modelId="{F12DA31A-324D-4D2C-98BB-1E34F89F86D7}" type="presParOf" srcId="{E8AEE07D-8DC7-4BAB-9133-D120CCE2798D}" destId="{BABB7F58-7FF9-4861-921E-F0D3ECA5F9CB}" srcOrd="0" destOrd="0" presId="urn:microsoft.com/office/officeart/2018/2/layout/IconVerticalSolidList"/>
+    <dgm:cxn modelId="{EDCA429C-D95F-439F-9CEF-DEE148CC461E}" type="presParOf" srcId="{BABB7F58-7FF9-4861-921E-F0D3ECA5F9CB}" destId="{BD30CE05-30B4-4AA2-A329-93E5A9BEB80D}" srcOrd="0" destOrd="0" presId="urn:microsoft.com/office/officeart/2018/2/layout/IconVerticalSolidList"/>
+    <dgm:cxn modelId="{B55F436C-228B-4CD7-81FC-F97AC4D2D172}" type="presParOf" srcId="{BABB7F58-7FF9-4861-921E-F0D3ECA5F9CB}" destId="{8C9D2655-6EEB-493E-95AD-CBB5130E3C9A}" srcOrd="1" destOrd="0" presId="urn:microsoft.com/office/officeart/2018/2/layout/IconVerticalSolidList"/>
+    <dgm:cxn modelId="{DBB2EE50-F3FA-4FA8-9805-5B8A37724509}" type="presParOf" srcId="{BABB7F58-7FF9-4861-921E-F0D3ECA5F9CB}" destId="{BE07A383-4209-406A-AB38-8D7461D692B3}" srcOrd="2" destOrd="0" presId="urn:microsoft.com/office/officeart/2018/2/layout/IconVerticalSolidList"/>
+    <dgm:cxn modelId="{E80418C7-5C4C-4300-AE47-69911ED54C98}" type="presParOf" srcId="{BABB7F58-7FF9-4861-921E-F0D3ECA5F9CB}" destId="{2533B704-BEE3-4A21-885B-E774B79C2C2C}" srcOrd="3" destOrd="0" presId="urn:microsoft.com/office/officeart/2018/2/layout/IconVerticalSolidList"/>
+    <dgm:cxn modelId="{D0DDAF39-1EAB-4F30-852F-F6859B7652A0}" type="presParOf" srcId="{E8AEE07D-8DC7-4BAB-9133-D120CCE2798D}" destId="{B52C4E29-6BA0-4CA0-BA72-7D946F18D54F}" srcOrd="1" destOrd="0" presId="urn:microsoft.com/office/officeart/2018/2/layout/IconVerticalSolidList"/>
+    <dgm:cxn modelId="{FA2463CB-B68F-4B33-8BAD-DFB5D65AE77E}" type="presParOf" srcId="{E8AEE07D-8DC7-4BAB-9133-D120CCE2798D}" destId="{8A20C1BA-0F8E-448C-AB78-015F013FD2E1}" srcOrd="2" destOrd="0" presId="urn:microsoft.com/office/officeart/2018/2/layout/IconVerticalSolidList"/>
+    <dgm:cxn modelId="{77B14B1F-CD53-409B-BDF5-4C24EF6F4C03}" type="presParOf" srcId="{8A20C1BA-0F8E-448C-AB78-015F013FD2E1}" destId="{75312BF4-984F-4C74-94CD-79B29958A9A0}" srcOrd="0" destOrd="0" presId="urn:microsoft.com/office/officeart/2018/2/layout/IconVerticalSolidList"/>
+    <dgm:cxn modelId="{9AA5EB87-3269-44E8-9D24-A3F37A252C03}" type="presParOf" srcId="{8A20C1BA-0F8E-448C-AB78-015F013FD2E1}" destId="{36769F8E-ED04-4EC3-9995-5E4D0839C476}" srcOrd="1" destOrd="0" presId="urn:microsoft.com/office/officeart/2018/2/layout/IconVerticalSolidList"/>
+    <dgm:cxn modelId="{D21DF619-41D6-4251-BE6A-4A275F33883E}" type="presParOf" srcId="{8A20C1BA-0F8E-448C-AB78-015F013FD2E1}" destId="{5AFB9BE9-C460-4C8B-9B29-74C07ED8F23E}" srcOrd="2" destOrd="0" presId="urn:microsoft.com/office/officeart/2018/2/layout/IconVerticalSolidList"/>
+    <dgm:cxn modelId="{B11CE3B8-E623-42DC-944F-D320E0AD73E1}" type="presParOf" srcId="{8A20C1BA-0F8E-448C-AB78-015F013FD2E1}" destId="{B00BA586-1864-4955-9FD5-2E081602D8D7}" srcOrd="3" destOrd="0" presId="urn:microsoft.com/office/officeart/2018/2/layout/IconVerticalSolidList"/>
+    <dgm:cxn modelId="{E70E0EEC-D8FE-4DD2-8ACF-966FF9B878F5}" type="presParOf" srcId="{E8AEE07D-8DC7-4BAB-9133-D120CCE2798D}" destId="{C9337A2D-DADB-49DF-A4B3-7EF121AAD063}" srcOrd="3" destOrd="0" presId="urn:microsoft.com/office/officeart/2018/2/layout/IconVerticalSolidList"/>
+    <dgm:cxn modelId="{1A68455C-CD50-4714-8097-59A6498EC934}" type="presParOf" srcId="{E8AEE07D-8DC7-4BAB-9133-D120CCE2798D}" destId="{7F22110D-066B-4175-AC50-41EF7DC4D10B}" srcOrd="4" destOrd="0" presId="urn:microsoft.com/office/officeart/2018/2/layout/IconVerticalSolidList"/>
+    <dgm:cxn modelId="{0B7A3533-B9B8-4DFC-AD20-6AF9C1CE57B3}" type="presParOf" srcId="{7F22110D-066B-4175-AC50-41EF7DC4D10B}" destId="{7AB4BA2F-5E82-4308-B4AF-47D871F19746}" srcOrd="0" destOrd="0" presId="urn:microsoft.com/office/officeart/2018/2/layout/IconVerticalSolidList"/>
+    <dgm:cxn modelId="{40BBE768-9705-4F27-A33A-4B399E637F64}" type="presParOf" srcId="{7F22110D-066B-4175-AC50-41EF7DC4D10B}" destId="{B1E26981-B1DE-4892-90E1-660CC7FC4C2B}" srcOrd="1" destOrd="0" presId="urn:microsoft.com/office/officeart/2018/2/layout/IconVerticalSolidList"/>
+    <dgm:cxn modelId="{0D9A7361-1460-43D6-A30B-B0E926EB2EEC}" type="presParOf" srcId="{7F22110D-066B-4175-AC50-41EF7DC4D10B}" destId="{1DEBDA33-9645-4FA3-A87C-867111D7CB29}" srcOrd="2" destOrd="0" presId="urn:microsoft.com/office/officeart/2018/2/layout/IconVerticalSolidList"/>
+    <dgm:cxn modelId="{86F83444-F20E-41C8-83F3-D456C31229B2}" type="presParOf" srcId="{7F22110D-066B-4175-AC50-41EF7DC4D10B}" destId="{61459F1A-C44F-479A-AE11-82E91EEC9223}" srcOrd="3" destOrd="0" presId="urn:microsoft.com/office/officeart/2018/2/layout/IconVerticalSolidList"/>
+    <dgm:cxn modelId="{74BA07FC-9AEB-4AEE-B64F-15443C84ADCC}" type="presParOf" srcId="{E8AEE07D-8DC7-4BAB-9133-D120CCE2798D}" destId="{2047CDD6-56C7-4644-B0DD-6DE956F538F6}" srcOrd="5" destOrd="0" presId="urn:microsoft.com/office/officeart/2018/2/layout/IconVerticalSolidList"/>
+    <dgm:cxn modelId="{106EA8DE-2961-4BF8-AFFC-F458769D1FC9}" type="presParOf" srcId="{E8AEE07D-8DC7-4BAB-9133-D120CCE2798D}" destId="{F7C145FD-8802-490E-A5BB-8465CA297F94}" srcOrd="6" destOrd="0" presId="urn:microsoft.com/office/officeart/2018/2/layout/IconVerticalSolidList"/>
+    <dgm:cxn modelId="{6F0757D1-1EF4-43F0-AA0E-6F19D2E6C6AE}" type="presParOf" srcId="{F7C145FD-8802-490E-A5BB-8465CA297F94}" destId="{19103B3D-778B-459B-B537-759D97E82451}" srcOrd="0" destOrd="0" presId="urn:microsoft.com/office/officeart/2018/2/layout/IconVerticalSolidList"/>
+    <dgm:cxn modelId="{9CE3978D-E154-48E2-8DC6-749AB488E250}" type="presParOf" srcId="{F7C145FD-8802-490E-A5BB-8465CA297F94}" destId="{D34844D1-D6B0-45BB-9370-25A144C6BAB0}" srcOrd="1" destOrd="0" presId="urn:microsoft.com/office/officeart/2018/2/layout/IconVerticalSolidList"/>
+    <dgm:cxn modelId="{11B17CBA-DB6D-4C8C-BE18-B8020880C64D}" type="presParOf" srcId="{F7C145FD-8802-490E-A5BB-8465CA297F94}" destId="{BD9B6E99-D851-412B-9E1E-C53A29FCE0AC}" srcOrd="2" destOrd="0" presId="urn:microsoft.com/office/officeart/2018/2/layout/IconVerticalSolidList"/>
+    <dgm:cxn modelId="{564A98F8-550A-440E-8FD7-DD40A97E01AA}" type="presParOf" srcId="{F7C145FD-8802-490E-A5BB-8465CA297F94}" destId="{6135E35E-6B2E-47B4-8E5D-A67754C44FC3}" srcOrd="3" destOrd="0" presId="urn:microsoft.com/office/officeart/2018/2/layout/IconVerticalSolidList"/>
+    <dgm:cxn modelId="{E10972B0-FCB5-45AE-A7D4-619A13B76864}" type="presParOf" srcId="{E8AEE07D-8DC7-4BAB-9133-D120CCE2798D}" destId="{C5BAA011-67B6-46BF-B9CD-44DADACE70C4}" srcOrd="7" destOrd="0" presId="urn:microsoft.com/office/officeart/2018/2/layout/IconVerticalSolidList"/>
+    <dgm:cxn modelId="{BE400C0F-983E-4E9A-9AFA-7A5B2B1BEF8B}" type="presParOf" srcId="{E8AEE07D-8DC7-4BAB-9133-D120CCE2798D}" destId="{36147BF0-5707-4BA6-900D-7C05072382B6}" srcOrd="8" destOrd="0" presId="urn:microsoft.com/office/officeart/2018/2/layout/IconVerticalSolidList"/>
+    <dgm:cxn modelId="{3445627A-47E3-497B-9FA0-E2C681C44A9E}" type="presParOf" srcId="{36147BF0-5707-4BA6-900D-7C05072382B6}" destId="{003A44AD-0087-4D7F-BB87-5AB717E886DE}" srcOrd="0" destOrd="0" presId="urn:microsoft.com/office/officeart/2018/2/layout/IconVerticalSolidList"/>
+    <dgm:cxn modelId="{6AA9AE24-AA58-4074-A755-91894D5EB7C2}" type="presParOf" srcId="{36147BF0-5707-4BA6-900D-7C05072382B6}" destId="{46580EE7-4FE6-44FA-9A58-C5171C7FCB9A}" srcOrd="1" destOrd="0" presId="urn:microsoft.com/office/officeart/2018/2/layout/IconVerticalSolidList"/>
+    <dgm:cxn modelId="{5F138D24-7B49-455B-AE1C-3C05CB27F82C}" type="presParOf" srcId="{36147BF0-5707-4BA6-900D-7C05072382B6}" destId="{0796A4A0-07A2-4EBA-9BCE-4F86F43F94BC}" srcOrd="2" destOrd="0" presId="urn:microsoft.com/office/officeart/2018/2/layout/IconVerticalSolidList"/>
+    <dgm:cxn modelId="{92F47622-A633-4D9B-BEBB-999A09167D29}" type="presParOf" srcId="{36147BF0-5707-4BA6-900D-7C05072382B6}" destId="{B31302FA-0459-40FD-BB10-9D42F93ACA7E}" srcOrd="3" destOrd="0" presId="urn:microsoft.com/office/officeart/2018/2/layout/IconVerticalSolidList"/>
+  </dgm:cxnLst>
+  <dgm:bg/>
+  <dgm:whole/>
+  <dgm:extLst>
+    <a:ext uri="http://schemas.microsoft.com/office/drawing/2008/diagram">
+      <dsp:dataModelExt xmlns:dsp="http://schemas.microsoft.com/office/drawing/2008/diagram" relId="rId7" minVer="http://schemas.openxmlformats.org/drawingml/2006/diagram"/>
     </a:ext>
   </dgm:extLst>
 </dgm:dataModel>
@@ -4081,6 +5352,778 @@
 </dsp:drawing>
 </file>
 
+<file path=ppt/diagrams/drawing2.xml><?xml version="1.0" encoding="utf-8"?>
+<dsp:drawing xmlns:dgm="http://schemas.openxmlformats.org/drawingml/2006/diagram" xmlns:dsp="http://schemas.microsoft.com/office/drawing/2008/diagram" xmlns:a="http://schemas.openxmlformats.org/drawingml/2006/main">
+  <dsp:spTree>
+    <dsp:nvGrpSpPr>
+      <dsp:cNvPr id="0" name=""/>
+      <dsp:cNvGrpSpPr/>
+    </dsp:nvGrpSpPr>
+    <dsp:grpSpPr/>
+    <dsp:sp modelId="{BD30CE05-30B4-4AA2-A329-93E5A9BEB80D}">
+      <dsp:nvSpPr>
+        <dsp:cNvPr id="0" name=""/>
+        <dsp:cNvSpPr/>
+      </dsp:nvSpPr>
+      <dsp:spPr>
+        <a:xfrm>
+          <a:off x="0" y="3400"/>
+          <a:ext cx="11360700" cy="724290"/>
+        </a:xfrm>
+        <a:prstGeom prst="roundRect">
+          <a:avLst>
+            <a:gd name="adj" fmla="val 10000"/>
+          </a:avLst>
+        </a:prstGeom>
+        <a:solidFill>
+          <a:schemeClr val="accent1">
+            <a:tint val="40000"/>
+            <a:hueOff val="0"/>
+            <a:satOff val="0"/>
+            <a:lumOff val="0"/>
+            <a:alphaOff val="0"/>
+          </a:schemeClr>
+        </a:solidFill>
+        <a:ln>
+          <a:noFill/>
+        </a:ln>
+        <a:effectLst/>
+      </dsp:spPr>
+      <dsp:style>
+        <a:lnRef idx="0">
+          <a:scrgbClr r="0" g="0" b="0"/>
+        </a:lnRef>
+        <a:fillRef idx="1">
+          <a:scrgbClr r="0" g="0" b="0"/>
+        </a:fillRef>
+        <a:effectRef idx="0">
+          <a:scrgbClr r="0" g="0" b="0"/>
+        </a:effectRef>
+        <a:fontRef idx="minor"/>
+      </dsp:style>
+    </dsp:sp>
+    <dsp:sp modelId="{8C9D2655-6EEB-493E-95AD-CBB5130E3C9A}">
+      <dsp:nvSpPr>
+        <dsp:cNvPr id="0" name=""/>
+        <dsp:cNvSpPr/>
+      </dsp:nvSpPr>
+      <dsp:spPr>
+        <a:xfrm>
+          <a:off x="219097" y="166365"/>
+          <a:ext cx="398359" cy="398359"/>
+        </a:xfrm>
+        <a:prstGeom prst="rect">
+          <a:avLst/>
+        </a:prstGeom>
+        <a:blipFill>
+          <a:blip xmlns:r="http://schemas.openxmlformats.org/officeDocument/2006/relationships" r:embed="rId1">
+            <a:extLst>
+              <a:ext uri="{28A0092B-C50C-407E-A947-70E740481C1C}">
+                <a14:useLocalDpi xmlns:a14="http://schemas.microsoft.com/office/drawing/2010/main" val="0"/>
+              </a:ext>
+              <a:ext uri="{96DAC541-7B7A-43D3-8B79-37D633B846F1}">
+                <asvg:svgBlip xmlns:asvg="http://schemas.microsoft.com/office/drawing/2016/SVG/main" r:embed="rId2"/>
+              </a:ext>
+            </a:extLst>
+          </a:blip>
+          <a:stretch>
+            <a:fillRect/>
+          </a:stretch>
+        </a:blipFill>
+        <a:ln w="25400" cap="flat" cmpd="sng" algn="ctr">
+          <a:noFill/>
+          <a:prstDash val="solid"/>
+        </a:ln>
+        <a:effectLst/>
+      </dsp:spPr>
+      <dsp:style>
+        <a:lnRef idx="2">
+          <a:scrgbClr r="0" g="0" b="0"/>
+        </a:lnRef>
+        <a:fillRef idx="1">
+          <a:scrgbClr r="0" g="0" b="0"/>
+        </a:fillRef>
+        <a:effectRef idx="0">
+          <a:scrgbClr r="0" g="0" b="0"/>
+        </a:effectRef>
+        <a:fontRef idx="minor">
+          <a:schemeClr val="lt1"/>
+        </a:fontRef>
+      </dsp:style>
+    </dsp:sp>
+    <dsp:sp modelId="{2533B704-BEE3-4A21-885B-E774B79C2C2C}">
+      <dsp:nvSpPr>
+        <dsp:cNvPr id="0" name=""/>
+        <dsp:cNvSpPr/>
+      </dsp:nvSpPr>
+      <dsp:spPr>
+        <a:xfrm>
+          <a:off x="836555" y="3400"/>
+          <a:ext cx="10524144" cy="724290"/>
+        </a:xfrm>
+        <a:prstGeom prst="rect">
+          <a:avLst/>
+        </a:prstGeom>
+        <a:noFill/>
+        <a:ln>
+          <a:noFill/>
+        </a:ln>
+        <a:effectLst/>
+      </dsp:spPr>
+      <dsp:style>
+        <a:lnRef idx="0">
+          <a:scrgbClr r="0" g="0" b="0"/>
+        </a:lnRef>
+        <a:fillRef idx="0">
+          <a:scrgbClr r="0" g="0" b="0"/>
+        </a:fillRef>
+        <a:effectRef idx="0">
+          <a:scrgbClr r="0" g="0" b="0"/>
+        </a:effectRef>
+        <a:fontRef idx="minor"/>
+      </dsp:style>
+      <dsp:txBody>
+        <a:bodyPr spcFirstLastPara="0" vert="horz" wrap="square" lIns="76654" tIns="76654" rIns="76654" bIns="76654" numCol="1" spcCol="1270" anchor="ctr" anchorCtr="0">
+          <a:noAutofit/>
+        </a:bodyPr>
+        <a:lstStyle/>
+        <a:p>
+          <a:pPr marL="0" lvl="0" indent="0" algn="l" defTabSz="844550">
+            <a:lnSpc>
+              <a:spcPct val="90000"/>
+            </a:lnSpc>
+            <a:spcBef>
+              <a:spcPct val="0"/>
+            </a:spcBef>
+            <a:spcAft>
+              <a:spcPct val="35000"/>
+            </a:spcAft>
+            <a:buNone/>
+          </a:pPr>
+          <a:r>
+            <a:rPr lang="en-US" sz="1900" b="0" i="0" kern="1200"/>
+            <a:t>Debugging the Model</a:t>
+          </a:r>
+          <a:endParaRPr lang="en-US" sz="1900" kern="1200"/>
+        </a:p>
+      </dsp:txBody>
+      <dsp:txXfrm>
+        <a:off x="836555" y="3400"/>
+        <a:ext cx="10524144" cy="724290"/>
+      </dsp:txXfrm>
+    </dsp:sp>
+    <dsp:sp modelId="{75312BF4-984F-4C74-94CD-79B29958A9A0}">
+      <dsp:nvSpPr>
+        <dsp:cNvPr id="0" name=""/>
+        <dsp:cNvSpPr/>
+      </dsp:nvSpPr>
+      <dsp:spPr>
+        <a:xfrm>
+          <a:off x="0" y="908763"/>
+          <a:ext cx="11360700" cy="724290"/>
+        </a:xfrm>
+        <a:prstGeom prst="roundRect">
+          <a:avLst>
+            <a:gd name="adj" fmla="val 10000"/>
+          </a:avLst>
+        </a:prstGeom>
+        <a:solidFill>
+          <a:schemeClr val="accent1">
+            <a:tint val="40000"/>
+            <a:hueOff val="0"/>
+            <a:satOff val="0"/>
+            <a:lumOff val="0"/>
+            <a:alphaOff val="0"/>
+          </a:schemeClr>
+        </a:solidFill>
+        <a:ln>
+          <a:noFill/>
+        </a:ln>
+        <a:effectLst/>
+      </dsp:spPr>
+      <dsp:style>
+        <a:lnRef idx="0">
+          <a:scrgbClr r="0" g="0" b="0"/>
+        </a:lnRef>
+        <a:fillRef idx="1">
+          <a:scrgbClr r="0" g="0" b="0"/>
+        </a:fillRef>
+        <a:effectRef idx="0">
+          <a:scrgbClr r="0" g="0" b="0"/>
+        </a:effectRef>
+        <a:fontRef idx="minor"/>
+      </dsp:style>
+    </dsp:sp>
+    <dsp:sp modelId="{36769F8E-ED04-4EC3-9995-5E4D0839C476}">
+      <dsp:nvSpPr>
+        <dsp:cNvPr id="0" name=""/>
+        <dsp:cNvSpPr/>
+      </dsp:nvSpPr>
+      <dsp:spPr>
+        <a:xfrm>
+          <a:off x="219097" y="1071728"/>
+          <a:ext cx="398359" cy="398359"/>
+        </a:xfrm>
+        <a:prstGeom prst="rect">
+          <a:avLst/>
+        </a:prstGeom>
+        <a:blipFill>
+          <a:blip xmlns:r="http://schemas.openxmlformats.org/officeDocument/2006/relationships" r:embed="rId3">
+            <a:extLst>
+              <a:ext uri="{28A0092B-C50C-407E-A947-70E740481C1C}">
+                <a14:useLocalDpi xmlns:a14="http://schemas.microsoft.com/office/drawing/2010/main" val="0"/>
+              </a:ext>
+              <a:ext uri="{96DAC541-7B7A-43D3-8B79-37D633B846F1}">
+                <asvg:svgBlip xmlns:asvg="http://schemas.microsoft.com/office/drawing/2016/SVG/main" r:embed="rId4"/>
+              </a:ext>
+            </a:extLst>
+          </a:blip>
+          <a:stretch>
+            <a:fillRect/>
+          </a:stretch>
+        </a:blipFill>
+        <a:ln w="25400" cap="flat" cmpd="sng" algn="ctr">
+          <a:noFill/>
+          <a:prstDash val="solid"/>
+        </a:ln>
+        <a:effectLst/>
+      </dsp:spPr>
+      <dsp:style>
+        <a:lnRef idx="2">
+          <a:scrgbClr r="0" g="0" b="0"/>
+        </a:lnRef>
+        <a:fillRef idx="1">
+          <a:scrgbClr r="0" g="0" b="0"/>
+        </a:fillRef>
+        <a:effectRef idx="0">
+          <a:scrgbClr r="0" g="0" b="0"/>
+        </a:effectRef>
+        <a:fontRef idx="minor">
+          <a:schemeClr val="lt1"/>
+        </a:fontRef>
+      </dsp:style>
+    </dsp:sp>
+    <dsp:sp modelId="{B00BA586-1864-4955-9FD5-2E081602D8D7}">
+      <dsp:nvSpPr>
+        <dsp:cNvPr id="0" name=""/>
+        <dsp:cNvSpPr/>
+      </dsp:nvSpPr>
+      <dsp:spPr>
+        <a:xfrm>
+          <a:off x="836555" y="908763"/>
+          <a:ext cx="10524144" cy="724290"/>
+        </a:xfrm>
+        <a:prstGeom prst="rect">
+          <a:avLst/>
+        </a:prstGeom>
+        <a:noFill/>
+        <a:ln>
+          <a:noFill/>
+        </a:ln>
+        <a:effectLst/>
+      </dsp:spPr>
+      <dsp:style>
+        <a:lnRef idx="0">
+          <a:scrgbClr r="0" g="0" b="0"/>
+        </a:lnRef>
+        <a:fillRef idx="0">
+          <a:scrgbClr r="0" g="0" b="0"/>
+        </a:fillRef>
+        <a:effectRef idx="0">
+          <a:scrgbClr r="0" g="0" b="0"/>
+        </a:effectRef>
+        <a:fontRef idx="minor"/>
+      </dsp:style>
+      <dsp:txBody>
+        <a:bodyPr spcFirstLastPara="0" vert="horz" wrap="square" lIns="76654" tIns="76654" rIns="76654" bIns="76654" numCol="1" spcCol="1270" anchor="ctr" anchorCtr="0">
+          <a:noAutofit/>
+        </a:bodyPr>
+        <a:lstStyle/>
+        <a:p>
+          <a:pPr marL="0" lvl="0" indent="0" algn="l" defTabSz="844550">
+            <a:lnSpc>
+              <a:spcPct val="90000"/>
+            </a:lnSpc>
+            <a:spcBef>
+              <a:spcPct val="0"/>
+            </a:spcBef>
+            <a:spcAft>
+              <a:spcPct val="35000"/>
+            </a:spcAft>
+            <a:buNone/>
+          </a:pPr>
+          <a:r>
+            <a:rPr lang="en-US" sz="1900" b="0" i="0" kern="1200"/>
+            <a:t>Improving the performance of the system</a:t>
+          </a:r>
+          <a:endParaRPr lang="en-US" sz="1900" kern="1200"/>
+        </a:p>
+      </dsp:txBody>
+      <dsp:txXfrm>
+        <a:off x="836555" y="908763"/>
+        <a:ext cx="10524144" cy="724290"/>
+      </dsp:txXfrm>
+    </dsp:sp>
+    <dsp:sp modelId="{7AB4BA2F-5E82-4308-B4AF-47D871F19746}">
+      <dsp:nvSpPr>
+        <dsp:cNvPr id="0" name=""/>
+        <dsp:cNvSpPr/>
+      </dsp:nvSpPr>
+      <dsp:spPr>
+        <a:xfrm>
+          <a:off x="0" y="1814126"/>
+          <a:ext cx="11360700" cy="724290"/>
+        </a:xfrm>
+        <a:prstGeom prst="roundRect">
+          <a:avLst>
+            <a:gd name="adj" fmla="val 10000"/>
+          </a:avLst>
+        </a:prstGeom>
+        <a:solidFill>
+          <a:schemeClr val="accent1">
+            <a:tint val="40000"/>
+            <a:hueOff val="0"/>
+            <a:satOff val="0"/>
+            <a:lumOff val="0"/>
+            <a:alphaOff val="0"/>
+          </a:schemeClr>
+        </a:solidFill>
+        <a:ln>
+          <a:noFill/>
+        </a:ln>
+        <a:effectLst/>
+      </dsp:spPr>
+      <dsp:style>
+        <a:lnRef idx="0">
+          <a:scrgbClr r="0" g="0" b="0"/>
+        </a:lnRef>
+        <a:fillRef idx="1">
+          <a:scrgbClr r="0" g="0" b="0"/>
+        </a:fillRef>
+        <a:effectRef idx="0">
+          <a:scrgbClr r="0" g="0" b="0"/>
+        </a:effectRef>
+        <a:fontRef idx="minor"/>
+      </dsp:style>
+    </dsp:sp>
+    <dsp:sp modelId="{B1E26981-B1DE-4892-90E1-660CC7FC4C2B}">
+      <dsp:nvSpPr>
+        <dsp:cNvPr id="0" name=""/>
+        <dsp:cNvSpPr/>
+      </dsp:nvSpPr>
+      <dsp:spPr>
+        <a:xfrm>
+          <a:off x="219097" y="1977092"/>
+          <a:ext cx="398359" cy="398359"/>
+        </a:xfrm>
+        <a:prstGeom prst="rect">
+          <a:avLst/>
+        </a:prstGeom>
+        <a:blipFill>
+          <a:blip xmlns:r="http://schemas.openxmlformats.org/officeDocument/2006/relationships" r:embed="rId5">
+            <a:extLst>
+              <a:ext uri="{28A0092B-C50C-407E-A947-70E740481C1C}">
+                <a14:useLocalDpi xmlns:a14="http://schemas.microsoft.com/office/drawing/2010/main" val="0"/>
+              </a:ext>
+              <a:ext uri="{96DAC541-7B7A-43D3-8B79-37D633B846F1}">
+                <asvg:svgBlip xmlns:asvg="http://schemas.microsoft.com/office/drawing/2016/SVG/main" r:embed="rId6"/>
+              </a:ext>
+            </a:extLst>
+          </a:blip>
+          <a:stretch>
+            <a:fillRect/>
+          </a:stretch>
+        </a:blipFill>
+        <a:ln w="25400" cap="flat" cmpd="sng" algn="ctr">
+          <a:noFill/>
+          <a:prstDash val="solid"/>
+        </a:ln>
+        <a:effectLst/>
+      </dsp:spPr>
+      <dsp:style>
+        <a:lnRef idx="2">
+          <a:scrgbClr r="0" g="0" b="0"/>
+        </a:lnRef>
+        <a:fillRef idx="1">
+          <a:scrgbClr r="0" g="0" b="0"/>
+        </a:fillRef>
+        <a:effectRef idx="0">
+          <a:scrgbClr r="0" g="0" b="0"/>
+        </a:effectRef>
+        <a:fontRef idx="minor">
+          <a:schemeClr val="lt1"/>
+        </a:fontRef>
+      </dsp:style>
+    </dsp:sp>
+    <dsp:sp modelId="{61459F1A-C44F-479A-AE11-82E91EEC9223}">
+      <dsp:nvSpPr>
+        <dsp:cNvPr id="0" name=""/>
+        <dsp:cNvSpPr/>
+      </dsp:nvSpPr>
+      <dsp:spPr>
+        <a:xfrm>
+          <a:off x="836555" y="1814126"/>
+          <a:ext cx="10524144" cy="724290"/>
+        </a:xfrm>
+        <a:prstGeom prst="rect">
+          <a:avLst/>
+        </a:prstGeom>
+        <a:noFill/>
+        <a:ln>
+          <a:noFill/>
+        </a:ln>
+        <a:effectLst/>
+      </dsp:spPr>
+      <dsp:style>
+        <a:lnRef idx="0">
+          <a:scrgbClr r="0" g="0" b="0"/>
+        </a:lnRef>
+        <a:fillRef idx="0">
+          <a:scrgbClr r="0" g="0" b="0"/>
+        </a:fillRef>
+        <a:effectRef idx="0">
+          <a:scrgbClr r="0" g="0" b="0"/>
+        </a:effectRef>
+        <a:fontRef idx="minor"/>
+      </dsp:style>
+      <dsp:txBody>
+        <a:bodyPr spcFirstLastPara="0" vert="horz" wrap="square" lIns="76654" tIns="76654" rIns="76654" bIns="76654" numCol="1" spcCol="1270" anchor="ctr" anchorCtr="0">
+          <a:noAutofit/>
+        </a:bodyPr>
+        <a:lstStyle/>
+        <a:p>
+          <a:pPr marL="0" lvl="0" indent="0" algn="l" defTabSz="844550">
+            <a:lnSpc>
+              <a:spcPct val="90000"/>
+            </a:lnSpc>
+            <a:spcBef>
+              <a:spcPct val="0"/>
+            </a:spcBef>
+            <a:spcAft>
+              <a:spcPct val="35000"/>
+            </a:spcAft>
+            <a:buNone/>
+          </a:pPr>
+          <a:r>
+            <a:rPr lang="en-US" sz="1900" b="0" i="0" kern="1200"/>
+            <a:t>Creating and increasing trust and adoption</a:t>
+          </a:r>
+          <a:endParaRPr lang="en-US" sz="1900" kern="1200"/>
+        </a:p>
+      </dsp:txBody>
+      <dsp:txXfrm>
+        <a:off x="836555" y="1814126"/>
+        <a:ext cx="10524144" cy="724290"/>
+      </dsp:txXfrm>
+    </dsp:sp>
+    <dsp:sp modelId="{19103B3D-778B-459B-B537-759D97E82451}">
+      <dsp:nvSpPr>
+        <dsp:cNvPr id="0" name=""/>
+        <dsp:cNvSpPr/>
+      </dsp:nvSpPr>
+      <dsp:spPr>
+        <a:xfrm>
+          <a:off x="0" y="2719489"/>
+          <a:ext cx="11360700" cy="724290"/>
+        </a:xfrm>
+        <a:prstGeom prst="roundRect">
+          <a:avLst>
+            <a:gd name="adj" fmla="val 10000"/>
+          </a:avLst>
+        </a:prstGeom>
+        <a:solidFill>
+          <a:schemeClr val="accent1">
+            <a:tint val="40000"/>
+            <a:hueOff val="0"/>
+            <a:satOff val="0"/>
+            <a:lumOff val="0"/>
+            <a:alphaOff val="0"/>
+          </a:schemeClr>
+        </a:solidFill>
+        <a:ln>
+          <a:noFill/>
+        </a:ln>
+        <a:effectLst/>
+      </dsp:spPr>
+      <dsp:style>
+        <a:lnRef idx="0">
+          <a:scrgbClr r="0" g="0" b="0"/>
+        </a:lnRef>
+        <a:fillRef idx="1">
+          <a:scrgbClr r="0" g="0" b="0"/>
+        </a:fillRef>
+        <a:effectRef idx="0">
+          <a:scrgbClr r="0" g="0" b="0"/>
+        </a:effectRef>
+        <a:fontRef idx="minor"/>
+      </dsp:style>
+    </dsp:sp>
+    <dsp:sp modelId="{D34844D1-D6B0-45BB-9370-25A144C6BAB0}">
+      <dsp:nvSpPr>
+        <dsp:cNvPr id="0" name=""/>
+        <dsp:cNvSpPr/>
+      </dsp:nvSpPr>
+      <dsp:spPr>
+        <a:xfrm>
+          <a:off x="219097" y="2882455"/>
+          <a:ext cx="398359" cy="398359"/>
+        </a:xfrm>
+        <a:prstGeom prst="rect">
+          <a:avLst/>
+        </a:prstGeom>
+        <a:blipFill>
+          <a:blip xmlns:r="http://schemas.openxmlformats.org/officeDocument/2006/relationships" r:embed="rId7">
+            <a:extLst>
+              <a:ext uri="{28A0092B-C50C-407E-A947-70E740481C1C}">
+                <a14:useLocalDpi xmlns:a14="http://schemas.microsoft.com/office/drawing/2010/main" val="0"/>
+              </a:ext>
+              <a:ext uri="{96DAC541-7B7A-43D3-8B79-37D633B846F1}">
+                <asvg:svgBlip xmlns:asvg="http://schemas.microsoft.com/office/drawing/2016/SVG/main" r:embed="rId8"/>
+              </a:ext>
+            </a:extLst>
+          </a:blip>
+          <a:stretch>
+            <a:fillRect/>
+          </a:stretch>
+        </a:blipFill>
+        <a:ln w="25400" cap="flat" cmpd="sng" algn="ctr">
+          <a:noFill/>
+          <a:prstDash val="solid"/>
+        </a:ln>
+        <a:effectLst/>
+      </dsp:spPr>
+      <dsp:style>
+        <a:lnRef idx="2">
+          <a:scrgbClr r="0" g="0" b="0"/>
+        </a:lnRef>
+        <a:fillRef idx="1">
+          <a:scrgbClr r="0" g="0" b="0"/>
+        </a:fillRef>
+        <a:effectRef idx="0">
+          <a:scrgbClr r="0" g="0" b="0"/>
+        </a:effectRef>
+        <a:fontRef idx="minor">
+          <a:schemeClr val="lt1"/>
+        </a:fontRef>
+      </dsp:style>
+    </dsp:sp>
+    <dsp:sp modelId="{6135E35E-6B2E-47B4-8E5D-A67754C44FC3}">
+      <dsp:nvSpPr>
+        <dsp:cNvPr id="0" name=""/>
+        <dsp:cNvSpPr/>
+      </dsp:nvSpPr>
+      <dsp:spPr>
+        <a:xfrm>
+          <a:off x="836555" y="2719489"/>
+          <a:ext cx="10524144" cy="724290"/>
+        </a:xfrm>
+        <a:prstGeom prst="rect">
+          <a:avLst/>
+        </a:prstGeom>
+        <a:noFill/>
+        <a:ln>
+          <a:noFill/>
+        </a:ln>
+        <a:effectLst/>
+      </dsp:spPr>
+      <dsp:style>
+        <a:lnRef idx="0">
+          <a:scrgbClr r="0" g="0" b="0"/>
+        </a:lnRef>
+        <a:fillRef idx="0">
+          <a:scrgbClr r="0" g="0" b="0"/>
+        </a:fillRef>
+        <a:effectRef idx="0">
+          <a:scrgbClr r="0" g="0" b="0"/>
+        </a:effectRef>
+        <a:fontRef idx="minor"/>
+      </dsp:style>
+      <dsp:txBody>
+        <a:bodyPr spcFirstLastPara="0" vert="horz" wrap="square" lIns="76654" tIns="76654" rIns="76654" bIns="76654" numCol="1" spcCol="1270" anchor="ctr" anchorCtr="0">
+          <a:noAutofit/>
+        </a:bodyPr>
+        <a:lstStyle/>
+        <a:p>
+          <a:pPr marL="0" lvl="0" indent="0" algn="l" defTabSz="844550">
+            <a:lnSpc>
+              <a:spcPct val="90000"/>
+            </a:lnSpc>
+            <a:spcBef>
+              <a:spcPct val="0"/>
+            </a:spcBef>
+            <a:spcAft>
+              <a:spcPct val="35000"/>
+            </a:spcAft>
+            <a:buNone/>
+          </a:pPr>
+          <a:r>
+            <a:rPr lang="en-US" sz="1900" b="0" i="0" kern="1200"/>
+            <a:t>Selecting appropriate actions/interventions</a:t>
+          </a:r>
+          <a:endParaRPr lang="en-US" sz="1900" kern="1200"/>
+        </a:p>
+      </dsp:txBody>
+      <dsp:txXfrm>
+        <a:off x="836555" y="2719489"/>
+        <a:ext cx="10524144" cy="724290"/>
+      </dsp:txXfrm>
+    </dsp:sp>
+    <dsp:sp modelId="{003A44AD-0087-4D7F-BB87-5AB717E886DE}">
+      <dsp:nvSpPr>
+        <dsp:cNvPr id="0" name=""/>
+        <dsp:cNvSpPr/>
+      </dsp:nvSpPr>
+      <dsp:spPr>
+        <a:xfrm>
+          <a:off x="0" y="3624853"/>
+          <a:ext cx="11360700" cy="724290"/>
+        </a:xfrm>
+        <a:prstGeom prst="roundRect">
+          <a:avLst>
+            <a:gd name="adj" fmla="val 10000"/>
+          </a:avLst>
+        </a:prstGeom>
+        <a:solidFill>
+          <a:schemeClr val="accent1">
+            <a:tint val="40000"/>
+            <a:hueOff val="0"/>
+            <a:satOff val="0"/>
+            <a:lumOff val="0"/>
+            <a:alphaOff val="0"/>
+          </a:schemeClr>
+        </a:solidFill>
+        <a:ln>
+          <a:noFill/>
+        </a:ln>
+        <a:effectLst/>
+      </dsp:spPr>
+      <dsp:style>
+        <a:lnRef idx="0">
+          <a:scrgbClr r="0" g="0" b="0"/>
+        </a:lnRef>
+        <a:fillRef idx="1">
+          <a:scrgbClr r="0" g="0" b="0"/>
+        </a:fillRef>
+        <a:effectRef idx="0">
+          <a:scrgbClr r="0" g="0" b="0"/>
+        </a:effectRef>
+        <a:fontRef idx="minor"/>
+      </dsp:style>
+    </dsp:sp>
+    <dsp:sp modelId="{46580EE7-4FE6-44FA-9A58-C5171C7FCB9A}">
+      <dsp:nvSpPr>
+        <dsp:cNvPr id="0" name=""/>
+        <dsp:cNvSpPr/>
+      </dsp:nvSpPr>
+      <dsp:spPr>
+        <a:xfrm>
+          <a:off x="219097" y="3787818"/>
+          <a:ext cx="398359" cy="398359"/>
+        </a:xfrm>
+        <a:prstGeom prst="rect">
+          <a:avLst/>
+        </a:prstGeom>
+        <a:blipFill>
+          <a:blip xmlns:r="http://schemas.openxmlformats.org/officeDocument/2006/relationships" r:embed="rId9">
+            <a:extLst>
+              <a:ext uri="{28A0092B-C50C-407E-A947-70E740481C1C}">
+                <a14:useLocalDpi xmlns:a14="http://schemas.microsoft.com/office/drawing/2010/main" val="0"/>
+              </a:ext>
+              <a:ext uri="{96DAC541-7B7A-43D3-8B79-37D633B846F1}">
+                <asvg:svgBlip xmlns:asvg="http://schemas.microsoft.com/office/drawing/2016/SVG/main" r:embed="rId10"/>
+              </a:ext>
+            </a:extLst>
+          </a:blip>
+          <a:stretch>
+            <a:fillRect/>
+          </a:stretch>
+        </a:blipFill>
+        <a:ln w="25400" cap="flat" cmpd="sng" algn="ctr">
+          <a:noFill/>
+          <a:prstDash val="solid"/>
+        </a:ln>
+        <a:effectLst/>
+      </dsp:spPr>
+      <dsp:style>
+        <a:lnRef idx="2">
+          <a:scrgbClr r="0" g="0" b="0"/>
+        </a:lnRef>
+        <a:fillRef idx="1">
+          <a:scrgbClr r="0" g="0" b="0"/>
+        </a:fillRef>
+        <a:effectRef idx="0">
+          <a:scrgbClr r="0" g="0" b="0"/>
+        </a:effectRef>
+        <a:fontRef idx="minor">
+          <a:schemeClr val="lt1"/>
+        </a:fontRef>
+      </dsp:style>
+    </dsp:sp>
+    <dsp:sp modelId="{B31302FA-0459-40FD-BB10-9D42F93ACA7E}">
+      <dsp:nvSpPr>
+        <dsp:cNvPr id="0" name=""/>
+        <dsp:cNvSpPr/>
+      </dsp:nvSpPr>
+      <dsp:spPr>
+        <a:xfrm>
+          <a:off x="836555" y="3624853"/>
+          <a:ext cx="10524144" cy="724290"/>
+        </a:xfrm>
+        <a:prstGeom prst="rect">
+          <a:avLst/>
+        </a:prstGeom>
+        <a:noFill/>
+        <a:ln>
+          <a:noFill/>
+        </a:ln>
+        <a:effectLst/>
+      </dsp:spPr>
+      <dsp:style>
+        <a:lnRef idx="0">
+          <a:scrgbClr r="0" g="0" b="0"/>
+        </a:lnRef>
+        <a:fillRef idx="0">
+          <a:scrgbClr r="0" g="0" b="0"/>
+        </a:fillRef>
+        <a:effectRef idx="0">
+          <a:scrgbClr r="0" g="0" b="0"/>
+        </a:effectRef>
+        <a:fontRef idx="minor"/>
+      </dsp:style>
+      <dsp:txBody>
+        <a:bodyPr spcFirstLastPara="0" vert="horz" wrap="square" lIns="76654" tIns="76654" rIns="76654" bIns="76654" numCol="1" spcCol="1270" anchor="ctr" anchorCtr="0">
+          <a:noAutofit/>
+        </a:bodyPr>
+        <a:lstStyle/>
+        <a:p>
+          <a:pPr marL="0" lvl="0" indent="0" algn="l" defTabSz="844550">
+            <a:lnSpc>
+              <a:spcPct val="90000"/>
+            </a:lnSpc>
+            <a:spcBef>
+              <a:spcPct val="0"/>
+            </a:spcBef>
+            <a:spcAft>
+              <a:spcPct val="35000"/>
+            </a:spcAft>
+            <a:buNone/>
+          </a:pPr>
+          <a:r>
+            <a:rPr lang="en-US" sz="1900" b="0" i="0" kern="1200"/>
+            <a:t>Legal Recourse </a:t>
+          </a:r>
+          <a:endParaRPr lang="en-US" sz="1900" kern="1200"/>
+        </a:p>
+      </dsp:txBody>
+      <dsp:txXfrm>
+        <a:off x="836555" y="3624853"/>
+        <a:ext cx="10524144" cy="724290"/>
+      </dsp:txXfrm>
+    </dsp:sp>
+  </dsp:spTree>
+</dsp:drawing>
+</file>
+
 <file path=ppt/diagrams/layout1.xml><?xml version="1.0" encoding="utf-8"?>
 <dgm:layoutDef xmlns:dgm="http://schemas.openxmlformats.org/drawingml/2006/diagram" xmlns:a="http://schemas.openxmlformats.org/drawingml/2006/main" uniqueId="urn:microsoft.com/office/officeart/2005/8/layout/process5">
   <dgm:title val=""/>
@@ -4252,7 +6295,1335 @@
 </dgm:layoutDef>
 </file>
 
+<file path=ppt/diagrams/layout2.xml><?xml version="1.0" encoding="utf-8"?>
+<dgm:layoutDef xmlns:dgm="http://schemas.openxmlformats.org/drawingml/2006/diagram" xmlns:a="http://schemas.openxmlformats.org/drawingml/2006/main" uniqueId="urn:microsoft.com/office/officeart/2018/2/layout/IconVerticalSolidList">
+  <dgm:title val="Icon Vertical Solid List"/>
+  <dgm:desc val="Use to show a series of visuals from top to bottom with Level 1 or Level 1 and Level 2 text grouped in a shape. Works best with icons or small pictures with lengthier descriptions."/>
+  <dgm:catLst>
+    <dgm:cat type="icon" pri="500"/>
+  </dgm:catLst>
+  <dgm:sampData useDef="1">
+    <dgm:dataModel>
+      <dgm:ptLst/>
+      <dgm:bg/>
+      <dgm:whole/>
+    </dgm:dataModel>
+  </dgm:sampData>
+  <dgm:styleData useDef="1">
+    <dgm:dataModel>
+      <dgm:ptLst/>
+      <dgm:bg/>
+      <dgm:whole/>
+    </dgm:dataModel>
+  </dgm:styleData>
+  <dgm:clrData useDef="1">
+    <dgm:dataModel>
+      <dgm:ptLst/>
+      <dgm:bg/>
+      <dgm:whole/>
+    </dgm:dataModel>
+  </dgm:clrData>
+  <dgm:layoutNode name="root">
+    <dgm:varLst>
+      <dgm:dir/>
+      <dgm:resizeHandles val="exact"/>
+    </dgm:varLst>
+    <dgm:choose name="Name0">
+      <dgm:if name="Name1" axis="self" func="var" arg="dir" op="equ" val="norm">
+        <dgm:alg type="lin">
+          <dgm:param type="linDir" val="fromT"/>
+          <dgm:param type="nodeHorzAlign" val="l"/>
+        </dgm:alg>
+      </dgm:if>
+      <dgm:else name="Name2">
+        <dgm:alg type="lin">
+          <dgm:param type="linDir" val="fromT"/>
+          <dgm:param type="nodeHorzAlign" val="r"/>
+        </dgm:alg>
+      </dgm:else>
+    </dgm:choose>
+    <dgm:shape xmlns:r="http://schemas.openxmlformats.org/officeDocument/2006/relationships" r:blip="">
+      <dgm:adjLst/>
+    </dgm:shape>
+    <dgm:presOf/>
+    <dgm:choose name="Name3">
+      <dgm:if name="Name4" axis="ch" ptType="node" func="cnt" op="lte" val="3">
+        <dgm:constrLst>
+          <dgm:constr type="h" for="ch" forName="compNode" refType="h" fact="0.3"/>
+          <dgm:constr type="w" for="ch" forName="compNode" refType="w"/>
+          <dgm:constr type="h" for="ch" forName="sibTrans" refType="h" refFor="ch" refForName="compNode" fact="0.25"/>
+          <dgm:constr type="primFontSz" for="des" forName="parTx" val="25"/>
+          <dgm:constr type="primFontSz" for="des" forName="desTx" refType="primFontSz" refFor="des" refForName="parTx" op="lte" fact="0.75"/>
+          <dgm:constr type="h" for="des" forName="compNode" op="equ"/>
+          <dgm:constr type="h" for="des" forName="bgRect" op="equ"/>
+          <dgm:constr type="h" for="des" forName="iconRect" op="equ"/>
+          <dgm:constr type="w" for="des" forName="iconRect" op="equ"/>
+          <dgm:constr type="h" for="des" forName="spaceRect" op="equ"/>
+          <dgm:constr type="h" for="des" forName="parTx" op="equ"/>
+          <dgm:constr type="h" for="des" forName="desTx" op="equ"/>
+        </dgm:constrLst>
+      </dgm:if>
+      <dgm:if name="Name5" axis="ch" ptType="node" func="cnt" op="lte" val="4">
+        <dgm:constrLst>
+          <dgm:constr type="h" for="ch" forName="compNode" refType="h" fact="0.3"/>
+          <dgm:constr type="w" for="ch" forName="compNode" refType="w"/>
+          <dgm:constr type="h" for="ch" forName="sibTrans" refType="h" refFor="ch" refForName="compNode" fact="0.25"/>
+          <dgm:constr type="primFontSz" for="des" forName="parTx" val="22"/>
+          <dgm:constr type="primFontSz" for="des" forName="desTx" refType="primFontSz" refFor="des" refForName="parTx" op="lte" fact="0.75"/>
+          <dgm:constr type="h" for="des" forName="compNode" op="equ"/>
+          <dgm:constr type="h" for="des" forName="bgRect" op="equ"/>
+          <dgm:constr type="h" for="des" forName="iconRect" op="equ"/>
+          <dgm:constr type="w" for="des" forName="iconRect" op="equ"/>
+          <dgm:constr type="h" for="des" forName="spaceRect" op="equ"/>
+          <dgm:constr type="h" for="des" forName="parTx" op="equ"/>
+          <dgm:constr type="h" for="des" forName="desTx" op="equ"/>
+        </dgm:constrLst>
+      </dgm:if>
+      <dgm:if name="Name6" axis="ch" ptType="node" func="cnt" op="lte" val="6">
+        <dgm:constrLst>
+          <dgm:constr type="h" for="ch" forName="compNode" refType="h" fact="0.3"/>
+          <dgm:constr type="w" for="ch" forName="compNode" refType="w"/>
+          <dgm:constr type="h" for="ch" forName="sibTrans" refType="h" refFor="ch" refForName="compNode" fact="0.25"/>
+          <dgm:constr type="primFontSz" for="des" forName="parTx" val="19"/>
+          <dgm:constr type="primFontSz" for="des" forName="desTx" refType="primFontSz" refFor="des" refForName="parTx" op="lte" fact="0.75"/>
+          <dgm:constr type="h" for="des" forName="compNode" op="equ"/>
+          <dgm:constr type="h" for="des" forName="bgRect" op="equ"/>
+          <dgm:constr type="h" for="des" forName="iconRect" op="equ"/>
+          <dgm:constr type="w" for="des" forName="iconRect" op="equ"/>
+          <dgm:constr type="h" for="des" forName="spaceRect" op="equ"/>
+          <dgm:constr type="h" for="des" forName="parTx" op="equ"/>
+          <dgm:constr type="h" for="des" forName="desTx" op="equ"/>
+        </dgm:constrLst>
+      </dgm:if>
+      <dgm:else name="Name7">
+        <dgm:constrLst>
+          <dgm:constr type="h" for="ch" forName="compNode" refType="h" fact="0.3"/>
+          <dgm:constr type="w" for="ch" forName="compNode" refType="w"/>
+          <dgm:constr type="h" for="ch" forName="sibTrans" refType="h" refFor="ch" refForName="compNode" fact="0.25"/>
+          <dgm:constr type="primFontSz" for="des" forName="parTx" val="16"/>
+          <dgm:constr type="primFontSz" for="des" forName="desTx" refType="primFontSz" refFor="des" refForName="parTx" op="lte" fact="0.75"/>
+          <dgm:constr type="h" for="des" forName="compNode" op="equ"/>
+          <dgm:constr type="h" for="des" forName="bgRect" op="equ"/>
+          <dgm:constr type="h" for="des" forName="iconRect" op="equ"/>
+          <dgm:constr type="w" for="des" forName="iconRect" op="equ"/>
+          <dgm:constr type="h" for="des" forName="spaceRect" op="equ"/>
+          <dgm:constr type="h" for="des" forName="parTx" op="equ"/>
+          <dgm:constr type="h" for="des" forName="desTx" op="equ"/>
+        </dgm:constrLst>
+      </dgm:else>
+    </dgm:choose>
+    <dgm:ruleLst>
+      <dgm:rule type="h" for="ch" forName="compNode" val="0" fact="NaN" max="NaN"/>
+    </dgm:ruleLst>
+    <dgm:forEach name="Name8" axis="ch" ptType="node">
+      <dgm:layoutNode name="compNode">
+        <dgm:alg type="composite"/>
+        <dgm:shape xmlns:r="http://schemas.openxmlformats.org/officeDocument/2006/relationships" r:blip="">
+          <dgm:adjLst/>
+        </dgm:shape>
+        <dgm:presOf axis="self"/>
+        <dgm:choose name="Name9">
+          <dgm:if name="Name10" axis="ch" ptType="node" func="cnt" op="gte" val="1">
+            <dgm:constrLst>
+              <dgm:constr type="w" for="ch" forName="bgRect" refType="w"/>
+              <dgm:constr type="h" for="ch" forName="bgRect" refType="h"/>
+              <dgm:constr type="l" for="ch" forName="bgRect"/>
+              <dgm:constr type="t" for="ch" forName="bgRect"/>
+              <dgm:constr type="h" for="ch" forName="iconRect" refType="h" fact="0.55"/>
+              <dgm:constr type="w" for="ch" forName="iconRect" refType="h" refFor="ch" refForName="iconRect"/>
+              <dgm:constr type="l" for="ch" forName="iconRect" refType="h" refFor="ch" refForName="iconRect" fact="0.55"/>
+              <dgm:constr type="ctrY" for="ch" forName="iconRect" refType="ctrY" refFor="ch" refForName="bgRect"/>
+              <dgm:constr type="w" for="ch" forName="spaceRect" refType="l" refFor="ch" refForName="iconRect"/>
+              <dgm:constr type="h" for="ch" forName="spaceRect" refType="h"/>
+              <dgm:constr type="l" for="ch" forName="spaceRect" refType="r" refFor="ch" refForName="iconRect"/>
+              <dgm:constr type="t" for="ch" forName="spaceRect"/>
+              <dgm:constr type="w" for="ch" forName="parTx" refType="w" fact="0.45"/>
+              <dgm:constr type="h" for="ch" forName="parTx" refType="h"/>
+              <dgm:constr type="l" for="ch" forName="parTx" refType="r" refFor="ch" refForName="spaceRect"/>
+              <dgm:constr type="t" for="ch" forName="parTx"/>
+              <dgm:constr type="h" for="ch" forName="desTx" refType="h"/>
+              <dgm:constr type="l" for="ch" forName="desTx" refType="r" refFor="ch" refForName="parTx"/>
+              <dgm:constr type="t" for="ch" forName="desTx"/>
+            </dgm:constrLst>
+          </dgm:if>
+          <dgm:else name="Name11">
+            <dgm:constrLst>
+              <dgm:constr type="w" for="ch" forName="bgRect" refType="w"/>
+              <dgm:constr type="h" for="ch" forName="bgRect" refType="h"/>
+              <dgm:constr type="l" for="ch" forName="bgRect"/>
+              <dgm:constr type="t" for="ch" forName="bgRect"/>
+              <dgm:constr type="h" for="ch" forName="iconRect" refType="h" fact="0.55"/>
+              <dgm:constr type="w" for="ch" forName="iconRect" refType="h" refFor="ch" refForName="iconRect"/>
+              <dgm:constr type="l" for="ch" forName="iconRect" refType="h" refFor="ch" refForName="iconRect" fact="0.55"/>
+              <dgm:constr type="ctrY" for="ch" forName="iconRect" refType="ctrY" refFor="ch" refForName="bgRect"/>
+              <dgm:constr type="w" for="ch" forName="spaceRect" refType="l" refFor="ch" refForName="iconRect"/>
+              <dgm:constr type="h" for="ch" forName="spaceRect" refType="h"/>
+              <dgm:constr type="l" for="ch" forName="spaceRect" refType="r" refFor="ch" refForName="iconRect"/>
+              <dgm:constr type="t" for="ch" forName="spaceRect"/>
+              <dgm:constr type="h" for="ch" forName="parTx" refType="h"/>
+              <dgm:constr type="l" for="ch" forName="parTx" refType="r" refFor="ch" refForName="spaceRect"/>
+              <dgm:constr type="t" for="ch" forName="parTx"/>
+            </dgm:constrLst>
+          </dgm:else>
+        </dgm:choose>
+        <dgm:ruleLst>
+          <dgm:rule type="h" val="INF" fact="NaN" max="NaN"/>
+        </dgm:ruleLst>
+        <dgm:layoutNode name="bgRect" styleLbl="bgShp">
+          <dgm:alg type="sp"/>
+          <dgm:shape xmlns:r="http://schemas.openxmlformats.org/officeDocument/2006/relationships" type="roundRect" r:blip="">
+            <dgm:adjLst>
+              <dgm:adj idx="1" val="0.1"/>
+            </dgm:adjLst>
+          </dgm:shape>
+          <dgm:presOf/>
+          <dgm:constrLst/>
+          <dgm:ruleLst/>
+        </dgm:layoutNode>
+        <dgm:layoutNode name="iconRect" styleLbl="node1">
+          <dgm:alg type="sp"/>
+          <dgm:shape xmlns:r="http://schemas.openxmlformats.org/officeDocument/2006/relationships" type="rect" r:blip="" blipPhldr="1">
+            <dgm:adjLst/>
+          </dgm:shape>
+          <dgm:presOf/>
+          <dgm:constrLst/>
+          <dgm:ruleLst/>
+        </dgm:layoutNode>
+        <dgm:layoutNode name="spaceRect">
+          <dgm:alg type="sp"/>
+          <dgm:shape xmlns:r="http://schemas.openxmlformats.org/officeDocument/2006/relationships" r:blip="">
+            <dgm:adjLst/>
+          </dgm:shape>
+          <dgm:presOf/>
+          <dgm:constrLst/>
+          <dgm:ruleLst/>
+        </dgm:layoutNode>
+        <dgm:layoutNode name="parTx" styleLbl="revTx">
+          <dgm:varLst>
+            <dgm:chMax val="0"/>
+            <dgm:chPref val="0"/>
+          </dgm:varLst>
+          <dgm:alg type="tx">
+            <dgm:param type="txAnchorVert" val="mid"/>
+            <dgm:param type="parTxLTRAlign" val="l"/>
+            <dgm:param type="shpTxLTRAlignCh" val="l"/>
+            <dgm:param type="parTxRTLAlign" val="r"/>
+            <dgm:param type="shpTxRTLAlignCh" val="r"/>
+          </dgm:alg>
+          <dgm:shape xmlns:r="http://schemas.openxmlformats.org/officeDocument/2006/relationships" type="rect" r:blip="">
+            <dgm:adjLst/>
+          </dgm:shape>
+          <dgm:presOf axis="self" ptType="node"/>
+          <dgm:constrLst>
+            <dgm:constr type="lMarg" refType="h" fact="0.3"/>
+            <dgm:constr type="rMarg" refType="h" fact="0.3"/>
+            <dgm:constr type="tMarg" refType="h" fact="0.3"/>
+            <dgm:constr type="bMarg" refType="h" fact="0.3"/>
+          </dgm:constrLst>
+          <dgm:ruleLst>
+            <dgm:rule type="primFontSz" val="14" fact="NaN" max="NaN"/>
+            <dgm:rule type="h" val="INF" fact="NaN" max="NaN"/>
+          </dgm:ruleLst>
+        </dgm:layoutNode>
+        <dgm:choose name="Name12">
+          <dgm:if name="Name13" axis="ch" ptType="node" func="cnt" op="gte" val="1">
+            <dgm:layoutNode name="desTx" styleLbl="revTx">
+              <dgm:varLst/>
+              <dgm:alg type="tx">
+                <dgm:param type="txAnchorVertCh" val="mid"/>
+                <dgm:param type="parTxLTRAlign" val="l"/>
+                <dgm:param type="shpTxLTRAlignCh" val="l"/>
+                <dgm:param type="parTxRTLAlign" val="r"/>
+                <dgm:param type="shpTxRTLAlignCh" val="r"/>
+                <dgm:param type="stBulletLvl" val="0"/>
+              </dgm:alg>
+              <dgm:shape xmlns:r="http://schemas.openxmlformats.org/officeDocument/2006/relationships" type="rect" r:blip="">
+                <dgm:adjLst/>
+              </dgm:shape>
+              <dgm:presOf axis="des" ptType="node"/>
+              <dgm:constrLst>
+                <dgm:constr type="primFontSz" val="18"/>
+                <dgm:constr type="secFontSz" refType="primFontSz"/>
+                <dgm:constr type="lMarg" refType="h" fact="0.3"/>
+                <dgm:constr type="rMarg" refType="h" fact="0.3"/>
+                <dgm:constr type="tMarg" refType="h" fact="0.3"/>
+                <dgm:constr type="bMarg" refType="h" fact="0.3"/>
+              </dgm:constrLst>
+              <dgm:ruleLst>
+                <dgm:rule type="primFontSz" val="11" fact="NaN" max="NaN"/>
+              </dgm:ruleLst>
+            </dgm:layoutNode>
+          </dgm:if>
+          <dgm:else name="Name14"/>
+        </dgm:choose>
+      </dgm:layoutNode>
+      <dgm:forEach name="Name15" axis="followSib" ptType="sibTrans" cnt="1">
+        <dgm:layoutNode name="sibTrans">
+          <dgm:alg type="sp"/>
+          <dgm:shape xmlns:r="http://schemas.openxmlformats.org/officeDocument/2006/relationships" r:blip="">
+            <dgm:adjLst/>
+          </dgm:shape>
+          <dgm:presOf axis="self"/>
+          <dgm:constrLst/>
+          <dgm:ruleLst/>
+        </dgm:layoutNode>
+      </dgm:forEach>
+    </dgm:forEach>
+  </dgm:layoutNode>
+  <dgm:extLst>
+    <a:ext uri="{68A01E43-0DF5-4B5B-8FA6-DAF915123BFB}">
+      <dgm1612:lstStyle xmlns:dgm1612="http://schemas.microsoft.com/office/drawing/2016/12/diagram">
+        <a:lvl1pPr>
+          <a:lnSpc>
+            <a:spcPct val="100000"/>
+          </a:lnSpc>
+        </a:lvl1pPr>
+        <a:lvl2pPr>
+          <a:lnSpc>
+            <a:spcPct val="100000"/>
+          </a:lnSpc>
+        </a:lvl2pPr>
+      </dgm1612:lstStyle>
+    </a:ext>
+  </dgm:extLst>
+</dgm:layoutDef>
+</file>
+
 <file path=ppt/diagrams/quickStyle1.xml><?xml version="1.0" encoding="utf-8"?>
+<dgm:styleDef xmlns:dgm="http://schemas.openxmlformats.org/drawingml/2006/diagram" xmlns:a="http://schemas.openxmlformats.org/drawingml/2006/main" uniqueId="urn:microsoft.com/office/officeart/2005/8/quickstyle/simple1">
+  <dgm:title val=""/>
+  <dgm:desc val=""/>
+  <dgm:catLst>
+    <dgm:cat type="simple" pri="10100"/>
+  </dgm:catLst>
+  <dgm:scene3d>
+    <a:camera prst="orthographicFront"/>
+    <a:lightRig rig="threePt" dir="t"/>
+  </dgm:scene3d>
+  <dgm:styleLbl name="node0">
+    <dgm:scene3d>
+      <a:camera prst="orthographicFront"/>
+      <a:lightRig rig="threePt" dir="t"/>
+    </dgm:scene3d>
+    <dgm:sp3d/>
+    <dgm:txPr/>
+    <dgm:style>
+      <a:lnRef idx="2">
+        <a:scrgbClr r="0" g="0" b="0"/>
+      </a:lnRef>
+      <a:fillRef idx="1">
+        <a:scrgbClr r="0" g="0" b="0"/>
+      </a:fillRef>
+      <a:effectRef idx="0">
+        <a:scrgbClr r="0" g="0" b="0"/>
+      </a:effectRef>
+      <a:fontRef idx="minor">
+        <a:schemeClr val="lt1"/>
+      </a:fontRef>
+    </dgm:style>
+  </dgm:styleLbl>
+  <dgm:styleLbl name="lnNode1">
+    <dgm:scene3d>
+      <a:camera prst="orthographicFront"/>
+      <a:lightRig rig="threePt" dir="t"/>
+    </dgm:scene3d>
+    <dgm:sp3d/>
+    <dgm:txPr/>
+    <dgm:style>
+      <a:lnRef idx="2">
+        <a:scrgbClr r="0" g="0" b="0"/>
+      </a:lnRef>
+      <a:fillRef idx="1">
+        <a:scrgbClr r="0" g="0" b="0"/>
+      </a:fillRef>
+      <a:effectRef idx="0">
+        <a:scrgbClr r="0" g="0" b="0"/>
+      </a:effectRef>
+      <a:fontRef idx="minor">
+        <a:schemeClr val="lt1"/>
+      </a:fontRef>
+    </dgm:style>
+  </dgm:styleLbl>
+  <dgm:styleLbl name="vennNode1">
+    <dgm:scene3d>
+      <a:camera prst="orthographicFront"/>
+      <a:lightRig rig="threePt" dir="t"/>
+    </dgm:scene3d>
+    <dgm:sp3d/>
+    <dgm:txPr/>
+    <dgm:style>
+      <a:lnRef idx="2">
+        <a:scrgbClr r="0" g="0" b="0"/>
+      </a:lnRef>
+      <a:fillRef idx="1">
+        <a:scrgbClr r="0" g="0" b="0"/>
+      </a:fillRef>
+      <a:effectRef idx="0">
+        <a:scrgbClr r="0" g="0" b="0"/>
+      </a:effectRef>
+      <a:fontRef idx="minor">
+        <a:schemeClr val="tx1"/>
+      </a:fontRef>
+    </dgm:style>
+  </dgm:styleLbl>
+  <dgm:styleLbl name="alignNode1">
+    <dgm:scene3d>
+      <a:camera prst="orthographicFront"/>
+      <a:lightRig rig="threePt" dir="t"/>
+    </dgm:scene3d>
+    <dgm:sp3d/>
+    <dgm:txPr/>
+    <dgm:style>
+      <a:lnRef idx="2">
+        <a:scrgbClr r="0" g="0" b="0"/>
+      </a:lnRef>
+      <a:fillRef idx="1">
+        <a:scrgbClr r="0" g="0" b="0"/>
+      </a:fillRef>
+      <a:effectRef idx="0">
+        <a:scrgbClr r="0" g="0" b="0"/>
+      </a:effectRef>
+      <a:fontRef idx="minor">
+        <a:schemeClr val="lt1"/>
+      </a:fontRef>
+    </dgm:style>
+  </dgm:styleLbl>
+  <dgm:styleLbl name="node1">
+    <dgm:scene3d>
+      <a:camera prst="orthographicFront"/>
+      <a:lightRig rig="threePt" dir="t"/>
+    </dgm:scene3d>
+    <dgm:sp3d/>
+    <dgm:txPr/>
+    <dgm:style>
+      <a:lnRef idx="2">
+        <a:scrgbClr r="0" g="0" b="0"/>
+      </a:lnRef>
+      <a:fillRef idx="1">
+        <a:scrgbClr r="0" g="0" b="0"/>
+      </a:fillRef>
+      <a:effectRef idx="0">
+        <a:scrgbClr r="0" g="0" b="0"/>
+      </a:effectRef>
+      <a:fontRef idx="minor">
+        <a:schemeClr val="lt1"/>
+      </a:fontRef>
+    </dgm:style>
+  </dgm:styleLbl>
+  <dgm:styleLbl name="node2">
+    <dgm:scene3d>
+      <a:camera prst="orthographicFront"/>
+      <a:lightRig rig="threePt" dir="t"/>
+    </dgm:scene3d>
+    <dgm:sp3d/>
+    <dgm:txPr/>
+    <dgm:style>
+      <a:lnRef idx="2">
+        <a:scrgbClr r="0" g="0" b="0"/>
+      </a:lnRef>
+      <a:fillRef idx="1">
+        <a:scrgbClr r="0" g="0" b="0"/>
+      </a:fillRef>
+      <a:effectRef idx="0">
+        <a:scrgbClr r="0" g="0" b="0"/>
+      </a:effectRef>
+      <a:fontRef idx="minor">
+        <a:schemeClr val="lt1"/>
+      </a:fontRef>
+    </dgm:style>
+  </dgm:styleLbl>
+  <dgm:styleLbl name="node3">
+    <dgm:scene3d>
+      <a:camera prst="orthographicFront"/>
+      <a:lightRig rig="threePt" dir="t"/>
+    </dgm:scene3d>
+    <dgm:sp3d/>
+    <dgm:txPr/>
+    <dgm:style>
+      <a:lnRef idx="2">
+        <a:scrgbClr r="0" g="0" b="0"/>
+      </a:lnRef>
+      <a:fillRef idx="1">
+        <a:scrgbClr r="0" g="0" b="0"/>
+      </a:fillRef>
+      <a:effectRef idx="0">
+        <a:scrgbClr r="0" g="0" b="0"/>
+      </a:effectRef>
+      <a:fontRef idx="minor">
+        <a:schemeClr val="lt1"/>
+      </a:fontRef>
+    </dgm:style>
+  </dgm:styleLbl>
+  <dgm:styleLbl name="node4">
+    <dgm:scene3d>
+      <a:camera prst="orthographicFront"/>
+      <a:lightRig rig="threePt" dir="t"/>
+    </dgm:scene3d>
+    <dgm:sp3d/>
+    <dgm:txPr/>
+    <dgm:style>
+      <a:lnRef idx="2">
+        <a:scrgbClr r="0" g="0" b="0"/>
+      </a:lnRef>
+      <a:fillRef idx="1">
+        <a:scrgbClr r="0" g="0" b="0"/>
+      </a:fillRef>
+      <a:effectRef idx="0">
+        <a:scrgbClr r="0" g="0" b="0"/>
+      </a:effectRef>
+      <a:fontRef idx="minor">
+        <a:schemeClr val="lt1"/>
+      </a:fontRef>
+    </dgm:style>
+  </dgm:styleLbl>
+  <dgm:styleLbl name="fgImgPlace1">
+    <dgm:scene3d>
+      <a:camera prst="orthographicFront"/>
+      <a:lightRig rig="threePt" dir="t"/>
+    </dgm:scene3d>
+    <dgm:sp3d/>
+    <dgm:txPr/>
+    <dgm:style>
+      <a:lnRef idx="2">
+        <a:scrgbClr r="0" g="0" b="0"/>
+      </a:lnRef>
+      <a:fillRef idx="1">
+        <a:scrgbClr r="0" g="0" b="0"/>
+      </a:fillRef>
+      <a:effectRef idx="0">
+        <a:scrgbClr r="0" g="0" b="0"/>
+      </a:effectRef>
+      <a:fontRef idx="minor"/>
+    </dgm:style>
+  </dgm:styleLbl>
+  <dgm:styleLbl name="alignImgPlace1">
+    <dgm:scene3d>
+      <a:camera prst="orthographicFront"/>
+      <a:lightRig rig="threePt" dir="t"/>
+    </dgm:scene3d>
+    <dgm:sp3d/>
+    <dgm:txPr/>
+    <dgm:style>
+      <a:lnRef idx="2">
+        <a:scrgbClr r="0" g="0" b="0"/>
+      </a:lnRef>
+      <a:fillRef idx="1">
+        <a:scrgbClr r="0" g="0" b="0"/>
+      </a:fillRef>
+      <a:effectRef idx="0">
+        <a:scrgbClr r="0" g="0" b="0"/>
+      </a:effectRef>
+      <a:fontRef idx="minor"/>
+    </dgm:style>
+  </dgm:styleLbl>
+  <dgm:styleLbl name="bgImgPlace1">
+    <dgm:scene3d>
+      <a:camera prst="orthographicFront"/>
+      <a:lightRig rig="threePt" dir="t"/>
+    </dgm:scene3d>
+    <dgm:sp3d/>
+    <dgm:txPr/>
+    <dgm:style>
+      <a:lnRef idx="2">
+        <a:scrgbClr r="0" g="0" b="0"/>
+      </a:lnRef>
+      <a:fillRef idx="1">
+        <a:scrgbClr r="0" g="0" b="0"/>
+      </a:fillRef>
+      <a:effectRef idx="0">
+        <a:scrgbClr r="0" g="0" b="0"/>
+      </a:effectRef>
+      <a:fontRef idx="minor"/>
+    </dgm:style>
+  </dgm:styleLbl>
+  <dgm:styleLbl name="sibTrans2D1">
+    <dgm:scene3d>
+      <a:camera prst="orthographicFront"/>
+      <a:lightRig rig="threePt" dir="t"/>
+    </dgm:scene3d>
+    <dgm:sp3d/>
+    <dgm:txPr/>
+    <dgm:style>
+      <a:lnRef idx="0">
+        <a:scrgbClr r="0" g="0" b="0"/>
+      </a:lnRef>
+      <a:fillRef idx="1">
+        <a:scrgbClr r="0" g="0" b="0"/>
+      </a:fillRef>
+      <a:effectRef idx="0">
+        <a:scrgbClr r="0" g="0" b="0"/>
+      </a:effectRef>
+      <a:fontRef idx="minor">
+        <a:schemeClr val="lt1"/>
+      </a:fontRef>
+    </dgm:style>
+  </dgm:styleLbl>
+  <dgm:styleLbl name="fgSibTrans2D1">
+    <dgm:scene3d>
+      <a:camera prst="orthographicFront"/>
+      <a:lightRig rig="threePt" dir="t"/>
+    </dgm:scene3d>
+    <dgm:sp3d/>
+    <dgm:txPr/>
+    <dgm:style>
+      <a:lnRef idx="0">
+        <a:scrgbClr r="0" g="0" b="0"/>
+      </a:lnRef>
+      <a:fillRef idx="1">
+        <a:scrgbClr r="0" g="0" b="0"/>
+      </a:fillRef>
+      <a:effectRef idx="0">
+        <a:scrgbClr r="0" g="0" b="0"/>
+      </a:effectRef>
+      <a:fontRef idx="minor">
+        <a:schemeClr val="lt1"/>
+      </a:fontRef>
+    </dgm:style>
+  </dgm:styleLbl>
+  <dgm:styleLbl name="bgSibTrans2D1">
+    <dgm:scene3d>
+      <a:camera prst="orthographicFront"/>
+      <a:lightRig rig="threePt" dir="t"/>
+    </dgm:scene3d>
+    <dgm:sp3d/>
+    <dgm:txPr/>
+    <dgm:style>
+      <a:lnRef idx="0">
+        <a:scrgbClr r="0" g="0" b="0"/>
+      </a:lnRef>
+      <a:fillRef idx="1">
+        <a:scrgbClr r="0" g="0" b="0"/>
+      </a:fillRef>
+      <a:effectRef idx="0">
+        <a:scrgbClr r="0" g="0" b="0"/>
+      </a:effectRef>
+      <a:fontRef idx="minor">
+        <a:schemeClr val="lt1"/>
+      </a:fontRef>
+    </dgm:style>
+  </dgm:styleLbl>
+  <dgm:styleLbl name="sibTrans1D1">
+    <dgm:scene3d>
+      <a:camera prst="orthographicFront"/>
+      <a:lightRig rig="threePt" dir="t"/>
+    </dgm:scene3d>
+    <dgm:sp3d/>
+    <dgm:txPr/>
+    <dgm:style>
+      <a:lnRef idx="1">
+        <a:scrgbClr r="0" g="0" b="0"/>
+      </a:lnRef>
+      <a:fillRef idx="0">
+        <a:scrgbClr r="0" g="0" b="0"/>
+      </a:fillRef>
+      <a:effectRef idx="0">
+        <a:scrgbClr r="0" g="0" b="0"/>
+      </a:effectRef>
+      <a:fontRef idx="minor"/>
+    </dgm:style>
+  </dgm:styleLbl>
+  <dgm:styleLbl name="callout">
+    <dgm:scene3d>
+      <a:camera prst="orthographicFront"/>
+      <a:lightRig rig="threePt" dir="t"/>
+    </dgm:scene3d>
+    <dgm:sp3d/>
+    <dgm:txPr/>
+    <dgm:style>
+      <a:lnRef idx="2">
+        <a:scrgbClr r="0" g="0" b="0"/>
+      </a:lnRef>
+      <a:fillRef idx="1">
+        <a:scrgbClr r="0" g="0" b="0"/>
+      </a:fillRef>
+      <a:effectRef idx="0">
+        <a:scrgbClr r="0" g="0" b="0"/>
+      </a:effectRef>
+      <a:fontRef idx="minor"/>
+    </dgm:style>
+  </dgm:styleLbl>
+  <dgm:styleLbl name="asst0">
+    <dgm:scene3d>
+      <a:camera prst="orthographicFront"/>
+      <a:lightRig rig="threePt" dir="t"/>
+    </dgm:scene3d>
+    <dgm:sp3d/>
+    <dgm:txPr/>
+    <dgm:style>
+      <a:lnRef idx="2">
+        <a:scrgbClr r="0" g="0" b="0"/>
+      </a:lnRef>
+      <a:fillRef idx="1">
+        <a:scrgbClr r="0" g="0" b="0"/>
+      </a:fillRef>
+      <a:effectRef idx="0">
+        <a:scrgbClr r="0" g="0" b="0"/>
+      </a:effectRef>
+      <a:fontRef idx="minor">
+        <a:schemeClr val="lt1"/>
+      </a:fontRef>
+    </dgm:style>
+  </dgm:styleLbl>
+  <dgm:styleLbl name="asst1">
+    <dgm:scene3d>
+      <a:camera prst="orthographicFront"/>
+      <a:lightRig rig="threePt" dir="t"/>
+    </dgm:scene3d>
+    <dgm:sp3d/>
+    <dgm:txPr/>
+    <dgm:style>
+      <a:lnRef idx="2">
+        <a:scrgbClr r="0" g="0" b="0"/>
+      </a:lnRef>
+      <a:fillRef idx="1">
+        <a:scrgbClr r="0" g="0" b="0"/>
+      </a:fillRef>
+      <a:effectRef idx="0">
+        <a:scrgbClr r="0" g="0" b="0"/>
+      </a:effectRef>
+      <a:fontRef idx="minor">
+        <a:schemeClr val="lt1"/>
+      </a:fontRef>
+    </dgm:style>
+  </dgm:styleLbl>
+  <dgm:styleLbl name="asst2">
+    <dgm:scene3d>
+      <a:camera prst="orthographicFront"/>
+      <a:lightRig rig="threePt" dir="t"/>
+    </dgm:scene3d>
+    <dgm:sp3d/>
+    <dgm:txPr/>
+    <dgm:style>
+      <a:lnRef idx="2">
+        <a:scrgbClr r="0" g="0" b="0"/>
+      </a:lnRef>
+      <a:fillRef idx="1">
+        <a:scrgbClr r="0" g="0" b="0"/>
+      </a:fillRef>
+      <a:effectRef idx="0">
+        <a:scrgbClr r="0" g="0" b="0"/>
+      </a:effectRef>
+      <a:fontRef idx="minor">
+        <a:schemeClr val="lt1"/>
+      </a:fontRef>
+    </dgm:style>
+  </dgm:styleLbl>
+  <dgm:styleLbl name="asst3">
+    <dgm:scene3d>
+      <a:camera prst="orthographicFront"/>
+      <a:lightRig rig="threePt" dir="t"/>
+    </dgm:scene3d>
+    <dgm:sp3d/>
+    <dgm:txPr/>
+    <dgm:style>
+      <a:lnRef idx="2">
+        <a:scrgbClr r="0" g="0" b="0"/>
+      </a:lnRef>
+      <a:fillRef idx="1">
+        <a:scrgbClr r="0" g="0" b="0"/>
+      </a:fillRef>
+      <a:effectRef idx="0">
+        <a:scrgbClr r="0" g="0" b="0"/>
+      </a:effectRef>
+      <a:fontRef idx="minor">
+        <a:schemeClr val="lt1"/>
+      </a:fontRef>
+    </dgm:style>
+  </dgm:styleLbl>
+  <dgm:styleLbl name="asst4">
+    <dgm:scene3d>
+      <a:camera prst="orthographicFront"/>
+      <a:lightRig rig="threePt" dir="t"/>
+    </dgm:scene3d>
+    <dgm:sp3d/>
+    <dgm:txPr/>
+    <dgm:style>
+      <a:lnRef idx="2">
+        <a:scrgbClr r="0" g="0" b="0"/>
+      </a:lnRef>
+      <a:fillRef idx="1">
+        <a:scrgbClr r="0" g="0" b="0"/>
+      </a:fillRef>
+      <a:effectRef idx="0">
+        <a:scrgbClr r="0" g="0" b="0"/>
+      </a:effectRef>
+      <a:fontRef idx="minor">
+        <a:schemeClr val="lt1"/>
+      </a:fontRef>
+    </dgm:style>
+  </dgm:styleLbl>
+  <dgm:styleLbl name="parChTrans2D1">
+    <dgm:scene3d>
+      <a:camera prst="orthographicFront"/>
+      <a:lightRig rig="threePt" dir="t"/>
+    </dgm:scene3d>
+    <dgm:sp3d/>
+    <dgm:txPr/>
+    <dgm:style>
+      <a:lnRef idx="2">
+        <a:scrgbClr r="0" g="0" b="0"/>
+      </a:lnRef>
+      <a:fillRef idx="1">
+        <a:scrgbClr r="0" g="0" b="0"/>
+      </a:fillRef>
+      <a:effectRef idx="0">
+        <a:scrgbClr r="0" g="0" b="0"/>
+      </a:effectRef>
+      <a:fontRef idx="minor">
+        <a:schemeClr val="lt1"/>
+      </a:fontRef>
+    </dgm:style>
+  </dgm:styleLbl>
+  <dgm:styleLbl name="parChTrans2D2">
+    <dgm:scene3d>
+      <a:camera prst="orthographicFront"/>
+      <a:lightRig rig="threePt" dir="t"/>
+    </dgm:scene3d>
+    <dgm:sp3d/>
+    <dgm:txPr/>
+    <dgm:style>
+      <a:lnRef idx="2">
+        <a:scrgbClr r="0" g="0" b="0"/>
+      </a:lnRef>
+      <a:fillRef idx="1">
+        <a:scrgbClr r="0" g="0" b="0"/>
+      </a:fillRef>
+      <a:effectRef idx="0">
+        <a:scrgbClr r="0" g="0" b="0"/>
+      </a:effectRef>
+      <a:fontRef idx="minor">
+        <a:schemeClr val="lt1"/>
+      </a:fontRef>
+    </dgm:style>
+  </dgm:styleLbl>
+  <dgm:styleLbl name="parChTrans2D3">
+    <dgm:scene3d>
+      <a:camera prst="orthographicFront"/>
+      <a:lightRig rig="threePt" dir="t"/>
+    </dgm:scene3d>
+    <dgm:sp3d/>
+    <dgm:txPr/>
+    <dgm:style>
+      <a:lnRef idx="2">
+        <a:scrgbClr r="0" g="0" b="0"/>
+      </a:lnRef>
+      <a:fillRef idx="1">
+        <a:scrgbClr r="0" g="0" b="0"/>
+      </a:fillRef>
+      <a:effectRef idx="0">
+        <a:scrgbClr r="0" g="0" b="0"/>
+      </a:effectRef>
+      <a:fontRef idx="minor">
+        <a:schemeClr val="lt1"/>
+      </a:fontRef>
+    </dgm:style>
+  </dgm:styleLbl>
+  <dgm:styleLbl name="parChTrans2D4">
+    <dgm:scene3d>
+      <a:camera prst="orthographicFront"/>
+      <a:lightRig rig="threePt" dir="t"/>
+    </dgm:scene3d>
+    <dgm:sp3d/>
+    <dgm:txPr/>
+    <dgm:style>
+      <a:lnRef idx="2">
+        <a:scrgbClr r="0" g="0" b="0"/>
+      </a:lnRef>
+      <a:fillRef idx="1">
+        <a:scrgbClr r="0" g="0" b="0"/>
+      </a:fillRef>
+      <a:effectRef idx="0">
+        <a:scrgbClr r="0" g="0" b="0"/>
+      </a:effectRef>
+      <a:fontRef idx="minor">
+        <a:schemeClr val="lt1"/>
+      </a:fontRef>
+    </dgm:style>
+  </dgm:styleLbl>
+  <dgm:styleLbl name="parChTrans1D1">
+    <dgm:scene3d>
+      <a:camera prst="orthographicFront"/>
+      <a:lightRig rig="threePt" dir="t"/>
+    </dgm:scene3d>
+    <dgm:sp3d/>
+    <dgm:txPr/>
+    <dgm:style>
+      <a:lnRef idx="2">
+        <a:scrgbClr r="0" g="0" b="0"/>
+      </a:lnRef>
+      <a:fillRef idx="0">
+        <a:scrgbClr r="0" g="0" b="0"/>
+      </a:fillRef>
+      <a:effectRef idx="0">
+        <a:scrgbClr r="0" g="0" b="0"/>
+      </a:effectRef>
+      <a:fontRef idx="minor"/>
+    </dgm:style>
+  </dgm:styleLbl>
+  <dgm:styleLbl name="parChTrans1D2">
+    <dgm:scene3d>
+      <a:camera prst="orthographicFront"/>
+      <a:lightRig rig="threePt" dir="t"/>
+    </dgm:scene3d>
+    <dgm:sp3d/>
+    <dgm:txPr/>
+    <dgm:style>
+      <a:lnRef idx="2">
+        <a:scrgbClr r="0" g="0" b="0"/>
+      </a:lnRef>
+      <a:fillRef idx="0">
+        <a:scrgbClr r="0" g="0" b="0"/>
+      </a:fillRef>
+      <a:effectRef idx="0">
+        <a:scrgbClr r="0" g="0" b="0"/>
+      </a:effectRef>
+      <a:fontRef idx="minor"/>
+    </dgm:style>
+  </dgm:styleLbl>
+  <dgm:styleLbl name="parChTrans1D3">
+    <dgm:scene3d>
+      <a:camera prst="orthographicFront"/>
+      <a:lightRig rig="threePt" dir="t"/>
+    </dgm:scene3d>
+    <dgm:sp3d/>
+    <dgm:txPr/>
+    <dgm:style>
+      <a:lnRef idx="2">
+        <a:scrgbClr r="0" g="0" b="0"/>
+      </a:lnRef>
+      <a:fillRef idx="0">
+        <a:scrgbClr r="0" g="0" b="0"/>
+      </a:fillRef>
+      <a:effectRef idx="0">
+        <a:scrgbClr r="0" g="0" b="0"/>
+      </a:effectRef>
+      <a:fontRef idx="minor"/>
+    </dgm:style>
+  </dgm:styleLbl>
+  <dgm:styleLbl name="parChTrans1D4">
+    <dgm:scene3d>
+      <a:camera prst="orthographicFront"/>
+      <a:lightRig rig="threePt" dir="t"/>
+    </dgm:scene3d>
+    <dgm:sp3d/>
+    <dgm:txPr/>
+    <dgm:style>
+      <a:lnRef idx="2">
+        <a:scrgbClr r="0" g="0" b="0"/>
+      </a:lnRef>
+      <a:fillRef idx="0">
+        <a:scrgbClr r="0" g="0" b="0"/>
+      </a:fillRef>
+      <a:effectRef idx="0">
+        <a:scrgbClr r="0" g="0" b="0"/>
+      </a:effectRef>
+      <a:fontRef idx="minor"/>
+    </dgm:style>
+  </dgm:styleLbl>
+  <dgm:styleLbl name="fgAcc1">
+    <dgm:scene3d>
+      <a:camera prst="orthographicFront"/>
+      <a:lightRig rig="threePt" dir="t"/>
+    </dgm:scene3d>
+    <dgm:sp3d/>
+    <dgm:txPr/>
+    <dgm:style>
+      <a:lnRef idx="2">
+        <a:scrgbClr r="0" g="0" b="0"/>
+      </a:lnRef>
+      <a:fillRef idx="1">
+        <a:scrgbClr r="0" g="0" b="0"/>
+      </a:fillRef>
+      <a:effectRef idx="0">
+        <a:scrgbClr r="0" g="0" b="0"/>
+      </a:effectRef>
+      <a:fontRef idx="minor"/>
+    </dgm:style>
+  </dgm:styleLbl>
+  <dgm:styleLbl name="conFgAcc1">
+    <dgm:scene3d>
+      <a:camera prst="orthographicFront"/>
+      <a:lightRig rig="threePt" dir="t"/>
+    </dgm:scene3d>
+    <dgm:sp3d/>
+    <dgm:txPr/>
+    <dgm:style>
+      <a:lnRef idx="2">
+        <a:scrgbClr r="0" g="0" b="0"/>
+      </a:lnRef>
+      <a:fillRef idx="1">
+        <a:scrgbClr r="0" g="0" b="0"/>
+      </a:fillRef>
+      <a:effectRef idx="0">
+        <a:scrgbClr r="0" g="0" b="0"/>
+      </a:effectRef>
+      <a:fontRef idx="minor"/>
+    </dgm:style>
+  </dgm:styleLbl>
+  <dgm:styleLbl name="alignAcc1">
+    <dgm:scene3d>
+      <a:camera prst="orthographicFront"/>
+      <a:lightRig rig="threePt" dir="t"/>
+    </dgm:scene3d>
+    <dgm:sp3d/>
+    <dgm:txPr/>
+    <dgm:style>
+      <a:lnRef idx="2">
+        <a:scrgbClr r="0" g="0" b="0"/>
+      </a:lnRef>
+      <a:fillRef idx="1">
+        <a:scrgbClr r="0" g="0" b="0"/>
+      </a:fillRef>
+      <a:effectRef idx="0">
+        <a:scrgbClr r="0" g="0" b="0"/>
+      </a:effectRef>
+      <a:fontRef idx="minor"/>
+    </dgm:style>
+  </dgm:styleLbl>
+  <dgm:styleLbl name="trAlignAcc1">
+    <dgm:scene3d>
+      <a:camera prst="orthographicFront"/>
+      <a:lightRig rig="threePt" dir="t"/>
+    </dgm:scene3d>
+    <dgm:sp3d/>
+    <dgm:txPr/>
+    <dgm:style>
+      <a:lnRef idx="1">
+        <a:scrgbClr r="0" g="0" b="0"/>
+      </a:lnRef>
+      <a:fillRef idx="1">
+        <a:scrgbClr r="0" g="0" b="0"/>
+      </a:fillRef>
+      <a:effectRef idx="0">
+        <a:scrgbClr r="0" g="0" b="0"/>
+      </a:effectRef>
+      <a:fontRef idx="minor"/>
+    </dgm:style>
+  </dgm:styleLbl>
+  <dgm:styleLbl name="bgAcc1">
+    <dgm:scene3d>
+      <a:camera prst="orthographicFront"/>
+      <a:lightRig rig="threePt" dir="t"/>
+    </dgm:scene3d>
+    <dgm:sp3d/>
+    <dgm:txPr/>
+    <dgm:style>
+      <a:lnRef idx="2">
+        <a:scrgbClr r="0" g="0" b="0"/>
+      </a:lnRef>
+      <a:fillRef idx="1">
+        <a:scrgbClr r="0" g="0" b="0"/>
+      </a:fillRef>
+      <a:effectRef idx="0">
+        <a:scrgbClr r="0" g="0" b="0"/>
+      </a:effectRef>
+      <a:fontRef idx="minor"/>
+    </dgm:style>
+  </dgm:styleLbl>
+  <dgm:styleLbl name="solidFgAcc1">
+    <dgm:scene3d>
+      <a:camera prst="orthographicFront"/>
+      <a:lightRig rig="threePt" dir="t"/>
+    </dgm:scene3d>
+    <dgm:sp3d/>
+    <dgm:txPr/>
+    <dgm:style>
+      <a:lnRef idx="2">
+        <a:scrgbClr r="0" g="0" b="0"/>
+      </a:lnRef>
+      <a:fillRef idx="1">
+        <a:scrgbClr r="0" g="0" b="0"/>
+      </a:fillRef>
+      <a:effectRef idx="0">
+        <a:scrgbClr r="0" g="0" b="0"/>
+      </a:effectRef>
+      <a:fontRef idx="minor"/>
+    </dgm:style>
+  </dgm:styleLbl>
+  <dgm:styleLbl name="solidAlignAcc1">
+    <dgm:scene3d>
+      <a:camera prst="orthographicFront"/>
+      <a:lightRig rig="threePt" dir="t"/>
+    </dgm:scene3d>
+    <dgm:sp3d/>
+    <dgm:txPr/>
+    <dgm:style>
+      <a:lnRef idx="2">
+        <a:scrgbClr r="0" g="0" b="0"/>
+      </a:lnRef>
+      <a:fillRef idx="1">
+        <a:scrgbClr r="0" g="0" b="0"/>
+      </a:fillRef>
+      <a:effectRef idx="0">
+        <a:scrgbClr r="0" g="0" b="0"/>
+      </a:effectRef>
+      <a:fontRef idx="minor"/>
+    </dgm:style>
+  </dgm:styleLbl>
+  <dgm:styleLbl name="solidBgAcc1">
+    <dgm:scene3d>
+      <a:camera prst="orthographicFront"/>
+      <a:lightRig rig="threePt" dir="t"/>
+    </dgm:scene3d>
+    <dgm:sp3d/>
+    <dgm:txPr/>
+    <dgm:style>
+      <a:lnRef idx="2">
+        <a:scrgbClr r="0" g="0" b="0"/>
+      </a:lnRef>
+      <a:fillRef idx="1">
+        <a:scrgbClr r="0" g="0" b="0"/>
+      </a:fillRef>
+      <a:effectRef idx="0">
+        <a:scrgbClr r="0" g="0" b="0"/>
+      </a:effectRef>
+      <a:fontRef idx="minor"/>
+    </dgm:style>
+  </dgm:styleLbl>
+  <dgm:styleLbl name="fgAccFollowNode1">
+    <dgm:scene3d>
+      <a:camera prst="orthographicFront"/>
+      <a:lightRig rig="threePt" dir="t"/>
+    </dgm:scene3d>
+    <dgm:sp3d/>
+    <dgm:txPr/>
+    <dgm:style>
+      <a:lnRef idx="2">
+        <a:scrgbClr r="0" g="0" b="0"/>
+      </a:lnRef>
+      <a:fillRef idx="1">
+        <a:scrgbClr r="0" g="0" b="0"/>
+      </a:fillRef>
+      <a:effectRef idx="0">
+        <a:scrgbClr r="0" g="0" b="0"/>
+      </a:effectRef>
+      <a:fontRef idx="minor"/>
+    </dgm:style>
+  </dgm:styleLbl>
+  <dgm:styleLbl name="alignAccFollowNode1">
+    <dgm:scene3d>
+      <a:camera prst="orthographicFront"/>
+      <a:lightRig rig="threePt" dir="t"/>
+    </dgm:scene3d>
+    <dgm:sp3d/>
+    <dgm:txPr/>
+    <dgm:style>
+      <a:lnRef idx="2">
+        <a:scrgbClr r="0" g="0" b="0"/>
+      </a:lnRef>
+      <a:fillRef idx="1">
+        <a:scrgbClr r="0" g="0" b="0"/>
+      </a:fillRef>
+      <a:effectRef idx="0">
+        <a:scrgbClr r="0" g="0" b="0"/>
+      </a:effectRef>
+      <a:fontRef idx="minor"/>
+    </dgm:style>
+  </dgm:styleLbl>
+  <dgm:styleLbl name="bgAccFollowNode1">
+    <dgm:scene3d>
+      <a:camera prst="orthographicFront"/>
+      <a:lightRig rig="threePt" dir="t"/>
+    </dgm:scene3d>
+    <dgm:sp3d/>
+    <dgm:txPr/>
+    <dgm:style>
+      <a:lnRef idx="2">
+        <a:scrgbClr r="0" g="0" b="0"/>
+      </a:lnRef>
+      <a:fillRef idx="1">
+        <a:scrgbClr r="0" g="0" b="0"/>
+      </a:fillRef>
+      <a:effectRef idx="0">
+        <a:scrgbClr r="0" g="0" b="0"/>
+      </a:effectRef>
+      <a:fontRef idx="minor"/>
+    </dgm:style>
+  </dgm:styleLbl>
+  <dgm:styleLbl name="fgAcc0">
+    <dgm:scene3d>
+      <a:camera prst="orthographicFront"/>
+      <a:lightRig rig="threePt" dir="t"/>
+    </dgm:scene3d>
+    <dgm:sp3d/>
+    <dgm:txPr/>
+    <dgm:style>
+      <a:lnRef idx="2">
+        <a:scrgbClr r="0" g="0" b="0"/>
+      </a:lnRef>
+      <a:fillRef idx="1">
+        <a:scrgbClr r="0" g="0" b="0"/>
+      </a:fillRef>
+      <a:effectRef idx="0">
+        <a:scrgbClr r="0" g="0" b="0"/>
+      </a:effectRef>
+      <a:fontRef idx="minor"/>
+    </dgm:style>
+  </dgm:styleLbl>
+  <dgm:styleLbl name="fgAcc2">
+    <dgm:scene3d>
+      <a:camera prst="orthographicFront"/>
+      <a:lightRig rig="threePt" dir="t"/>
+    </dgm:scene3d>
+    <dgm:sp3d/>
+    <dgm:txPr/>
+    <dgm:style>
+      <a:lnRef idx="2">
+        <a:scrgbClr r="0" g="0" b="0"/>
+      </a:lnRef>
+      <a:fillRef idx="1">
+        <a:scrgbClr r="0" g="0" b="0"/>
+      </a:fillRef>
+      <a:effectRef idx="0">
+        <a:scrgbClr r="0" g="0" b="0"/>
+      </a:effectRef>
+      <a:fontRef idx="minor"/>
+    </dgm:style>
+  </dgm:styleLbl>
+  <dgm:styleLbl name="fgAcc3">
+    <dgm:scene3d>
+      <a:camera prst="orthographicFront"/>
+      <a:lightRig rig="threePt" dir="t"/>
+    </dgm:scene3d>
+    <dgm:sp3d/>
+    <dgm:txPr/>
+    <dgm:style>
+      <a:lnRef idx="2">
+        <a:scrgbClr r="0" g="0" b="0"/>
+      </a:lnRef>
+      <a:fillRef idx="1">
+        <a:scrgbClr r="0" g="0" b="0"/>
+      </a:fillRef>
+      <a:effectRef idx="0">
+        <a:scrgbClr r="0" g="0" b="0"/>
+      </a:effectRef>
+      <a:fontRef idx="minor"/>
+    </dgm:style>
+  </dgm:styleLbl>
+  <dgm:styleLbl name="fgAcc4">
+    <dgm:scene3d>
+      <a:camera prst="orthographicFront"/>
+      <a:lightRig rig="threePt" dir="t"/>
+    </dgm:scene3d>
+    <dgm:sp3d/>
+    <dgm:txPr/>
+    <dgm:style>
+      <a:lnRef idx="2">
+        <a:scrgbClr r="0" g="0" b="0"/>
+      </a:lnRef>
+      <a:fillRef idx="1">
+        <a:scrgbClr r="0" g="0" b="0"/>
+      </a:fillRef>
+      <a:effectRef idx="0">
+        <a:scrgbClr r="0" g="0" b="0"/>
+      </a:effectRef>
+      <a:fontRef idx="minor"/>
+    </dgm:style>
+  </dgm:styleLbl>
+  <dgm:styleLbl name="bgShp">
+    <dgm:scene3d>
+      <a:camera prst="orthographicFront"/>
+      <a:lightRig rig="threePt" dir="t"/>
+    </dgm:scene3d>
+    <dgm:sp3d/>
+    <dgm:txPr/>
+    <dgm:style>
+      <a:lnRef idx="0">
+        <a:scrgbClr r="0" g="0" b="0"/>
+      </a:lnRef>
+      <a:fillRef idx="1">
+        <a:scrgbClr r="0" g="0" b="0"/>
+      </a:fillRef>
+      <a:effectRef idx="0">
+        <a:scrgbClr r="0" g="0" b="0"/>
+      </a:effectRef>
+      <a:fontRef idx="minor"/>
+    </dgm:style>
+  </dgm:styleLbl>
+  <dgm:styleLbl name="dkBgShp">
+    <dgm:scene3d>
+      <a:camera prst="orthographicFront"/>
+      <a:lightRig rig="threePt" dir="t"/>
+    </dgm:scene3d>
+    <dgm:sp3d/>
+    <dgm:txPr/>
+    <dgm:style>
+      <a:lnRef idx="0">
+        <a:scrgbClr r="0" g="0" b="0"/>
+      </a:lnRef>
+      <a:fillRef idx="1">
+        <a:scrgbClr r="0" g="0" b="0"/>
+      </a:fillRef>
+      <a:effectRef idx="0">
+        <a:scrgbClr r="0" g="0" b="0"/>
+      </a:effectRef>
+      <a:fontRef idx="minor"/>
+    </dgm:style>
+  </dgm:styleLbl>
+  <dgm:styleLbl name="trBgShp">
+    <dgm:scene3d>
+      <a:camera prst="orthographicFront"/>
+      <a:lightRig rig="threePt" dir="t"/>
+    </dgm:scene3d>
+    <dgm:sp3d/>
+    <dgm:txPr/>
+    <dgm:style>
+      <a:lnRef idx="0">
+        <a:scrgbClr r="0" g="0" b="0"/>
+      </a:lnRef>
+      <a:fillRef idx="1">
+        <a:scrgbClr r="0" g="0" b="0"/>
+      </a:fillRef>
+      <a:effectRef idx="0">
+        <a:scrgbClr r="0" g="0" b="0"/>
+      </a:effectRef>
+      <a:fontRef idx="minor"/>
+    </dgm:style>
+  </dgm:styleLbl>
+  <dgm:styleLbl name="fgShp">
+    <dgm:scene3d>
+      <a:camera prst="orthographicFront"/>
+      <a:lightRig rig="threePt" dir="t"/>
+    </dgm:scene3d>
+    <dgm:sp3d/>
+    <dgm:txPr/>
+    <dgm:style>
+      <a:lnRef idx="2">
+        <a:scrgbClr r="0" g="0" b="0"/>
+      </a:lnRef>
+      <a:fillRef idx="1">
+        <a:scrgbClr r="0" g="0" b="0"/>
+      </a:fillRef>
+      <a:effectRef idx="0">
+        <a:scrgbClr r="0" g="0" b="0"/>
+      </a:effectRef>
+      <a:fontRef idx="minor"/>
+    </dgm:style>
+  </dgm:styleLbl>
+  <dgm:styleLbl name="revTx">
+    <dgm:scene3d>
+      <a:camera prst="orthographicFront"/>
+      <a:lightRig rig="threePt" dir="t"/>
+    </dgm:scene3d>
+    <dgm:sp3d/>
+    <dgm:txPr/>
+    <dgm:style>
+      <a:lnRef idx="0">
+        <a:scrgbClr r="0" g="0" b="0"/>
+      </a:lnRef>
+      <a:fillRef idx="0">
+        <a:scrgbClr r="0" g="0" b="0"/>
+      </a:fillRef>
+      <a:effectRef idx="0">
+        <a:scrgbClr r="0" g="0" b="0"/>
+      </a:effectRef>
+      <a:fontRef idx="minor"/>
+    </dgm:style>
+  </dgm:styleLbl>
+</dgm:styleDef>
+</file>
+
+<file path=ppt/diagrams/quickStyle2.xml><?xml version="1.0" encoding="utf-8"?>
 <dgm:styleDef xmlns:dgm="http://schemas.openxmlformats.org/drawingml/2006/diagram" xmlns:a="http://schemas.openxmlformats.org/drawingml/2006/main" uniqueId="urn:microsoft.com/office/officeart/2005/8/quickstyle/simple1">
   <dgm:title val=""/>
   <dgm:desc val=""/>
@@ -7102,7 +10473,7 @@
             </a:pPr>
             <a:fld id="{00000000-1234-1234-1234-123412341234}" type="slidenum">
               <a:rPr lang="en-US"/>
-              <a:t>15</a:t>
+              <a:t>17</a:t>
             </a:fld>
             <a:endParaRPr/>
           </a:p>
@@ -9343,7 +12714,7 @@
             </a:pPr>
             <a:fld id="{00000000-1234-1234-1234-123412341234}" type="slidenum">
               <a:rPr lang="en-US"/>
-              <a:t>13</a:t>
+              <a:t>15</a:t>
             </a:fld>
             <a:endParaRPr/>
           </a:p>
@@ -14634,6 +18005,800 @@
 </file>
 
 <file path=ppt/slides/slide10.xml><?xml version="1.0" encoding="utf-8"?>
+<p:sld xmlns:a="http://schemas.openxmlformats.org/drawingml/2006/main" xmlns:r="http://schemas.openxmlformats.org/officeDocument/2006/relationships" xmlns:p="http://schemas.openxmlformats.org/presentationml/2006/main">
+  <p:cSld>
+    <p:spTree>
+      <p:nvGrpSpPr>
+        <p:cNvPr id="1" name="Shape 70"/>
+        <p:cNvGrpSpPr/>
+        <p:nvPr/>
+      </p:nvGrpSpPr>
+      <p:grpSpPr>
+        <a:xfrm>
+          <a:off x="0" y="0"/>
+          <a:ext cx="0" cy="0"/>
+          <a:chOff x="0" y="0"/>
+          <a:chExt cx="0" cy="0"/>
+        </a:xfrm>
+      </p:grpSpPr>
+      <p:sp>
+        <p:nvSpPr>
+          <p:cNvPr id="71" name="Google Shape;71;g71c82016f7_0_0"/>
+          <p:cNvSpPr txBox="1">
+            <a:spLocks noGrp="1"/>
+          </p:cNvSpPr>
+          <p:nvPr>
+            <p:ph type="title"/>
+          </p:nvPr>
+        </p:nvSpPr>
+        <p:spPr>
+          <a:xfrm>
+            <a:off x="415600" y="593367"/>
+            <a:ext cx="11360700" cy="763500"/>
+          </a:xfrm>
+        </p:spPr>
+        <p:txBody>
+          <a:bodyPr spcFirstLastPara="1" wrap="square" lIns="121900" tIns="121900" rIns="121900" bIns="121900" anchor="ctr" anchorCtr="0">
+            <a:normAutofit/>
+          </a:bodyPr>
+          <a:lstStyle/>
+          <a:p>
+            <a:pPr marL="0" lvl="0" indent="0" rtl="0">
+              <a:lnSpc>
+                <a:spcPct val="90000"/>
+              </a:lnSpc>
+              <a:spcBef>
+                <a:spcPts val="0"/>
+              </a:spcBef>
+              <a:spcAft>
+                <a:spcPts val="0"/>
+              </a:spcAft>
+              <a:buClr>
+                <a:srgbClr val="FFFFFF"/>
+              </a:buClr>
+              <a:buSzPts val="3700"/>
+              <a:buNone/>
+            </a:pPr>
+            <a:r>
+              <a:rPr lang="en-US" sz="3700"/>
+              <a:t>Why do we want Interpretability?</a:t>
+            </a:r>
+          </a:p>
+        </p:txBody>
+      </p:sp>
+      <p:graphicFrame>
+        <p:nvGraphicFramePr>
+          <p:cNvPr id="74" name="Google Shape;72;g71c82016f7_0_0">
+            <a:extLst>
+              <a:ext uri="{FF2B5EF4-FFF2-40B4-BE49-F238E27FC236}">
+                <a16:creationId xmlns:a16="http://schemas.microsoft.com/office/drawing/2014/main" id="{73989458-54DD-12BF-689C-A1F298E15CD5}"/>
+              </a:ext>
+            </a:extLst>
+          </p:cNvPr>
+          <p:cNvGraphicFramePr/>
+          <p:nvPr>
+            <p:extLst>
+              <p:ext uri="{D42A27DB-BD31-4B8C-83A1-F6EECF244321}">
+                <p14:modId xmlns:p14="http://schemas.microsoft.com/office/powerpoint/2010/main" val="4001488475"/>
+              </p:ext>
+            </p:extLst>
+          </p:nvPr>
+        </p:nvGraphicFramePr>
+        <p:xfrm>
+          <a:off x="415600" y="1547367"/>
+          <a:ext cx="11360700" cy="4352544"/>
+        </p:xfrm>
+        <a:graphic>
+          <a:graphicData uri="http://schemas.openxmlformats.org/drawingml/2006/diagram">
+            <dgm:relIds xmlns:dgm="http://schemas.openxmlformats.org/drawingml/2006/diagram" xmlns:r="http://schemas.openxmlformats.org/officeDocument/2006/relationships" r:dm="rId3" r:lo="rId4" r:qs="rId5" r:cs="rId6"/>
+          </a:graphicData>
+        </a:graphic>
+      </p:graphicFrame>
+    </p:spTree>
+  </p:cSld>
+  <p:clrMapOvr>
+    <a:masterClrMapping/>
+  </p:clrMapOvr>
+</p:sld>
+</file>
+
+<file path=ppt/slides/slide11.xml><?xml version="1.0" encoding="utf-8"?>
+<p:sld xmlns:a="http://schemas.openxmlformats.org/drawingml/2006/main" xmlns:r="http://schemas.openxmlformats.org/officeDocument/2006/relationships" xmlns:p="http://schemas.openxmlformats.org/presentationml/2006/main">
+  <p:cSld>
+    <p:spTree>
+      <p:nvGrpSpPr>
+        <p:cNvPr id="1" name="Shape 76"/>
+        <p:cNvGrpSpPr/>
+        <p:nvPr/>
+      </p:nvGrpSpPr>
+      <p:grpSpPr>
+        <a:xfrm>
+          <a:off x="0" y="0"/>
+          <a:ext cx="0" cy="0"/>
+          <a:chOff x="0" y="0"/>
+          <a:chExt cx="0" cy="0"/>
+        </a:xfrm>
+      </p:grpSpPr>
+      <p:sp>
+        <p:nvSpPr>
+          <p:cNvPr id="77" name="Google Shape;77;p26"/>
+          <p:cNvSpPr txBox="1">
+            <a:spLocks noGrp="1"/>
+          </p:cNvSpPr>
+          <p:nvPr>
+            <p:ph type="title"/>
+          </p:nvPr>
+        </p:nvSpPr>
+        <p:spPr>
+          <a:xfrm>
+            <a:off x="415600" y="86563"/>
+            <a:ext cx="11360700" cy="763500"/>
+          </a:xfrm>
+          <a:prstGeom prst="rect">
+            <a:avLst/>
+          </a:prstGeom>
+          <a:noFill/>
+          <a:ln>
+            <a:noFill/>
+          </a:ln>
+        </p:spPr>
+        <p:txBody>
+          <a:bodyPr spcFirstLastPara="1" wrap="square" lIns="121900" tIns="121900" rIns="121900" bIns="121900" anchor="t" anchorCtr="0">
+            <a:noAutofit/>
+          </a:bodyPr>
+          <a:lstStyle/>
+          <a:p>
+            <a:pPr marL="0" lvl="0" indent="0" algn="l" rtl="0">
+              <a:lnSpc>
+                <a:spcPct val="100000"/>
+              </a:lnSpc>
+              <a:spcBef>
+                <a:spcPts val="0"/>
+              </a:spcBef>
+              <a:spcAft>
+                <a:spcPts val="0"/>
+              </a:spcAft>
+              <a:buClr>
+                <a:srgbClr val="FFFFFF"/>
+              </a:buClr>
+              <a:buSzPts val="3700"/>
+              <a:buNone/>
+            </a:pPr>
+            <a:r>
+              <a:rPr lang="en-US"/>
+              <a:t>Global Vs Local</a:t>
+            </a:r>
+            <a:endParaRPr/>
+          </a:p>
+        </p:txBody>
+      </p:sp>
+      <p:graphicFrame>
+        <p:nvGraphicFramePr>
+          <p:cNvPr id="78" name="Google Shape;78;p26"/>
+          <p:cNvGraphicFramePr/>
+          <p:nvPr/>
+        </p:nvGraphicFramePr>
+        <p:xfrm>
+          <a:off x="263476" y="1762929"/>
+          <a:ext cx="11664950" cy="3173270"/>
+        </p:xfrm>
+        <a:graphic>
+          <a:graphicData uri="http://schemas.openxmlformats.org/drawingml/2006/table">
+            <a:tbl>
+              <a:tblPr firstRow="1" bandRow="1">
+                <a:noFill/>
+                <a:tableStyleId>{5A04CC6A-533F-41F1-990F-45FB056E221C}</a:tableStyleId>
+              </a:tblPr>
+              <a:tblGrid>
+                <a:gridCol w="2052875">
+                  <a:extLst>
+                    <a:ext uri="{9D8B030D-6E8A-4147-A177-3AD203B41FA5}">
+                      <a16:colId xmlns:a16="http://schemas.microsoft.com/office/drawing/2014/main" val="20000"/>
+                    </a:ext>
+                  </a:extLst>
+                </a:gridCol>
+                <a:gridCol w="3657600">
+                  <a:extLst>
+                    <a:ext uri="{9D8B030D-6E8A-4147-A177-3AD203B41FA5}">
+                      <a16:colId xmlns:a16="http://schemas.microsoft.com/office/drawing/2014/main" val="20001"/>
+                    </a:ext>
+                  </a:extLst>
+                </a:gridCol>
+                <a:gridCol w="3657600">
+                  <a:extLst>
+                    <a:ext uri="{9D8B030D-6E8A-4147-A177-3AD203B41FA5}">
+                      <a16:colId xmlns:a16="http://schemas.microsoft.com/office/drawing/2014/main" val="20002"/>
+                    </a:ext>
+                  </a:extLst>
+                </a:gridCol>
+                <a:gridCol w="2296875">
+                  <a:extLst>
+                    <a:ext uri="{9D8B030D-6E8A-4147-A177-3AD203B41FA5}">
+                      <a16:colId xmlns:a16="http://schemas.microsoft.com/office/drawing/2014/main" val="20003"/>
+                    </a:ext>
+                  </a:extLst>
+                </a:gridCol>
+              </a:tblGrid>
+              <a:tr h="494450">
+                <a:tc>
+                  <a:txBody>
+                    <a:bodyPr/>
+                    <a:lstStyle/>
+                    <a:p>
+                      <a:pPr marL="0" marR="0" lvl="0" indent="0" algn="l" rtl="0">
+                        <a:lnSpc>
+                          <a:spcPct val="100000"/>
+                        </a:lnSpc>
+                        <a:spcBef>
+                          <a:spcPts val="0"/>
+                        </a:spcBef>
+                        <a:spcAft>
+                          <a:spcPts val="0"/>
+                        </a:spcAft>
+                        <a:buNone/>
+                      </a:pPr>
+                      <a:r>
+                        <a:rPr lang="en-US" sz="2000" u="none" strike="noStrike" cap="none"/>
+                        <a:t>Use Case</a:t>
+                      </a:r>
+                      <a:endParaRPr/>
+                    </a:p>
+                  </a:txBody>
+                  <a:tcPr marL="121925" marR="121925" marT="60950" marB="60950"/>
+                </a:tc>
+                <a:tc>
+                  <a:txBody>
+                    <a:bodyPr/>
+                    <a:lstStyle/>
+                    <a:p>
+                      <a:pPr marL="0" marR="0" lvl="0" indent="0" algn="l" rtl="0">
+                        <a:lnSpc>
+                          <a:spcPct val="100000"/>
+                        </a:lnSpc>
+                        <a:spcBef>
+                          <a:spcPts val="0"/>
+                        </a:spcBef>
+                        <a:spcAft>
+                          <a:spcPts val="0"/>
+                        </a:spcAft>
+                        <a:buNone/>
+                      </a:pPr>
+                      <a:r>
+                        <a:rPr lang="en-US" sz="2000" u="none" strike="noStrike" cap="none"/>
+                        <a:t>User</a:t>
+                      </a:r>
+                      <a:endParaRPr/>
+                    </a:p>
+                  </a:txBody>
+                  <a:tcPr marL="121925" marR="121925" marT="60950" marB="60950"/>
+                </a:tc>
+                <a:tc>
+                  <a:txBody>
+                    <a:bodyPr/>
+                    <a:lstStyle/>
+                    <a:p>
+                      <a:pPr marL="0" marR="0" lvl="0" indent="0" algn="l" rtl="0">
+                        <a:lnSpc>
+                          <a:spcPct val="100000"/>
+                        </a:lnSpc>
+                        <a:spcBef>
+                          <a:spcPts val="0"/>
+                        </a:spcBef>
+                        <a:spcAft>
+                          <a:spcPts val="0"/>
+                        </a:spcAft>
+                        <a:buNone/>
+                      </a:pPr>
+                      <a:r>
+                        <a:rPr lang="en-US" sz="2000" u="none" strike="noStrike" cap="none"/>
+                        <a:t>Goal</a:t>
+                      </a:r>
+                      <a:endParaRPr/>
+                    </a:p>
+                  </a:txBody>
+                  <a:tcPr marL="121925" marR="121925" marT="60950" marB="60950"/>
+                </a:tc>
+                <a:tc>
+                  <a:txBody>
+                    <a:bodyPr/>
+                    <a:lstStyle/>
+                    <a:p>
+                      <a:pPr marL="0" marR="0" lvl="0" indent="0" algn="l" rtl="0">
+                        <a:lnSpc>
+                          <a:spcPct val="100000"/>
+                        </a:lnSpc>
+                        <a:spcBef>
+                          <a:spcPts val="0"/>
+                        </a:spcBef>
+                        <a:spcAft>
+                          <a:spcPts val="0"/>
+                        </a:spcAft>
+                        <a:buNone/>
+                      </a:pPr>
+                      <a:r>
+                        <a:rPr lang="en-US" sz="2000" u="none" strike="noStrike" cap="none"/>
+                        <a:t>Global or Local</a:t>
+                      </a:r>
+                      <a:endParaRPr/>
+                    </a:p>
+                  </a:txBody>
+                  <a:tcPr marL="121925" marR="121925" marT="60950" marB="60950"/>
+                </a:tc>
+                <a:extLst>
+                  <a:ext uri="{0D108BD9-81ED-4DB2-BD59-A6C34878D82A}">
+                    <a16:rowId xmlns:a16="http://schemas.microsoft.com/office/drawing/2014/main" val="10000"/>
+                  </a:ext>
+                </a:extLst>
+              </a:tr>
+              <a:tr h="494450">
+                <a:tc>
+                  <a:txBody>
+                    <a:bodyPr/>
+                    <a:lstStyle/>
+                    <a:p>
+                      <a:pPr marL="0" marR="0" lvl="0" indent="0" algn="l" rtl="0">
+                        <a:lnSpc>
+                          <a:spcPct val="100000"/>
+                        </a:lnSpc>
+                        <a:spcBef>
+                          <a:spcPts val="0"/>
+                        </a:spcBef>
+                        <a:spcAft>
+                          <a:spcPts val="0"/>
+                        </a:spcAft>
+                        <a:buNone/>
+                      </a:pPr>
+                      <a:r>
+                        <a:rPr lang="en-US" sz="1900" u="none" strike="noStrike" cap="none"/>
+                        <a:t>Debugging</a:t>
+                      </a:r>
+                      <a:endParaRPr/>
+                    </a:p>
+                  </a:txBody>
+                  <a:tcPr marL="121925" marR="121925" marT="60950" marB="60950"/>
+                </a:tc>
+                <a:tc>
+                  <a:txBody>
+                    <a:bodyPr/>
+                    <a:lstStyle/>
+                    <a:p>
+                      <a:pPr marL="0" lvl="0" indent="0" algn="l" rtl="0">
+                        <a:spcBef>
+                          <a:spcPts val="0"/>
+                        </a:spcBef>
+                        <a:spcAft>
+                          <a:spcPts val="0"/>
+                        </a:spcAft>
+                        <a:buNone/>
+                      </a:pPr>
+                      <a:endParaRPr/>
+                    </a:p>
+                  </a:txBody>
+                  <a:tcPr marL="121925" marR="121925" marT="60950" marB="60950"/>
+                </a:tc>
+                <a:tc>
+                  <a:txBody>
+                    <a:bodyPr/>
+                    <a:lstStyle/>
+                    <a:p>
+                      <a:pPr marL="0" lvl="0" indent="0" algn="l" rtl="0">
+                        <a:spcBef>
+                          <a:spcPts val="0"/>
+                        </a:spcBef>
+                        <a:spcAft>
+                          <a:spcPts val="0"/>
+                        </a:spcAft>
+                        <a:buNone/>
+                      </a:pPr>
+                      <a:endParaRPr/>
+                    </a:p>
+                  </a:txBody>
+                  <a:tcPr marL="121925" marR="121925" marT="60950" marB="60950"/>
+                </a:tc>
+                <a:tc>
+                  <a:txBody>
+                    <a:bodyPr/>
+                    <a:lstStyle/>
+                    <a:p>
+                      <a:pPr marL="0" lvl="0" indent="0" algn="l" rtl="0">
+                        <a:spcBef>
+                          <a:spcPts val="0"/>
+                        </a:spcBef>
+                        <a:spcAft>
+                          <a:spcPts val="0"/>
+                        </a:spcAft>
+                        <a:buNone/>
+                      </a:pPr>
+                      <a:endParaRPr/>
+                    </a:p>
+                  </a:txBody>
+                  <a:tcPr marL="121925" marR="121925" marT="60950" marB="60950"/>
+                </a:tc>
+                <a:extLst>
+                  <a:ext uri="{0D108BD9-81ED-4DB2-BD59-A6C34878D82A}">
+                    <a16:rowId xmlns:a16="http://schemas.microsoft.com/office/drawing/2014/main" val="10001"/>
+                  </a:ext>
+                </a:extLst>
+              </a:tr>
+              <a:tr h="690875">
+                <a:tc>
+                  <a:txBody>
+                    <a:bodyPr/>
+                    <a:lstStyle/>
+                    <a:p>
+                      <a:pPr marL="0" marR="0" lvl="0" indent="0" algn="l" rtl="0">
+                        <a:lnSpc>
+                          <a:spcPct val="100000"/>
+                        </a:lnSpc>
+                        <a:spcBef>
+                          <a:spcPts val="0"/>
+                        </a:spcBef>
+                        <a:spcAft>
+                          <a:spcPts val="0"/>
+                        </a:spcAft>
+                        <a:buNone/>
+                      </a:pPr>
+                      <a:r>
+                        <a:rPr lang="en-US" sz="1900" u="none" strike="noStrike" cap="none"/>
+                        <a:t>Improving performance</a:t>
+                      </a:r>
+                      <a:endParaRPr/>
+                    </a:p>
+                  </a:txBody>
+                  <a:tcPr marL="121925" marR="121925" marT="60950" marB="60950"/>
+                </a:tc>
+                <a:tc>
+                  <a:txBody>
+                    <a:bodyPr/>
+                    <a:lstStyle/>
+                    <a:p>
+                      <a:pPr marL="0" lvl="0" indent="0" algn="l" rtl="0">
+                        <a:spcBef>
+                          <a:spcPts val="0"/>
+                        </a:spcBef>
+                        <a:spcAft>
+                          <a:spcPts val="0"/>
+                        </a:spcAft>
+                        <a:buNone/>
+                      </a:pPr>
+                      <a:endParaRPr/>
+                    </a:p>
+                  </a:txBody>
+                  <a:tcPr marL="121925" marR="121925" marT="60950" marB="60950"/>
+                </a:tc>
+                <a:tc>
+                  <a:txBody>
+                    <a:bodyPr/>
+                    <a:lstStyle/>
+                    <a:p>
+                      <a:pPr marL="0" lvl="0" indent="0" algn="l" rtl="0">
+                        <a:spcBef>
+                          <a:spcPts val="0"/>
+                        </a:spcBef>
+                        <a:spcAft>
+                          <a:spcPts val="0"/>
+                        </a:spcAft>
+                        <a:buNone/>
+                      </a:pPr>
+                      <a:endParaRPr/>
+                    </a:p>
+                  </a:txBody>
+                  <a:tcPr marL="121925" marR="121925" marT="60950" marB="60950"/>
+                </a:tc>
+                <a:tc>
+                  <a:txBody>
+                    <a:bodyPr/>
+                    <a:lstStyle/>
+                    <a:p>
+                      <a:pPr marL="0" lvl="0" indent="0" algn="l" rtl="0">
+                        <a:spcBef>
+                          <a:spcPts val="0"/>
+                        </a:spcBef>
+                        <a:spcAft>
+                          <a:spcPts val="0"/>
+                        </a:spcAft>
+                        <a:buNone/>
+                      </a:pPr>
+                      <a:endParaRPr/>
+                    </a:p>
+                  </a:txBody>
+                  <a:tcPr marL="121925" marR="121925" marT="60950" marB="60950"/>
+                </a:tc>
+                <a:extLst>
+                  <a:ext uri="{0D108BD9-81ED-4DB2-BD59-A6C34878D82A}">
+                    <a16:rowId xmlns:a16="http://schemas.microsoft.com/office/drawing/2014/main" val="10002"/>
+                  </a:ext>
+                </a:extLst>
+              </a:tr>
+              <a:tr h="494450">
+                <a:tc>
+                  <a:txBody>
+                    <a:bodyPr/>
+                    <a:lstStyle/>
+                    <a:p>
+                      <a:pPr marL="0" marR="0" lvl="0" indent="0" algn="l" rtl="0">
+                        <a:lnSpc>
+                          <a:spcPct val="100000"/>
+                        </a:lnSpc>
+                        <a:spcBef>
+                          <a:spcPts val="0"/>
+                        </a:spcBef>
+                        <a:spcAft>
+                          <a:spcPts val="0"/>
+                        </a:spcAft>
+                        <a:buNone/>
+                      </a:pPr>
+                      <a:r>
+                        <a:rPr lang="en-US" sz="1900" u="none" strike="noStrike" cap="none"/>
+                        <a:t>Trust</a:t>
+                      </a:r>
+                      <a:endParaRPr/>
+                    </a:p>
+                  </a:txBody>
+                  <a:tcPr marL="121925" marR="121925" marT="60950" marB="60950"/>
+                </a:tc>
+                <a:tc>
+                  <a:txBody>
+                    <a:bodyPr/>
+                    <a:lstStyle/>
+                    <a:p>
+                      <a:pPr marL="0" lvl="0" indent="0" algn="l" rtl="0">
+                        <a:spcBef>
+                          <a:spcPts val="0"/>
+                        </a:spcBef>
+                        <a:spcAft>
+                          <a:spcPts val="0"/>
+                        </a:spcAft>
+                        <a:buNone/>
+                      </a:pPr>
+                      <a:endParaRPr/>
+                    </a:p>
+                  </a:txBody>
+                  <a:tcPr marL="121925" marR="121925" marT="60950" marB="60950"/>
+                </a:tc>
+                <a:tc>
+                  <a:txBody>
+                    <a:bodyPr/>
+                    <a:lstStyle/>
+                    <a:p>
+                      <a:pPr marL="0" marR="0" lvl="0" indent="0" algn="l" rtl="0">
+                        <a:lnSpc>
+                          <a:spcPct val="100000"/>
+                        </a:lnSpc>
+                        <a:spcBef>
+                          <a:spcPts val="0"/>
+                        </a:spcBef>
+                        <a:spcAft>
+                          <a:spcPts val="0"/>
+                        </a:spcAft>
+                        <a:buNone/>
+                      </a:pPr>
+                      <a:endParaRPr sz="1900" u="none" strike="noStrike" cap="none"/>
+                    </a:p>
+                  </a:txBody>
+                  <a:tcPr marL="121925" marR="121925" marT="60950" marB="60950"/>
+                </a:tc>
+                <a:tc>
+                  <a:txBody>
+                    <a:bodyPr/>
+                    <a:lstStyle/>
+                    <a:p>
+                      <a:pPr marL="0" lvl="0" indent="0" algn="l" rtl="0">
+                        <a:spcBef>
+                          <a:spcPts val="0"/>
+                        </a:spcBef>
+                        <a:spcAft>
+                          <a:spcPts val="0"/>
+                        </a:spcAft>
+                        <a:buNone/>
+                      </a:pPr>
+                      <a:endParaRPr/>
+                    </a:p>
+                  </a:txBody>
+                  <a:tcPr marL="121925" marR="121925" marT="60950" marB="60950"/>
+                </a:tc>
+                <a:extLst>
+                  <a:ext uri="{0D108BD9-81ED-4DB2-BD59-A6C34878D82A}">
+                    <a16:rowId xmlns:a16="http://schemas.microsoft.com/office/drawing/2014/main" val="10003"/>
+                  </a:ext>
+                </a:extLst>
+              </a:tr>
+              <a:tr h="494450">
+                <a:tc>
+                  <a:txBody>
+                    <a:bodyPr/>
+                    <a:lstStyle/>
+                    <a:p>
+                      <a:pPr marL="0" marR="0" lvl="0" indent="0" algn="l" rtl="0">
+                        <a:lnSpc>
+                          <a:spcPct val="100000"/>
+                        </a:lnSpc>
+                        <a:spcBef>
+                          <a:spcPts val="0"/>
+                        </a:spcBef>
+                        <a:spcAft>
+                          <a:spcPts val="0"/>
+                        </a:spcAft>
+                        <a:buNone/>
+                      </a:pPr>
+                      <a:r>
+                        <a:rPr lang="en-US" sz="1900" u="none" strike="noStrike" cap="none"/>
+                        <a:t>Interventions</a:t>
+                      </a:r>
+                      <a:endParaRPr/>
+                    </a:p>
+                  </a:txBody>
+                  <a:tcPr marL="121925" marR="121925" marT="60950" marB="60950"/>
+                </a:tc>
+                <a:tc>
+                  <a:txBody>
+                    <a:bodyPr/>
+                    <a:lstStyle/>
+                    <a:p>
+                      <a:pPr marL="0" lvl="0" indent="0" algn="l" rtl="0">
+                        <a:spcBef>
+                          <a:spcPts val="0"/>
+                        </a:spcBef>
+                        <a:spcAft>
+                          <a:spcPts val="0"/>
+                        </a:spcAft>
+                        <a:buNone/>
+                      </a:pPr>
+                      <a:endParaRPr/>
+                    </a:p>
+                  </a:txBody>
+                  <a:tcPr marL="121925" marR="121925" marT="60950" marB="60950"/>
+                </a:tc>
+                <a:tc>
+                  <a:txBody>
+                    <a:bodyPr/>
+                    <a:lstStyle/>
+                    <a:p>
+                      <a:pPr marL="0" marR="0" lvl="0" indent="0" algn="l" rtl="0">
+                        <a:lnSpc>
+                          <a:spcPct val="100000"/>
+                        </a:lnSpc>
+                        <a:spcBef>
+                          <a:spcPts val="0"/>
+                        </a:spcBef>
+                        <a:spcAft>
+                          <a:spcPts val="0"/>
+                        </a:spcAft>
+                        <a:buNone/>
+                      </a:pPr>
+                      <a:endParaRPr sz="1900" u="none" strike="noStrike" cap="none"/>
+                    </a:p>
+                  </a:txBody>
+                  <a:tcPr marL="121925" marR="121925" marT="60950" marB="60950"/>
+                </a:tc>
+                <a:tc>
+                  <a:txBody>
+                    <a:bodyPr/>
+                    <a:lstStyle/>
+                    <a:p>
+                      <a:pPr marL="0" lvl="0" indent="0" algn="l" rtl="0">
+                        <a:spcBef>
+                          <a:spcPts val="0"/>
+                        </a:spcBef>
+                        <a:spcAft>
+                          <a:spcPts val="0"/>
+                        </a:spcAft>
+                        <a:buNone/>
+                      </a:pPr>
+                      <a:endParaRPr/>
+                    </a:p>
+                  </a:txBody>
+                  <a:tcPr marL="121925" marR="121925" marT="60950" marB="60950"/>
+                </a:tc>
+                <a:extLst>
+                  <a:ext uri="{0D108BD9-81ED-4DB2-BD59-A6C34878D82A}">
+                    <a16:rowId xmlns:a16="http://schemas.microsoft.com/office/drawing/2014/main" val="10004"/>
+                  </a:ext>
+                </a:extLst>
+              </a:tr>
+              <a:tr h="494450">
+                <a:tc>
+                  <a:txBody>
+                    <a:bodyPr/>
+                    <a:lstStyle/>
+                    <a:p>
+                      <a:pPr marL="0" marR="0" lvl="0" indent="0" algn="l" rtl="0">
+                        <a:lnSpc>
+                          <a:spcPct val="100000"/>
+                        </a:lnSpc>
+                        <a:spcBef>
+                          <a:spcPts val="0"/>
+                        </a:spcBef>
+                        <a:spcAft>
+                          <a:spcPts val="0"/>
+                        </a:spcAft>
+                        <a:buNone/>
+                      </a:pPr>
+                      <a:r>
+                        <a:rPr lang="en-US" sz="1900" u="none" strike="noStrike" cap="none"/>
+                        <a:t>Recourse</a:t>
+                      </a:r>
+                      <a:endParaRPr/>
+                    </a:p>
+                  </a:txBody>
+                  <a:tcPr marL="121925" marR="121925" marT="60950" marB="60950"/>
+                </a:tc>
+                <a:tc>
+                  <a:txBody>
+                    <a:bodyPr/>
+                    <a:lstStyle/>
+                    <a:p>
+                      <a:pPr marL="0" lvl="0" indent="0" algn="l" rtl="0">
+                        <a:spcBef>
+                          <a:spcPts val="0"/>
+                        </a:spcBef>
+                        <a:spcAft>
+                          <a:spcPts val="0"/>
+                        </a:spcAft>
+                        <a:buNone/>
+                      </a:pPr>
+                      <a:endParaRPr/>
+                    </a:p>
+                  </a:txBody>
+                  <a:tcPr marL="121925" marR="121925" marT="60950" marB="60950"/>
+                </a:tc>
+                <a:tc>
+                  <a:txBody>
+                    <a:bodyPr/>
+                    <a:lstStyle/>
+                    <a:p>
+                      <a:pPr marL="0" lvl="0" indent="0" algn="l" rtl="0">
+                        <a:spcBef>
+                          <a:spcPts val="0"/>
+                        </a:spcBef>
+                        <a:spcAft>
+                          <a:spcPts val="0"/>
+                        </a:spcAft>
+                        <a:buNone/>
+                      </a:pPr>
+                      <a:endParaRPr/>
+                    </a:p>
+                  </a:txBody>
+                  <a:tcPr marL="121925" marR="121925" marT="60950" marB="60950"/>
+                </a:tc>
+                <a:tc>
+                  <a:txBody>
+                    <a:bodyPr/>
+                    <a:lstStyle/>
+                    <a:p>
+                      <a:pPr marL="0" lvl="0" indent="0" algn="l" rtl="0">
+                        <a:spcBef>
+                          <a:spcPts val="0"/>
+                        </a:spcBef>
+                        <a:spcAft>
+                          <a:spcPts val="0"/>
+                        </a:spcAft>
+                        <a:buNone/>
+                      </a:pPr>
+                      <a:endParaRPr/>
+                    </a:p>
+                  </a:txBody>
+                  <a:tcPr marL="121925" marR="121925" marT="60950" marB="60950"/>
+                </a:tc>
+                <a:extLst>
+                  <a:ext uri="{0D108BD9-81ED-4DB2-BD59-A6C34878D82A}">
+                    <a16:rowId xmlns:a16="http://schemas.microsoft.com/office/drawing/2014/main" val="10005"/>
+                  </a:ext>
+                </a:extLst>
+              </a:tr>
+            </a:tbl>
+          </a:graphicData>
+        </a:graphic>
+      </p:graphicFrame>
+    </p:spTree>
+  </p:cSld>
+  <p:clrMapOvr>
+    <a:masterClrMapping/>
+  </p:clrMapOvr>
+</p:sld>
+</file>
+
+<file path=ppt/slides/slide12.xml><?xml version="1.0" encoding="utf-8"?>
 <p:sld xmlns:a="http://schemas.openxmlformats.org/drawingml/2006/main" xmlns:r="http://schemas.openxmlformats.org/officeDocument/2006/relationships" xmlns:p="http://schemas.openxmlformats.org/presentationml/2006/main">
   <p:cSld>
     <p:spTree>
@@ -15447,7 +19612,7 @@
 </p:sld>
 </file>
 
-<file path=ppt/slides/slide11.xml><?xml version="1.0" encoding="utf-8"?>
+<file path=ppt/slides/slide13.xml><?xml version="1.0" encoding="utf-8"?>
 <p:sld xmlns:a="http://schemas.openxmlformats.org/drawingml/2006/main" xmlns:r="http://schemas.openxmlformats.org/officeDocument/2006/relationships" xmlns:p="http://schemas.openxmlformats.org/presentationml/2006/main">
   <p:cSld>
     <p:spTree>
@@ -15574,7 +19739,7 @@
 </p:sld>
 </file>
 
-<file path=ppt/slides/slide12.xml><?xml version="1.0" encoding="utf-8"?>
+<file path=ppt/slides/slide14.xml><?xml version="1.0" encoding="utf-8"?>
 <p:sld xmlns:a="http://schemas.openxmlformats.org/drawingml/2006/main" xmlns:r="http://schemas.openxmlformats.org/officeDocument/2006/relationships" xmlns:p="http://schemas.openxmlformats.org/presentationml/2006/main">
   <p:cSld>
     <p:spTree>
@@ -15823,358 +19988,6 @@
             <a:r>
               <a:rPr lang="en-US" dirty="0"/>
               <a:t>Look at where the models makes mistakes</a:t>
-            </a:r>
-            <a:endParaRPr dirty="0"/>
-          </a:p>
-        </p:txBody>
-      </p:sp>
-    </p:spTree>
-  </p:cSld>
-  <p:clrMapOvr>
-    <a:masterClrMapping/>
-  </p:clrMapOvr>
-</p:sld>
-</file>
-
-<file path=ppt/slides/slide13.xml><?xml version="1.0" encoding="utf-8"?>
-<p:sld xmlns:a="http://schemas.openxmlformats.org/drawingml/2006/main" xmlns:r="http://schemas.openxmlformats.org/officeDocument/2006/relationships" xmlns:p="http://schemas.openxmlformats.org/presentationml/2006/main">
-  <p:cSld>
-    <p:spTree>
-      <p:nvGrpSpPr>
-        <p:cNvPr id="1" name="Shape 107"/>
-        <p:cNvGrpSpPr/>
-        <p:nvPr/>
-      </p:nvGrpSpPr>
-      <p:grpSpPr>
-        <a:xfrm>
-          <a:off x="0" y="0"/>
-          <a:ext cx="0" cy="0"/>
-          <a:chOff x="0" y="0"/>
-          <a:chExt cx="0" cy="0"/>
-        </a:xfrm>
-      </p:grpSpPr>
-      <p:sp>
-        <p:nvSpPr>
-          <p:cNvPr id="108" name="Google Shape;108;g71c382910d_0_0"/>
-          <p:cNvSpPr txBox="1">
-            <a:spLocks noGrp="1"/>
-          </p:cNvSpPr>
-          <p:nvPr>
-            <p:ph type="title"/>
-          </p:nvPr>
-        </p:nvSpPr>
-        <p:spPr>
-          <a:xfrm>
-            <a:off x="415600" y="86563"/>
-            <a:ext cx="11360700" cy="763500"/>
-          </a:xfrm>
-          <a:prstGeom prst="rect">
-            <a:avLst/>
-          </a:prstGeom>
-        </p:spPr>
-        <p:txBody>
-          <a:bodyPr spcFirstLastPara="1" wrap="square" lIns="121900" tIns="121900" rIns="121900" bIns="121900" anchor="t" anchorCtr="0">
-            <a:noAutofit/>
-          </a:bodyPr>
-          <a:lstStyle/>
-          <a:p>
-            <a:pPr marL="0" lvl="0" indent="0" algn="l" rtl="0">
-              <a:spcBef>
-                <a:spcPts val="0"/>
-              </a:spcBef>
-              <a:spcAft>
-                <a:spcPts val="0"/>
-              </a:spcAft>
-              <a:buNone/>
-            </a:pPr>
-            <a:r>
-              <a:rPr lang="en-US" dirty="0"/>
-              <a:t>Case Study</a:t>
-            </a:r>
-            <a:endParaRPr dirty="0"/>
-          </a:p>
-        </p:txBody>
-      </p:sp>
-      <p:sp>
-        <p:nvSpPr>
-          <p:cNvPr id="109" name="Google Shape;109;g71c382910d_0_0"/>
-          <p:cNvSpPr txBox="1">
-            <a:spLocks noGrp="1"/>
-          </p:cNvSpPr>
-          <p:nvPr>
-            <p:ph type="body" idx="1"/>
-          </p:nvPr>
-        </p:nvSpPr>
-        <p:spPr>
-          <a:xfrm>
-            <a:off x="415600" y="1536633"/>
-            <a:ext cx="11360700" cy="4555200"/>
-          </a:xfrm>
-          <a:prstGeom prst="rect">
-            <a:avLst/>
-          </a:prstGeom>
-        </p:spPr>
-        <p:txBody>
-          <a:bodyPr spcFirstLastPara="1" wrap="square" lIns="121900" tIns="121900" rIns="121900" bIns="121900" anchor="t" anchorCtr="0">
-            <a:noAutofit/>
-          </a:bodyPr>
-          <a:lstStyle/>
-          <a:p>
-            <a:pPr marL="0" lvl="0" indent="0" algn="l" rtl="0">
-              <a:spcBef>
-                <a:spcPts val="0"/>
-              </a:spcBef>
-              <a:spcAft>
-                <a:spcPts val="0"/>
-              </a:spcAft>
-              <a:buNone/>
-            </a:pPr>
-            <a:r>
-              <a:rPr lang="en-US" dirty="0">
-                <a:solidFill>
-                  <a:srgbClr val="8A0002"/>
-                </a:solidFill>
-                <a:hlinkClick r:id="rId3">
-                  <a:extLst>
-                    <a:ext uri="{A12FA001-AC4F-418D-AE19-62706E023703}">
-                      <ahyp:hlinkClr xmlns:ahyp="http://schemas.microsoft.com/office/drawing/2018/hyperlinkcolor" val="tx"/>
-                    </a:ext>
-                  </a:extLst>
-                </a:hlinkClick>
-              </a:rPr>
-              <a:t>Childhood Vaccination in Mexico</a:t>
-            </a:r>
-            <a:endParaRPr dirty="0">
-              <a:solidFill>
-                <a:srgbClr val="8A0002"/>
-              </a:solidFill>
-            </a:endParaRPr>
-          </a:p>
-        </p:txBody>
-      </p:sp>
-    </p:spTree>
-    <p:extLst>
-      <p:ext uri="{BB962C8B-B14F-4D97-AF65-F5344CB8AC3E}">
-        <p14:creationId xmlns:p14="http://schemas.microsoft.com/office/powerpoint/2010/main" val="2903955151"/>
-      </p:ext>
-    </p:extLst>
-  </p:cSld>
-  <p:clrMapOvr>
-    <a:masterClrMapping/>
-  </p:clrMapOvr>
-</p:sld>
-</file>
-
-<file path=ppt/slides/slide14.xml><?xml version="1.0" encoding="utf-8"?>
-<p:sld xmlns:a="http://schemas.openxmlformats.org/drawingml/2006/main" xmlns:r="http://schemas.openxmlformats.org/officeDocument/2006/relationships" xmlns:p="http://schemas.openxmlformats.org/presentationml/2006/main">
-  <p:cSld>
-    <p:spTree>
-      <p:nvGrpSpPr>
-        <p:cNvPr id="1" name="Shape 100"/>
-        <p:cNvGrpSpPr/>
-        <p:nvPr/>
-      </p:nvGrpSpPr>
-      <p:grpSpPr>
-        <a:xfrm>
-          <a:off x="0" y="0"/>
-          <a:ext cx="0" cy="0"/>
-          <a:chOff x="0" y="0"/>
-          <a:chExt cx="0" cy="0"/>
-        </a:xfrm>
-      </p:grpSpPr>
-      <p:sp>
-        <p:nvSpPr>
-          <p:cNvPr id="101" name="Google Shape;101;p29"/>
-          <p:cNvSpPr txBox="1">
-            <a:spLocks noGrp="1"/>
-          </p:cNvSpPr>
-          <p:nvPr>
-            <p:ph type="title"/>
-          </p:nvPr>
-        </p:nvSpPr>
-        <p:spPr>
-          <a:xfrm>
-            <a:off x="415600" y="86563"/>
-            <a:ext cx="11360700" cy="763500"/>
-          </a:xfrm>
-          <a:prstGeom prst="rect">
-            <a:avLst/>
-          </a:prstGeom>
-          <a:noFill/>
-          <a:ln>
-            <a:noFill/>
-          </a:ln>
-        </p:spPr>
-        <p:txBody>
-          <a:bodyPr spcFirstLastPara="1" wrap="square" lIns="121900" tIns="121900" rIns="121900" bIns="121900" anchor="t" anchorCtr="0">
-            <a:noAutofit/>
-          </a:bodyPr>
-          <a:lstStyle/>
-          <a:p>
-            <a:pPr marL="0" lvl="0" indent="0" algn="l" rtl="0">
-              <a:lnSpc>
-                <a:spcPct val="100000"/>
-              </a:lnSpc>
-              <a:spcBef>
-                <a:spcPts val="0"/>
-              </a:spcBef>
-              <a:spcAft>
-                <a:spcPts val="0"/>
-              </a:spcAft>
-              <a:buClr>
-                <a:srgbClr val="FFFFFF"/>
-              </a:buClr>
-              <a:buSzPts val="3700"/>
-              <a:buNone/>
-            </a:pPr>
-            <a:r>
-              <a:rPr lang="en-US"/>
-              <a:t>How to interpret specific models</a:t>
-            </a:r>
-            <a:endParaRPr/>
-          </a:p>
-        </p:txBody>
-      </p:sp>
-      <p:sp>
-        <p:nvSpPr>
-          <p:cNvPr id="102" name="Google Shape;102;p29"/>
-          <p:cNvSpPr txBox="1">
-            <a:spLocks noGrp="1"/>
-          </p:cNvSpPr>
-          <p:nvPr>
-            <p:ph type="body" idx="1"/>
-          </p:nvPr>
-        </p:nvSpPr>
-        <p:spPr>
-          <a:xfrm>
-            <a:off x="415600" y="1536633"/>
-            <a:ext cx="11360700" cy="4555200"/>
-          </a:xfrm>
-          <a:prstGeom prst="rect">
-            <a:avLst/>
-          </a:prstGeom>
-          <a:noFill/>
-          <a:ln>
-            <a:noFill/>
-          </a:ln>
-        </p:spPr>
-        <p:txBody>
-          <a:bodyPr spcFirstLastPara="1" wrap="square" lIns="121900" tIns="121900" rIns="121900" bIns="121900" anchor="t" anchorCtr="0">
-            <a:noAutofit/>
-          </a:bodyPr>
-          <a:lstStyle/>
-          <a:p>
-            <a:pPr marL="457200" lvl="0" indent="-381000" algn="l" rtl="0">
-              <a:lnSpc>
-                <a:spcPct val="115000"/>
-              </a:lnSpc>
-              <a:spcBef>
-                <a:spcPts val="0"/>
-              </a:spcBef>
-              <a:spcAft>
-                <a:spcPts val="0"/>
-              </a:spcAft>
-              <a:buClr>
-                <a:srgbClr val="434343"/>
-              </a:buClr>
-              <a:buSzPts val="2400"/>
-              <a:buChar char="●"/>
-            </a:pPr>
-            <a:r>
-              <a:rPr lang="en-US" dirty="0"/>
-              <a:t>Decision Trees</a:t>
-            </a:r>
-            <a:endParaRPr dirty="0"/>
-          </a:p>
-          <a:p>
-            <a:pPr marL="457200" lvl="0" indent="-381000" algn="l" rtl="0">
-              <a:lnSpc>
-                <a:spcPct val="115000"/>
-              </a:lnSpc>
-              <a:spcBef>
-                <a:spcPts val="0"/>
-              </a:spcBef>
-              <a:spcAft>
-                <a:spcPts val="0"/>
-              </a:spcAft>
-              <a:buClr>
-                <a:srgbClr val="434343"/>
-              </a:buClr>
-              <a:buSzPts val="2400"/>
-              <a:buChar char="●"/>
-            </a:pPr>
-            <a:r>
-              <a:rPr lang="en-US" dirty="0"/>
-              <a:t>KNN</a:t>
-            </a:r>
-            <a:endParaRPr dirty="0"/>
-          </a:p>
-          <a:p>
-            <a:pPr marL="457200" lvl="0" indent="-381000" algn="l" rtl="0">
-              <a:lnSpc>
-                <a:spcPct val="115000"/>
-              </a:lnSpc>
-              <a:spcBef>
-                <a:spcPts val="0"/>
-              </a:spcBef>
-              <a:spcAft>
-                <a:spcPts val="0"/>
-              </a:spcAft>
-              <a:buClr>
-                <a:srgbClr val="434343"/>
-              </a:buClr>
-              <a:buSzPts val="2400"/>
-              <a:buChar char="●"/>
-            </a:pPr>
-            <a:r>
-              <a:rPr lang="en-US" dirty="0"/>
-              <a:t>SVMs</a:t>
-            </a:r>
-            <a:endParaRPr dirty="0"/>
-          </a:p>
-          <a:p>
-            <a:pPr marL="457200" lvl="0" indent="-381000" algn="l" rtl="0">
-              <a:lnSpc>
-                <a:spcPct val="115000"/>
-              </a:lnSpc>
-              <a:spcBef>
-                <a:spcPts val="0"/>
-              </a:spcBef>
-              <a:spcAft>
-                <a:spcPts val="0"/>
-              </a:spcAft>
-              <a:buClr>
-                <a:srgbClr val="434343"/>
-              </a:buClr>
-              <a:buSzPts val="2400"/>
-              <a:buChar char="●"/>
-            </a:pPr>
-            <a:r>
-              <a:rPr lang="en-US" dirty="0"/>
-              <a:t>RFs</a:t>
-            </a:r>
-            <a:endParaRPr dirty="0"/>
-          </a:p>
-          <a:p>
-            <a:pPr marL="457200" lvl="0" indent="-381000" algn="l" rtl="0">
-              <a:lnSpc>
-                <a:spcPct val="115000"/>
-              </a:lnSpc>
-              <a:spcBef>
-                <a:spcPts val="0"/>
-              </a:spcBef>
-              <a:spcAft>
-                <a:spcPts val="0"/>
-              </a:spcAft>
-              <a:buClr>
-                <a:srgbClr val="434343"/>
-              </a:buClr>
-              <a:buSzPts val="2400"/>
-              <a:buChar char="●"/>
-            </a:pPr>
-            <a:r>
-              <a:rPr lang="en-US" dirty="0"/>
-              <a:t>NNs</a:t>
             </a:r>
             <a:endParaRPr dirty="0"/>
           </a:p>
@@ -16240,6 +20053,312 @@
               <a:buNone/>
             </a:pPr>
             <a:r>
+              <a:rPr lang="en-US" dirty="0"/>
+              <a:t>Case Study</a:t>
+            </a:r>
+            <a:endParaRPr dirty="0"/>
+          </a:p>
+        </p:txBody>
+      </p:sp>
+      <p:sp>
+        <p:nvSpPr>
+          <p:cNvPr id="109" name="Google Shape;109;g71c382910d_0_0"/>
+          <p:cNvSpPr txBox="1">
+            <a:spLocks noGrp="1"/>
+          </p:cNvSpPr>
+          <p:nvPr>
+            <p:ph type="body" idx="1"/>
+          </p:nvPr>
+        </p:nvSpPr>
+        <p:spPr>
+          <a:xfrm>
+            <a:off x="415600" y="1536633"/>
+            <a:ext cx="11360700" cy="4555200"/>
+          </a:xfrm>
+          <a:prstGeom prst="rect">
+            <a:avLst/>
+          </a:prstGeom>
+        </p:spPr>
+        <p:txBody>
+          <a:bodyPr spcFirstLastPara="1" wrap="square" lIns="121900" tIns="121900" rIns="121900" bIns="121900" anchor="t" anchorCtr="0">
+            <a:noAutofit/>
+          </a:bodyPr>
+          <a:lstStyle/>
+          <a:p>
+            <a:pPr marL="0" lvl="0" indent="0" algn="l" rtl="0">
+              <a:spcBef>
+                <a:spcPts val="0"/>
+              </a:spcBef>
+              <a:spcAft>
+                <a:spcPts val="0"/>
+              </a:spcAft>
+              <a:buNone/>
+            </a:pPr>
+            <a:r>
+              <a:rPr lang="en-US" dirty="0">
+                <a:solidFill>
+                  <a:srgbClr val="8A0002"/>
+                </a:solidFill>
+                <a:hlinkClick r:id="rId3">
+                  <a:extLst>
+                    <a:ext uri="{A12FA001-AC4F-418D-AE19-62706E023703}">
+                      <ahyp:hlinkClr xmlns:ahyp="http://schemas.microsoft.com/office/drawing/2018/hyperlinkcolor" val="tx"/>
+                    </a:ext>
+                  </a:extLst>
+                </a:hlinkClick>
+              </a:rPr>
+              <a:t>Childhood Vaccination in Mexico</a:t>
+            </a:r>
+            <a:endParaRPr dirty="0">
+              <a:solidFill>
+                <a:srgbClr val="8A0002"/>
+              </a:solidFill>
+            </a:endParaRPr>
+          </a:p>
+        </p:txBody>
+      </p:sp>
+    </p:spTree>
+    <p:extLst>
+      <p:ext uri="{BB962C8B-B14F-4D97-AF65-F5344CB8AC3E}">
+        <p14:creationId xmlns:p14="http://schemas.microsoft.com/office/powerpoint/2010/main" val="2903955151"/>
+      </p:ext>
+    </p:extLst>
+  </p:cSld>
+  <p:clrMapOvr>
+    <a:masterClrMapping/>
+  </p:clrMapOvr>
+</p:sld>
+</file>
+
+<file path=ppt/slides/slide16.xml><?xml version="1.0" encoding="utf-8"?>
+<p:sld xmlns:a="http://schemas.openxmlformats.org/drawingml/2006/main" xmlns:r="http://schemas.openxmlformats.org/officeDocument/2006/relationships" xmlns:p="http://schemas.openxmlformats.org/presentationml/2006/main">
+  <p:cSld>
+    <p:spTree>
+      <p:nvGrpSpPr>
+        <p:cNvPr id="1" name="Shape 100"/>
+        <p:cNvGrpSpPr/>
+        <p:nvPr/>
+      </p:nvGrpSpPr>
+      <p:grpSpPr>
+        <a:xfrm>
+          <a:off x="0" y="0"/>
+          <a:ext cx="0" cy="0"/>
+          <a:chOff x="0" y="0"/>
+          <a:chExt cx="0" cy="0"/>
+        </a:xfrm>
+      </p:grpSpPr>
+      <p:sp>
+        <p:nvSpPr>
+          <p:cNvPr id="101" name="Google Shape;101;p29"/>
+          <p:cNvSpPr txBox="1">
+            <a:spLocks noGrp="1"/>
+          </p:cNvSpPr>
+          <p:nvPr>
+            <p:ph type="title"/>
+          </p:nvPr>
+        </p:nvSpPr>
+        <p:spPr>
+          <a:xfrm>
+            <a:off x="415600" y="86563"/>
+            <a:ext cx="11360700" cy="763500"/>
+          </a:xfrm>
+          <a:prstGeom prst="rect">
+            <a:avLst/>
+          </a:prstGeom>
+          <a:noFill/>
+          <a:ln>
+            <a:noFill/>
+          </a:ln>
+        </p:spPr>
+        <p:txBody>
+          <a:bodyPr spcFirstLastPara="1" wrap="square" lIns="121900" tIns="121900" rIns="121900" bIns="121900" anchor="t" anchorCtr="0">
+            <a:noAutofit/>
+          </a:bodyPr>
+          <a:lstStyle/>
+          <a:p>
+            <a:pPr marL="0" lvl="0" indent="0" algn="l" rtl="0">
+              <a:lnSpc>
+                <a:spcPct val="100000"/>
+              </a:lnSpc>
+              <a:spcBef>
+                <a:spcPts val="0"/>
+              </a:spcBef>
+              <a:spcAft>
+                <a:spcPts val="0"/>
+              </a:spcAft>
+              <a:buClr>
+                <a:srgbClr val="FFFFFF"/>
+              </a:buClr>
+              <a:buSzPts val="3700"/>
+              <a:buNone/>
+            </a:pPr>
+            <a:r>
+              <a:rPr lang="en-US"/>
+              <a:t>How to interpret specific models</a:t>
+            </a:r>
+            <a:endParaRPr/>
+          </a:p>
+        </p:txBody>
+      </p:sp>
+      <p:sp>
+        <p:nvSpPr>
+          <p:cNvPr id="102" name="Google Shape;102;p29"/>
+          <p:cNvSpPr txBox="1">
+            <a:spLocks noGrp="1"/>
+          </p:cNvSpPr>
+          <p:nvPr>
+            <p:ph type="body" idx="1"/>
+          </p:nvPr>
+        </p:nvSpPr>
+        <p:spPr>
+          <a:xfrm>
+            <a:off x="415600" y="1536633"/>
+            <a:ext cx="11360700" cy="4555200"/>
+          </a:xfrm>
+          <a:prstGeom prst="rect">
+            <a:avLst/>
+          </a:prstGeom>
+          <a:noFill/>
+          <a:ln>
+            <a:noFill/>
+          </a:ln>
+        </p:spPr>
+        <p:txBody>
+          <a:bodyPr spcFirstLastPara="1" wrap="square" lIns="121900" tIns="121900" rIns="121900" bIns="121900" anchor="t" anchorCtr="0">
+            <a:noAutofit/>
+          </a:bodyPr>
+          <a:lstStyle/>
+          <a:p>
+            <a:pPr marL="457200" lvl="0" indent="-381000" algn="l" rtl="0">
+              <a:lnSpc>
+                <a:spcPct val="115000"/>
+              </a:lnSpc>
+              <a:spcBef>
+                <a:spcPts val="0"/>
+              </a:spcBef>
+              <a:spcAft>
+                <a:spcPts val="0"/>
+              </a:spcAft>
+              <a:buClr>
+                <a:srgbClr val="434343"/>
+              </a:buClr>
+              <a:buSzPts val="2400"/>
+              <a:buChar char="●"/>
+            </a:pPr>
+            <a:r>
+              <a:rPr lang="en-US" dirty="0"/>
+              <a:t>Decision Trees</a:t>
+            </a:r>
+            <a:endParaRPr dirty="0"/>
+          </a:p>
+          <a:p>
+            <a:pPr marL="457200" lvl="0" indent="-381000" algn="l" rtl="0">
+              <a:lnSpc>
+                <a:spcPct val="115000"/>
+              </a:lnSpc>
+              <a:spcBef>
+                <a:spcPts val="0"/>
+              </a:spcBef>
+              <a:spcAft>
+                <a:spcPts val="0"/>
+              </a:spcAft>
+              <a:buClr>
+                <a:srgbClr val="434343"/>
+              </a:buClr>
+              <a:buSzPts val="2400"/>
+              <a:buChar char="●"/>
+            </a:pPr>
+            <a:r>
+              <a:rPr lang="en-US" dirty="0"/>
+              <a:t>RFs</a:t>
+            </a:r>
+            <a:endParaRPr dirty="0"/>
+          </a:p>
+          <a:p>
+            <a:pPr marL="457200" lvl="0" indent="-381000" algn="l" rtl="0">
+              <a:lnSpc>
+                <a:spcPct val="115000"/>
+              </a:lnSpc>
+              <a:spcBef>
+                <a:spcPts val="0"/>
+              </a:spcBef>
+              <a:spcAft>
+                <a:spcPts val="0"/>
+              </a:spcAft>
+              <a:buClr>
+                <a:srgbClr val="434343"/>
+              </a:buClr>
+              <a:buSzPts val="2400"/>
+              <a:buChar char="●"/>
+            </a:pPr>
+            <a:r>
+              <a:rPr lang="en-US" dirty="0"/>
+              <a:t>NNs</a:t>
+            </a:r>
+            <a:endParaRPr dirty="0"/>
+          </a:p>
+        </p:txBody>
+      </p:sp>
+    </p:spTree>
+  </p:cSld>
+  <p:clrMapOvr>
+    <a:masterClrMapping/>
+  </p:clrMapOvr>
+</p:sld>
+</file>
+
+<file path=ppt/slides/slide17.xml><?xml version="1.0" encoding="utf-8"?>
+<p:sld xmlns:a="http://schemas.openxmlformats.org/drawingml/2006/main" xmlns:r="http://schemas.openxmlformats.org/officeDocument/2006/relationships" xmlns:p="http://schemas.openxmlformats.org/presentationml/2006/main">
+  <p:cSld>
+    <p:spTree>
+      <p:nvGrpSpPr>
+        <p:cNvPr id="1" name="Shape 107"/>
+        <p:cNvGrpSpPr/>
+        <p:nvPr/>
+      </p:nvGrpSpPr>
+      <p:grpSpPr>
+        <a:xfrm>
+          <a:off x="0" y="0"/>
+          <a:ext cx="0" cy="0"/>
+          <a:chOff x="0" y="0"/>
+          <a:chExt cx="0" cy="0"/>
+        </a:xfrm>
+      </p:grpSpPr>
+      <p:sp>
+        <p:nvSpPr>
+          <p:cNvPr id="108" name="Google Shape;108;g71c382910d_0_0"/>
+          <p:cNvSpPr txBox="1">
+            <a:spLocks noGrp="1"/>
+          </p:cNvSpPr>
+          <p:nvPr>
+            <p:ph type="title"/>
+          </p:nvPr>
+        </p:nvSpPr>
+        <p:spPr>
+          <a:xfrm>
+            <a:off x="415600" y="86563"/>
+            <a:ext cx="11360700" cy="763500"/>
+          </a:xfrm>
+          <a:prstGeom prst="rect">
+            <a:avLst/>
+          </a:prstGeom>
+        </p:spPr>
+        <p:txBody>
+          <a:bodyPr spcFirstLastPara="1" wrap="square" lIns="121900" tIns="121900" rIns="121900" bIns="121900" anchor="t" anchorCtr="0">
+            <a:noAutofit/>
+          </a:bodyPr>
+          <a:lstStyle/>
+          <a:p>
+            <a:pPr marL="0" lvl="0" indent="0" algn="l" rtl="0">
+              <a:spcBef>
+                <a:spcPts val="0"/>
+              </a:spcBef>
+              <a:spcAft>
+                <a:spcPts val="0"/>
+              </a:spcAft>
+              <a:buNone/>
+            </a:pPr>
+            <a:r>
               <a:rPr lang="en-US"/>
               <a:t>Feature Importances</a:t>
             </a:r>
@@ -16293,7 +20412,7 @@
 </p:sld>
 </file>
 
-<file path=ppt/slides/slide16.xml><?xml version="1.0" encoding="utf-8"?>
+<file path=ppt/slides/slide18.xml><?xml version="1.0" encoding="utf-8"?>
 <p:sld xmlns:a="http://schemas.openxmlformats.org/drawingml/2006/main" xmlns:r="http://schemas.openxmlformats.org/officeDocument/2006/relationships" xmlns:p="http://schemas.openxmlformats.org/presentationml/2006/main">
   <p:cSld>
     <p:spTree>
@@ -16453,7 +20572,7 @@
 </p:sld>
 </file>
 
-<file path=ppt/slides/slide17.xml><?xml version="1.0" encoding="utf-8"?>
+<file path=ppt/slides/slide19.xml><?xml version="1.0" encoding="utf-8"?>
 <p:sld xmlns:a="http://schemas.openxmlformats.org/drawingml/2006/main" xmlns:r="http://schemas.openxmlformats.org/officeDocument/2006/relationships" xmlns:p="http://schemas.openxmlformats.org/presentationml/2006/main">
   <p:cSld>
     <p:spTree>
@@ -18079,338 +22198,6 @@
 </p:sld>
 </file>
 
-<file path=ppt/slides/slide18.xml><?xml version="1.0" encoding="utf-8"?>
-<p:sld xmlns:a="http://schemas.openxmlformats.org/drawingml/2006/main" xmlns:r="http://schemas.openxmlformats.org/officeDocument/2006/relationships" xmlns:p="http://schemas.openxmlformats.org/presentationml/2006/main">
-  <p:cSld>
-    <p:spTree>
-      <p:nvGrpSpPr>
-        <p:cNvPr id="1" name="Shape 142"/>
-        <p:cNvGrpSpPr/>
-        <p:nvPr/>
-      </p:nvGrpSpPr>
-      <p:grpSpPr>
-        <a:xfrm>
-          <a:off x="0" y="0"/>
-          <a:ext cx="0" cy="0"/>
-          <a:chOff x="0" y="0"/>
-          <a:chExt cx="0" cy="0"/>
-        </a:xfrm>
-      </p:grpSpPr>
-      <p:sp>
-        <p:nvSpPr>
-          <p:cNvPr id="143" name="Google Shape;143;p12"/>
-          <p:cNvSpPr txBox="1">
-            <a:spLocks noGrp="1"/>
-          </p:cNvSpPr>
-          <p:nvPr>
-            <p:ph type="title"/>
-          </p:nvPr>
-        </p:nvSpPr>
-        <p:spPr>
-          <a:xfrm>
-            <a:off x="415600" y="86563"/>
-            <a:ext cx="11360700" cy="763500"/>
-          </a:xfrm>
-          <a:prstGeom prst="rect">
-            <a:avLst/>
-          </a:prstGeom>
-          <a:noFill/>
-          <a:ln>
-            <a:noFill/>
-          </a:ln>
-        </p:spPr>
-        <p:txBody>
-          <a:bodyPr spcFirstLastPara="1" wrap="square" lIns="121900" tIns="121900" rIns="121900" bIns="121900" anchor="t" anchorCtr="0">
-            <a:noAutofit/>
-          </a:bodyPr>
-          <a:lstStyle/>
-          <a:p>
-            <a:pPr marL="0" lvl="0" indent="0" algn="l" rtl="0">
-              <a:lnSpc>
-                <a:spcPct val="100000"/>
-              </a:lnSpc>
-              <a:spcBef>
-                <a:spcPts val="0"/>
-              </a:spcBef>
-              <a:spcAft>
-                <a:spcPts val="0"/>
-              </a:spcAft>
-              <a:buClr>
-                <a:srgbClr val="FFFFFF"/>
-              </a:buClr>
-              <a:buSzPts val="3700"/>
-              <a:buNone/>
-            </a:pPr>
-            <a:endParaRPr/>
-          </a:p>
-        </p:txBody>
-      </p:sp>
-      <p:sp>
-        <p:nvSpPr>
-          <p:cNvPr id="144" name="Google Shape;144;p12"/>
-          <p:cNvSpPr txBox="1">
-            <a:spLocks noGrp="1"/>
-          </p:cNvSpPr>
-          <p:nvPr>
-            <p:ph type="body" idx="1"/>
-          </p:nvPr>
-        </p:nvSpPr>
-        <p:spPr>
-          <a:xfrm>
-            <a:off x="415600" y="1536633"/>
-            <a:ext cx="11360700" cy="4555200"/>
-          </a:xfrm>
-          <a:prstGeom prst="rect">
-            <a:avLst/>
-          </a:prstGeom>
-          <a:noFill/>
-          <a:ln>
-            <a:noFill/>
-          </a:ln>
-        </p:spPr>
-        <p:txBody>
-          <a:bodyPr spcFirstLastPara="1" wrap="square" lIns="121900" tIns="121900" rIns="121900" bIns="121900" anchor="t" anchorCtr="0">
-            <a:noAutofit/>
-          </a:bodyPr>
-          <a:lstStyle/>
-          <a:p>
-            <a:pPr marL="457200" lvl="0" indent="-228600" algn="l" rtl="0">
-              <a:lnSpc>
-                <a:spcPct val="115000"/>
-              </a:lnSpc>
-              <a:spcBef>
-                <a:spcPts val="0"/>
-              </a:spcBef>
-              <a:spcAft>
-                <a:spcPts val="0"/>
-              </a:spcAft>
-              <a:buClr>
-                <a:srgbClr val="434343"/>
-              </a:buClr>
-              <a:buSzPts val="2400"/>
-              <a:buNone/>
-            </a:pPr>
-            <a:endParaRPr/>
-          </a:p>
-        </p:txBody>
-      </p:sp>
-      <p:pic>
-        <p:nvPicPr>
-          <p:cNvPr id="145" name="Google Shape;145;p12" descr="https://lh6.googleusercontent.com/J9csIAg3Em8INTi6dtkJOZYjPqT-yzUNF-ozlkmq8XOOm12VdBC4YT4T9W0vZVXr6VZHLBddAZVsL4IG0DRgsVRcLw5aTlCyHTIRmlr8cy8LSCqzvEOeOncabJ4smWyhYm7WdpmRKSM"/>
-          <p:cNvPicPr preferRelativeResize="0"/>
-          <p:nvPr/>
-        </p:nvPicPr>
-        <p:blipFill rotWithShape="1">
-          <a:blip r:embed="rId3">
-            <a:alphaModFix/>
-          </a:blip>
-          <a:srcRect/>
-          <a:stretch/>
-        </p:blipFill>
-        <p:spPr>
-          <a:xfrm>
-            <a:off x="0" y="1712385"/>
-            <a:ext cx="12192000" cy="4040716"/>
-          </a:xfrm>
-          <a:prstGeom prst="rect">
-            <a:avLst/>
-          </a:prstGeom>
-          <a:noFill/>
-          <a:ln>
-            <a:noFill/>
-          </a:ln>
-        </p:spPr>
-      </p:pic>
-    </p:spTree>
-  </p:cSld>
-  <p:clrMapOvr>
-    <a:masterClrMapping/>
-  </p:clrMapOvr>
-</p:sld>
-</file>
-
-<file path=ppt/slides/slide19.xml><?xml version="1.0" encoding="utf-8"?>
-<p:sld xmlns:a="http://schemas.openxmlformats.org/drawingml/2006/main" xmlns:r="http://schemas.openxmlformats.org/officeDocument/2006/relationships" xmlns:p="http://schemas.openxmlformats.org/presentationml/2006/main">
-  <p:cSld>
-    <p:spTree>
-      <p:nvGrpSpPr>
-        <p:cNvPr id="1" name="Shape 149"/>
-        <p:cNvGrpSpPr/>
-        <p:nvPr/>
-      </p:nvGrpSpPr>
-      <p:grpSpPr>
-        <a:xfrm>
-          <a:off x="0" y="0"/>
-          <a:ext cx="0" cy="0"/>
-          <a:chOff x="0" y="0"/>
-          <a:chExt cx="0" cy="0"/>
-        </a:xfrm>
-      </p:grpSpPr>
-      <p:sp>
-        <p:nvSpPr>
-          <p:cNvPr id="150" name="Google Shape;150;p10"/>
-          <p:cNvSpPr txBox="1">
-            <a:spLocks noGrp="1"/>
-          </p:cNvSpPr>
-          <p:nvPr>
-            <p:ph type="title"/>
-          </p:nvPr>
-        </p:nvSpPr>
-        <p:spPr>
-          <a:xfrm>
-            <a:off x="415600" y="86563"/>
-            <a:ext cx="11360700" cy="763500"/>
-          </a:xfrm>
-          <a:prstGeom prst="rect">
-            <a:avLst/>
-          </a:prstGeom>
-          <a:noFill/>
-          <a:ln>
-            <a:noFill/>
-          </a:ln>
-        </p:spPr>
-        <p:txBody>
-          <a:bodyPr spcFirstLastPara="1" wrap="square" lIns="121900" tIns="121900" rIns="121900" bIns="121900" anchor="t" anchorCtr="0">
-            <a:noAutofit/>
-          </a:bodyPr>
-          <a:lstStyle/>
-          <a:p>
-            <a:pPr marL="0" lvl="0" indent="0" algn="l" rtl="0">
-              <a:lnSpc>
-                <a:spcPct val="100000"/>
-              </a:lnSpc>
-              <a:spcBef>
-                <a:spcPts val="0"/>
-              </a:spcBef>
-              <a:spcAft>
-                <a:spcPts val="0"/>
-              </a:spcAft>
-              <a:buClr>
-                <a:srgbClr val="FFFFFF"/>
-              </a:buClr>
-              <a:buSzPts val="3700"/>
-              <a:buNone/>
-            </a:pPr>
-            <a:r>
-              <a:rPr lang="en-US"/>
-              <a:t>Cross-Tabs</a:t>
-            </a:r>
-            <a:endParaRPr/>
-          </a:p>
-        </p:txBody>
-      </p:sp>
-      <p:sp>
-        <p:nvSpPr>
-          <p:cNvPr id="151" name="Google Shape;151;p10"/>
-          <p:cNvSpPr txBox="1">
-            <a:spLocks noGrp="1"/>
-          </p:cNvSpPr>
-          <p:nvPr>
-            <p:ph type="body" idx="1"/>
-          </p:nvPr>
-        </p:nvSpPr>
-        <p:spPr>
-          <a:xfrm>
-            <a:off x="415600" y="1536633"/>
-            <a:ext cx="11360700" cy="4555200"/>
-          </a:xfrm>
-          <a:prstGeom prst="rect">
-            <a:avLst/>
-          </a:prstGeom>
-          <a:noFill/>
-          <a:ln>
-            <a:noFill/>
-          </a:ln>
-        </p:spPr>
-        <p:txBody>
-          <a:bodyPr spcFirstLastPara="1" wrap="square" lIns="121900" tIns="121900" rIns="121900" bIns="121900" anchor="t" anchorCtr="0">
-            <a:noAutofit/>
-          </a:bodyPr>
-          <a:lstStyle/>
-          <a:p>
-            <a:pPr marL="457200" lvl="0" indent="-228600" algn="l" rtl="0">
-              <a:lnSpc>
-                <a:spcPct val="115000"/>
-              </a:lnSpc>
-              <a:spcBef>
-                <a:spcPts val="0"/>
-              </a:spcBef>
-              <a:spcAft>
-                <a:spcPts val="0"/>
-              </a:spcAft>
-              <a:buClr>
-                <a:srgbClr val="434343"/>
-              </a:buClr>
-              <a:buSzPts val="2400"/>
-              <a:buNone/>
-            </a:pPr>
-            <a:endParaRPr/>
-          </a:p>
-        </p:txBody>
-      </p:sp>
-      <p:pic>
-        <p:nvPicPr>
-          <p:cNvPr id="152" name="Google Shape;152;p10" descr="https://lh6.googleusercontent.com/maF9IXafZ9w1hZhmAj8Yk2CSKgTJj0zpcICZrABSbZ7TX7jo8ND8lpTX5AY6Uz62qEyp9FmnGVi5Wq-fwYOZkSQOU0uIOz3Fh5tUWzVqBc5JIm0jboaY9ioG5hjhKR4EjN8jtFwVVqA"/>
-          <p:cNvPicPr preferRelativeResize="0"/>
-          <p:nvPr/>
-        </p:nvPicPr>
-        <p:blipFill rotWithShape="1">
-          <a:blip r:embed="rId3">
-            <a:alphaModFix/>
-          </a:blip>
-          <a:srcRect/>
-          <a:stretch/>
-        </p:blipFill>
-        <p:spPr>
-          <a:xfrm>
-            <a:off x="249768" y="1608667"/>
-            <a:ext cx="5033433" cy="3120536"/>
-          </a:xfrm>
-          <a:prstGeom prst="rect">
-            <a:avLst/>
-          </a:prstGeom>
-          <a:noFill/>
-          <a:ln>
-            <a:noFill/>
-          </a:ln>
-        </p:spPr>
-      </p:pic>
-      <p:pic>
-        <p:nvPicPr>
-          <p:cNvPr id="153" name="Google Shape;153;p10"/>
-          <p:cNvPicPr preferRelativeResize="0"/>
-          <p:nvPr/>
-        </p:nvPicPr>
-        <p:blipFill>
-          <a:blip r:embed="rId4">
-            <a:alphaModFix/>
-          </a:blip>
-          <a:stretch>
-            <a:fillRect/>
-          </a:stretch>
-        </p:blipFill>
-        <p:spPr>
-          <a:xfrm>
-            <a:off x="5487053" y="1608675"/>
-            <a:ext cx="5989008" cy="3120525"/>
-          </a:xfrm>
-          <a:prstGeom prst="rect">
-            <a:avLst/>
-          </a:prstGeom>
-          <a:noFill/>
-          <a:ln>
-            <a:noFill/>
-          </a:ln>
-        </p:spPr>
-      </p:pic>
-    </p:spTree>
-  </p:cSld>
-  <p:clrMapOvr>
-    <a:masterClrMapping/>
-  </p:clrMapOvr>
-</p:sld>
-</file>
-
 <file path=ppt/slides/slide2.xml><?xml version="1.0" encoding="utf-8"?>
 <p:sld xmlns:a="http://schemas.openxmlformats.org/drawingml/2006/main" xmlns:r="http://schemas.openxmlformats.org/officeDocument/2006/relationships" xmlns:p="http://schemas.openxmlformats.org/presentationml/2006/main">
   <p:cSld>
@@ -18541,6 +22328,338 @@
 </file>
 
 <file path=ppt/slides/slide20.xml><?xml version="1.0" encoding="utf-8"?>
+<p:sld xmlns:a="http://schemas.openxmlformats.org/drawingml/2006/main" xmlns:r="http://schemas.openxmlformats.org/officeDocument/2006/relationships" xmlns:p="http://schemas.openxmlformats.org/presentationml/2006/main">
+  <p:cSld>
+    <p:spTree>
+      <p:nvGrpSpPr>
+        <p:cNvPr id="1" name="Shape 142"/>
+        <p:cNvGrpSpPr/>
+        <p:nvPr/>
+      </p:nvGrpSpPr>
+      <p:grpSpPr>
+        <a:xfrm>
+          <a:off x="0" y="0"/>
+          <a:ext cx="0" cy="0"/>
+          <a:chOff x="0" y="0"/>
+          <a:chExt cx="0" cy="0"/>
+        </a:xfrm>
+      </p:grpSpPr>
+      <p:sp>
+        <p:nvSpPr>
+          <p:cNvPr id="143" name="Google Shape;143;p12"/>
+          <p:cNvSpPr txBox="1">
+            <a:spLocks noGrp="1"/>
+          </p:cNvSpPr>
+          <p:nvPr>
+            <p:ph type="title"/>
+          </p:nvPr>
+        </p:nvSpPr>
+        <p:spPr>
+          <a:xfrm>
+            <a:off x="415600" y="86563"/>
+            <a:ext cx="11360700" cy="763500"/>
+          </a:xfrm>
+          <a:prstGeom prst="rect">
+            <a:avLst/>
+          </a:prstGeom>
+          <a:noFill/>
+          <a:ln>
+            <a:noFill/>
+          </a:ln>
+        </p:spPr>
+        <p:txBody>
+          <a:bodyPr spcFirstLastPara="1" wrap="square" lIns="121900" tIns="121900" rIns="121900" bIns="121900" anchor="t" anchorCtr="0">
+            <a:noAutofit/>
+          </a:bodyPr>
+          <a:lstStyle/>
+          <a:p>
+            <a:pPr marL="0" lvl="0" indent="0" algn="l" rtl="0">
+              <a:lnSpc>
+                <a:spcPct val="100000"/>
+              </a:lnSpc>
+              <a:spcBef>
+                <a:spcPts val="0"/>
+              </a:spcBef>
+              <a:spcAft>
+                <a:spcPts val="0"/>
+              </a:spcAft>
+              <a:buClr>
+                <a:srgbClr val="FFFFFF"/>
+              </a:buClr>
+              <a:buSzPts val="3700"/>
+              <a:buNone/>
+            </a:pPr>
+            <a:endParaRPr/>
+          </a:p>
+        </p:txBody>
+      </p:sp>
+      <p:sp>
+        <p:nvSpPr>
+          <p:cNvPr id="144" name="Google Shape;144;p12"/>
+          <p:cNvSpPr txBox="1">
+            <a:spLocks noGrp="1"/>
+          </p:cNvSpPr>
+          <p:nvPr>
+            <p:ph type="body" idx="1"/>
+          </p:nvPr>
+        </p:nvSpPr>
+        <p:spPr>
+          <a:xfrm>
+            <a:off x="415600" y="1536633"/>
+            <a:ext cx="11360700" cy="4555200"/>
+          </a:xfrm>
+          <a:prstGeom prst="rect">
+            <a:avLst/>
+          </a:prstGeom>
+          <a:noFill/>
+          <a:ln>
+            <a:noFill/>
+          </a:ln>
+        </p:spPr>
+        <p:txBody>
+          <a:bodyPr spcFirstLastPara="1" wrap="square" lIns="121900" tIns="121900" rIns="121900" bIns="121900" anchor="t" anchorCtr="0">
+            <a:noAutofit/>
+          </a:bodyPr>
+          <a:lstStyle/>
+          <a:p>
+            <a:pPr marL="457200" lvl="0" indent="-228600" algn="l" rtl="0">
+              <a:lnSpc>
+                <a:spcPct val="115000"/>
+              </a:lnSpc>
+              <a:spcBef>
+                <a:spcPts val="0"/>
+              </a:spcBef>
+              <a:spcAft>
+                <a:spcPts val="0"/>
+              </a:spcAft>
+              <a:buClr>
+                <a:srgbClr val="434343"/>
+              </a:buClr>
+              <a:buSzPts val="2400"/>
+              <a:buNone/>
+            </a:pPr>
+            <a:endParaRPr/>
+          </a:p>
+        </p:txBody>
+      </p:sp>
+      <p:pic>
+        <p:nvPicPr>
+          <p:cNvPr id="145" name="Google Shape;145;p12" descr="https://lh6.googleusercontent.com/J9csIAg3Em8INTi6dtkJOZYjPqT-yzUNF-ozlkmq8XOOm12VdBC4YT4T9W0vZVXr6VZHLBddAZVsL4IG0DRgsVRcLw5aTlCyHTIRmlr8cy8LSCqzvEOeOncabJ4smWyhYm7WdpmRKSM"/>
+          <p:cNvPicPr preferRelativeResize="0"/>
+          <p:nvPr/>
+        </p:nvPicPr>
+        <p:blipFill rotWithShape="1">
+          <a:blip r:embed="rId3">
+            <a:alphaModFix/>
+          </a:blip>
+          <a:srcRect/>
+          <a:stretch/>
+        </p:blipFill>
+        <p:spPr>
+          <a:xfrm>
+            <a:off x="0" y="1712385"/>
+            <a:ext cx="12192000" cy="4040716"/>
+          </a:xfrm>
+          <a:prstGeom prst="rect">
+            <a:avLst/>
+          </a:prstGeom>
+          <a:noFill/>
+          <a:ln>
+            <a:noFill/>
+          </a:ln>
+        </p:spPr>
+      </p:pic>
+    </p:spTree>
+  </p:cSld>
+  <p:clrMapOvr>
+    <a:masterClrMapping/>
+  </p:clrMapOvr>
+</p:sld>
+</file>
+
+<file path=ppt/slides/slide21.xml><?xml version="1.0" encoding="utf-8"?>
+<p:sld xmlns:a="http://schemas.openxmlformats.org/drawingml/2006/main" xmlns:r="http://schemas.openxmlformats.org/officeDocument/2006/relationships" xmlns:p="http://schemas.openxmlformats.org/presentationml/2006/main">
+  <p:cSld>
+    <p:spTree>
+      <p:nvGrpSpPr>
+        <p:cNvPr id="1" name="Shape 149"/>
+        <p:cNvGrpSpPr/>
+        <p:nvPr/>
+      </p:nvGrpSpPr>
+      <p:grpSpPr>
+        <a:xfrm>
+          <a:off x="0" y="0"/>
+          <a:ext cx="0" cy="0"/>
+          <a:chOff x="0" y="0"/>
+          <a:chExt cx="0" cy="0"/>
+        </a:xfrm>
+      </p:grpSpPr>
+      <p:sp>
+        <p:nvSpPr>
+          <p:cNvPr id="150" name="Google Shape;150;p10"/>
+          <p:cNvSpPr txBox="1">
+            <a:spLocks noGrp="1"/>
+          </p:cNvSpPr>
+          <p:nvPr>
+            <p:ph type="title"/>
+          </p:nvPr>
+        </p:nvSpPr>
+        <p:spPr>
+          <a:xfrm>
+            <a:off x="415600" y="86563"/>
+            <a:ext cx="11360700" cy="763500"/>
+          </a:xfrm>
+          <a:prstGeom prst="rect">
+            <a:avLst/>
+          </a:prstGeom>
+          <a:noFill/>
+          <a:ln>
+            <a:noFill/>
+          </a:ln>
+        </p:spPr>
+        <p:txBody>
+          <a:bodyPr spcFirstLastPara="1" wrap="square" lIns="121900" tIns="121900" rIns="121900" bIns="121900" anchor="t" anchorCtr="0">
+            <a:noAutofit/>
+          </a:bodyPr>
+          <a:lstStyle/>
+          <a:p>
+            <a:pPr marL="0" lvl="0" indent="0" algn="l" rtl="0">
+              <a:lnSpc>
+                <a:spcPct val="100000"/>
+              </a:lnSpc>
+              <a:spcBef>
+                <a:spcPts val="0"/>
+              </a:spcBef>
+              <a:spcAft>
+                <a:spcPts val="0"/>
+              </a:spcAft>
+              <a:buClr>
+                <a:srgbClr val="FFFFFF"/>
+              </a:buClr>
+              <a:buSzPts val="3700"/>
+              <a:buNone/>
+            </a:pPr>
+            <a:r>
+              <a:rPr lang="en-US"/>
+              <a:t>Cross-Tabs</a:t>
+            </a:r>
+            <a:endParaRPr/>
+          </a:p>
+        </p:txBody>
+      </p:sp>
+      <p:sp>
+        <p:nvSpPr>
+          <p:cNvPr id="151" name="Google Shape;151;p10"/>
+          <p:cNvSpPr txBox="1">
+            <a:spLocks noGrp="1"/>
+          </p:cNvSpPr>
+          <p:nvPr>
+            <p:ph type="body" idx="1"/>
+          </p:nvPr>
+        </p:nvSpPr>
+        <p:spPr>
+          <a:xfrm>
+            <a:off x="415600" y="1536633"/>
+            <a:ext cx="11360700" cy="4555200"/>
+          </a:xfrm>
+          <a:prstGeom prst="rect">
+            <a:avLst/>
+          </a:prstGeom>
+          <a:noFill/>
+          <a:ln>
+            <a:noFill/>
+          </a:ln>
+        </p:spPr>
+        <p:txBody>
+          <a:bodyPr spcFirstLastPara="1" wrap="square" lIns="121900" tIns="121900" rIns="121900" bIns="121900" anchor="t" anchorCtr="0">
+            <a:noAutofit/>
+          </a:bodyPr>
+          <a:lstStyle/>
+          <a:p>
+            <a:pPr marL="457200" lvl="0" indent="-228600" algn="l" rtl="0">
+              <a:lnSpc>
+                <a:spcPct val="115000"/>
+              </a:lnSpc>
+              <a:spcBef>
+                <a:spcPts val="0"/>
+              </a:spcBef>
+              <a:spcAft>
+                <a:spcPts val="0"/>
+              </a:spcAft>
+              <a:buClr>
+                <a:srgbClr val="434343"/>
+              </a:buClr>
+              <a:buSzPts val="2400"/>
+              <a:buNone/>
+            </a:pPr>
+            <a:endParaRPr/>
+          </a:p>
+        </p:txBody>
+      </p:sp>
+      <p:pic>
+        <p:nvPicPr>
+          <p:cNvPr id="152" name="Google Shape;152;p10" descr="https://lh6.googleusercontent.com/maF9IXafZ9w1hZhmAj8Yk2CSKgTJj0zpcICZrABSbZ7TX7jo8ND8lpTX5AY6Uz62qEyp9FmnGVi5Wq-fwYOZkSQOU0uIOz3Fh5tUWzVqBc5JIm0jboaY9ioG5hjhKR4EjN8jtFwVVqA"/>
+          <p:cNvPicPr preferRelativeResize="0"/>
+          <p:nvPr/>
+        </p:nvPicPr>
+        <p:blipFill rotWithShape="1">
+          <a:blip r:embed="rId3">
+            <a:alphaModFix/>
+          </a:blip>
+          <a:srcRect/>
+          <a:stretch/>
+        </p:blipFill>
+        <p:spPr>
+          <a:xfrm>
+            <a:off x="249768" y="1608667"/>
+            <a:ext cx="5033433" cy="3120536"/>
+          </a:xfrm>
+          <a:prstGeom prst="rect">
+            <a:avLst/>
+          </a:prstGeom>
+          <a:noFill/>
+          <a:ln>
+            <a:noFill/>
+          </a:ln>
+        </p:spPr>
+      </p:pic>
+      <p:pic>
+        <p:nvPicPr>
+          <p:cNvPr id="153" name="Google Shape;153;p10"/>
+          <p:cNvPicPr preferRelativeResize="0"/>
+          <p:nvPr/>
+        </p:nvPicPr>
+        <p:blipFill>
+          <a:blip r:embed="rId4">
+            <a:alphaModFix/>
+          </a:blip>
+          <a:stretch>
+            <a:fillRect/>
+          </a:stretch>
+        </p:blipFill>
+        <p:spPr>
+          <a:xfrm>
+            <a:off x="5487053" y="1608675"/>
+            <a:ext cx="5989008" cy="3120525"/>
+          </a:xfrm>
+          <a:prstGeom prst="rect">
+            <a:avLst/>
+          </a:prstGeom>
+          <a:noFill/>
+          <a:ln>
+            <a:noFill/>
+          </a:ln>
+        </p:spPr>
+      </p:pic>
+    </p:spTree>
+  </p:cSld>
+  <p:clrMapOvr>
+    <a:masterClrMapping/>
+  </p:clrMapOvr>
+</p:sld>
+</file>
+
+<file path=ppt/slides/slide22.xml><?xml version="1.0" encoding="utf-8"?>
 <p:sld xmlns:a="http://schemas.openxmlformats.org/drawingml/2006/main" xmlns:r="http://schemas.openxmlformats.org/officeDocument/2006/relationships" xmlns:p="http://schemas.openxmlformats.org/presentationml/2006/main" show="0">
   <p:cSld>
     <p:spTree>
@@ -19029,7 +23148,7 @@
 </p:sld>
 </file>
 
-<file path=ppt/slides/slide21.xml><?xml version="1.0" encoding="utf-8"?>
+<file path=ppt/slides/slide23.xml><?xml version="1.0" encoding="utf-8"?>
 <p:sld xmlns:a="http://schemas.openxmlformats.org/drawingml/2006/main" xmlns:r="http://schemas.openxmlformats.org/officeDocument/2006/relationships" xmlns:p="http://schemas.openxmlformats.org/presentationml/2006/main" show="0">
   <p:cSld>
     <p:spTree>
@@ -19264,7 +23383,7 @@
 </p:sld>
 </file>
 
-<file path=ppt/slides/slide22.xml><?xml version="1.0" encoding="utf-8"?>
+<file path=ppt/slides/slide24.xml><?xml version="1.0" encoding="utf-8"?>
 <p:sld xmlns:a="http://schemas.openxmlformats.org/drawingml/2006/main" xmlns:r="http://schemas.openxmlformats.org/officeDocument/2006/relationships" xmlns:p="http://schemas.openxmlformats.org/presentationml/2006/main">
   <p:cSld>
     <p:spTree>
@@ -19408,7 +23527,7 @@
 </p:sld>
 </file>
 
-<file path=ppt/slides/slide23.xml><?xml version="1.0" encoding="utf-8"?>
+<file path=ppt/slides/slide25.xml><?xml version="1.0" encoding="utf-8"?>
 <p:sld xmlns:a="http://schemas.openxmlformats.org/drawingml/2006/main" xmlns:r="http://schemas.openxmlformats.org/officeDocument/2006/relationships" xmlns:p="http://schemas.openxmlformats.org/presentationml/2006/main">
   <p:cSld>
     <p:spTree>
@@ -19634,7 +23753,7 @@
 </p:sld>
 </file>
 
-<file path=ppt/slides/slide24.xml><?xml version="1.0" encoding="utf-8"?>
+<file path=ppt/slides/slide26.xml><?xml version="1.0" encoding="utf-8"?>
 <p:sld xmlns:a="http://schemas.openxmlformats.org/drawingml/2006/main" xmlns:r="http://schemas.openxmlformats.org/officeDocument/2006/relationships" xmlns:p="http://schemas.openxmlformats.org/presentationml/2006/main">
   <p:cSld>
     <p:spTree>
@@ -20152,7 +24271,7 @@
 </p:sld>
 </file>
 
-<file path=ppt/slides/slide25.xml><?xml version="1.0" encoding="utf-8"?>
+<file path=ppt/slides/slide27.xml><?xml version="1.0" encoding="utf-8"?>
 <p:sld xmlns:a="http://schemas.openxmlformats.org/drawingml/2006/main" xmlns:r="http://schemas.openxmlformats.org/officeDocument/2006/relationships" xmlns:p="http://schemas.openxmlformats.org/presentationml/2006/main">
   <p:cSld>
     <p:spTree>
@@ -20380,7 +24499,7 @@
 </p:sld>
 </file>
 
-<file path=ppt/slides/slide26.xml><?xml version="1.0" encoding="utf-8"?>
+<file path=ppt/slides/slide28.xml><?xml version="1.0" encoding="utf-8"?>
 <p:sld xmlns:a="http://schemas.openxmlformats.org/drawingml/2006/main" xmlns:r="http://schemas.openxmlformats.org/officeDocument/2006/relationships" xmlns:p="http://schemas.openxmlformats.org/presentationml/2006/main">
   <p:cSld>
     <p:spTree>
@@ -20433,7 +24552,7 @@
 </p:sld>
 </file>
 
-<file path=ppt/slides/slide27.xml><?xml version="1.0" encoding="utf-8"?>
+<file path=ppt/slides/slide29.xml><?xml version="1.0" encoding="utf-8"?>
 <p:sld xmlns:a="http://schemas.openxmlformats.org/drawingml/2006/main" xmlns:r="http://schemas.openxmlformats.org/officeDocument/2006/relationships" xmlns:p="http://schemas.openxmlformats.org/presentationml/2006/main">
   <p:cSld>
     <p:spTree>
@@ -20474,318 +24593,6 @@
           <a:noFill/>
           <a:ln>
             <a:noFill/>
-          </a:ln>
-        </p:spPr>
-      </p:pic>
-    </p:spTree>
-  </p:cSld>
-  <p:clrMapOvr>
-    <a:masterClrMapping/>
-  </p:clrMapOvr>
-</p:sld>
-</file>
-
-<file path=ppt/slides/slide28.xml><?xml version="1.0" encoding="utf-8"?>
-<p:sld xmlns:a="http://schemas.openxmlformats.org/drawingml/2006/main" xmlns:r="http://schemas.openxmlformats.org/officeDocument/2006/relationships" xmlns:p="http://schemas.openxmlformats.org/presentationml/2006/main" show="0">
-  <p:cSld>
-    <p:spTree>
-      <p:nvGrpSpPr>
-        <p:cNvPr id="1" name="Shape 186"/>
-        <p:cNvGrpSpPr/>
-        <p:nvPr/>
-      </p:nvGrpSpPr>
-      <p:grpSpPr>
-        <a:xfrm>
-          <a:off x="0" y="0"/>
-          <a:ext cx="0" cy="0"/>
-          <a:chOff x="0" y="0"/>
-          <a:chExt cx="0" cy="0"/>
-        </a:xfrm>
-      </p:grpSpPr>
-      <p:sp>
-        <p:nvSpPr>
-          <p:cNvPr id="187" name="Google Shape;187;g72001f471e_0_12"/>
-          <p:cNvSpPr txBox="1">
-            <a:spLocks noGrp="1"/>
-          </p:cNvSpPr>
-          <p:nvPr>
-            <p:ph type="title"/>
-          </p:nvPr>
-        </p:nvSpPr>
-        <p:spPr>
-          <a:xfrm>
-            <a:off x="415600" y="86563"/>
-            <a:ext cx="11360700" cy="763500"/>
-          </a:xfrm>
-          <a:prstGeom prst="rect">
-            <a:avLst/>
-          </a:prstGeom>
-          <a:noFill/>
-          <a:ln>
-            <a:noFill/>
-          </a:ln>
-        </p:spPr>
-        <p:txBody>
-          <a:bodyPr spcFirstLastPara="1" wrap="square" lIns="121900" tIns="121900" rIns="121900" bIns="121900" anchor="t" anchorCtr="0">
-            <a:noAutofit/>
-          </a:bodyPr>
-          <a:lstStyle/>
-          <a:p>
-            <a:pPr marL="0" lvl="0" indent="0" algn="l" rtl="0">
-              <a:lnSpc>
-                <a:spcPct val="100000"/>
-              </a:lnSpc>
-              <a:spcBef>
-                <a:spcPts val="0"/>
-              </a:spcBef>
-              <a:spcAft>
-                <a:spcPts val="0"/>
-              </a:spcAft>
-              <a:buClr>
-                <a:srgbClr val="FFFFFF"/>
-              </a:buClr>
-              <a:buSzPts val="3700"/>
-              <a:buNone/>
-            </a:pPr>
-            <a:endParaRPr/>
-          </a:p>
-        </p:txBody>
-      </p:sp>
-      <p:sp>
-        <p:nvSpPr>
-          <p:cNvPr id="188" name="Google Shape;188;g72001f471e_0_12"/>
-          <p:cNvSpPr txBox="1">
-            <a:spLocks noGrp="1"/>
-          </p:cNvSpPr>
-          <p:nvPr>
-            <p:ph type="body" idx="1"/>
-          </p:nvPr>
-        </p:nvSpPr>
-        <p:spPr>
-          <a:xfrm>
-            <a:off x="415600" y="1536633"/>
-            <a:ext cx="11360700" cy="4555200"/>
-          </a:xfrm>
-          <a:prstGeom prst="rect">
-            <a:avLst/>
-          </a:prstGeom>
-          <a:noFill/>
-          <a:ln>
-            <a:noFill/>
-          </a:ln>
-        </p:spPr>
-        <p:txBody>
-          <a:bodyPr spcFirstLastPara="1" wrap="square" lIns="121900" tIns="121900" rIns="121900" bIns="121900" anchor="t" anchorCtr="0">
-            <a:noAutofit/>
-          </a:bodyPr>
-          <a:lstStyle/>
-          <a:p>
-            <a:pPr marL="457200" lvl="0" indent="-228600" algn="l" rtl="0">
-              <a:lnSpc>
-                <a:spcPct val="115000"/>
-              </a:lnSpc>
-              <a:spcBef>
-                <a:spcPts val="0"/>
-              </a:spcBef>
-              <a:spcAft>
-                <a:spcPts val="0"/>
-              </a:spcAft>
-              <a:buClr>
-                <a:srgbClr val="434343"/>
-              </a:buClr>
-              <a:buSzPts val="2400"/>
-              <a:buNone/>
-            </a:pPr>
-            <a:endParaRPr/>
-          </a:p>
-        </p:txBody>
-      </p:sp>
-      <p:pic>
-        <p:nvPicPr>
-          <p:cNvPr id="189" name="Google Shape;189;g72001f471e_0_12"/>
-          <p:cNvPicPr preferRelativeResize="0"/>
-          <p:nvPr/>
-        </p:nvPicPr>
-        <p:blipFill rotWithShape="1">
-          <a:blip r:embed="rId3">
-            <a:alphaModFix/>
-          </a:blip>
-          <a:srcRect/>
-          <a:stretch/>
-        </p:blipFill>
-        <p:spPr>
-          <a:xfrm>
-            <a:off x="745689" y="-1111783"/>
-            <a:ext cx="10770402" cy="13298477"/>
-          </a:xfrm>
-          <a:prstGeom prst="rect">
-            <a:avLst/>
-          </a:prstGeom>
-          <a:noFill/>
-          <a:ln>
-            <a:noFill/>
-          </a:ln>
-        </p:spPr>
-      </p:pic>
-    </p:spTree>
-  </p:cSld>
-  <p:clrMapOvr>
-    <a:masterClrMapping/>
-  </p:clrMapOvr>
-</p:sld>
-</file>
-
-<file path=ppt/slides/slide29.xml><?xml version="1.0" encoding="utf-8"?>
-<p:sld xmlns:a="http://schemas.openxmlformats.org/drawingml/2006/main" xmlns:r="http://schemas.openxmlformats.org/officeDocument/2006/relationships" xmlns:p="http://schemas.openxmlformats.org/presentationml/2006/main">
-  <p:cSld>
-    <p:spTree>
-      <p:nvGrpSpPr>
-        <p:cNvPr id="1" name="Shape 193"/>
-        <p:cNvGrpSpPr/>
-        <p:nvPr/>
-      </p:nvGrpSpPr>
-      <p:grpSpPr>
-        <a:xfrm>
-          <a:off x="0" y="0"/>
-          <a:ext cx="0" cy="0"/>
-          <a:chOff x="0" y="0"/>
-          <a:chExt cx="0" cy="0"/>
-        </a:xfrm>
-      </p:grpSpPr>
-      <p:sp>
-        <p:nvSpPr>
-          <p:cNvPr id="194" name="Google Shape;194;p33"/>
-          <p:cNvSpPr txBox="1">
-            <a:spLocks noGrp="1"/>
-          </p:cNvSpPr>
-          <p:nvPr>
-            <p:ph type="title"/>
-          </p:nvPr>
-        </p:nvSpPr>
-        <p:spPr>
-          <a:xfrm>
-            <a:off x="415600" y="86563"/>
-            <a:ext cx="11360700" cy="763500"/>
-          </a:xfrm>
-          <a:prstGeom prst="rect">
-            <a:avLst/>
-          </a:prstGeom>
-          <a:noFill/>
-          <a:ln>
-            <a:noFill/>
-          </a:ln>
-        </p:spPr>
-        <p:txBody>
-          <a:bodyPr spcFirstLastPara="1" wrap="square" lIns="121900" tIns="121900" rIns="121900" bIns="121900" anchor="t" anchorCtr="0">
-            <a:noAutofit/>
-          </a:bodyPr>
-          <a:lstStyle/>
-          <a:p>
-            <a:pPr marL="0" lvl="0" indent="0" algn="l" rtl="0">
-              <a:lnSpc>
-                <a:spcPct val="100000"/>
-              </a:lnSpc>
-              <a:spcBef>
-                <a:spcPts val="0"/>
-              </a:spcBef>
-              <a:spcAft>
-                <a:spcPts val="0"/>
-              </a:spcAft>
-              <a:buClr>
-                <a:srgbClr val="FFFFFF"/>
-              </a:buClr>
-              <a:buSzPts val="3700"/>
-              <a:buNone/>
-            </a:pPr>
-            <a:r>
-              <a:rPr lang="en-US"/>
-              <a:t>Sparse Models (RiskSLIM)</a:t>
-            </a:r>
-            <a:endParaRPr/>
-          </a:p>
-        </p:txBody>
-      </p:sp>
-      <p:sp>
-        <p:nvSpPr>
-          <p:cNvPr id="195" name="Google Shape;195;p33"/>
-          <p:cNvSpPr txBox="1">
-            <a:spLocks noGrp="1"/>
-          </p:cNvSpPr>
-          <p:nvPr>
-            <p:ph type="body" idx="1"/>
-          </p:nvPr>
-        </p:nvSpPr>
-        <p:spPr>
-          <a:xfrm>
-            <a:off x="415600" y="1536633"/>
-            <a:ext cx="11360700" cy="4555200"/>
-          </a:xfrm>
-          <a:prstGeom prst="rect">
-            <a:avLst/>
-          </a:prstGeom>
-          <a:noFill/>
-          <a:ln>
-            <a:noFill/>
-          </a:ln>
-        </p:spPr>
-        <p:txBody>
-          <a:bodyPr spcFirstLastPara="1" wrap="square" lIns="121900" tIns="121900" rIns="121900" bIns="121900" anchor="t" anchorCtr="0">
-            <a:noAutofit/>
-          </a:bodyPr>
-          <a:lstStyle/>
-          <a:p>
-            <a:pPr marL="457200" lvl="0" indent="-228600" algn="l" rtl="0">
-              <a:lnSpc>
-                <a:spcPct val="115000"/>
-              </a:lnSpc>
-              <a:spcBef>
-                <a:spcPts val="0"/>
-              </a:spcBef>
-              <a:spcAft>
-                <a:spcPts val="0"/>
-              </a:spcAft>
-              <a:buClr>
-                <a:srgbClr val="434343"/>
-              </a:buClr>
-              <a:buSzPts val="2400"/>
-              <a:buNone/>
-            </a:pPr>
-            <a:endParaRPr/>
-          </a:p>
-        </p:txBody>
-      </p:sp>
-      <p:pic>
-        <p:nvPicPr>
-          <p:cNvPr id="196" name="Google Shape;196;p33"/>
-          <p:cNvPicPr preferRelativeResize="0"/>
-          <p:nvPr/>
-        </p:nvPicPr>
-        <p:blipFill rotWithShape="1">
-          <a:blip r:embed="rId3">
-            <a:alphaModFix/>
-          </a:blip>
-          <a:srcRect/>
-          <a:stretch/>
-        </p:blipFill>
-        <p:spPr>
-          <a:xfrm>
-            <a:off x="297707" y="1271841"/>
-            <a:ext cx="11694763" cy="4460689"/>
-          </a:xfrm>
-          <a:prstGeom prst="rect">
-            <a:avLst/>
-          </a:prstGeom>
-          <a:solidFill>
-            <a:srgbClr val="FFC000"/>
-          </a:solidFill>
-          <a:ln w="57150" cap="flat" cmpd="sng">
-            <a:solidFill>
-              <a:schemeClr val="accent2"/>
-            </a:solidFill>
-            <a:prstDash val="solid"/>
-            <a:round/>
-            <a:headEnd type="none" w="sm" len="sm"/>
-            <a:tailEnd type="none" w="sm" len="sm"/>
           </a:ln>
         </p:spPr>
       </p:pic>
@@ -20865,50 +24672,7 @@
           <a:p>
             <a:r>
               <a:rPr lang="en-US" dirty="0"/>
-              <a:t>Features and models (including baselines and </a:t>
-            </a:r>
-            <a:r>
-              <a:rPr lang="en-US" dirty="0" err="1"/>
-              <a:t>baserate</a:t>
-            </a:r>
-            <a:r>
-              <a:rPr lang="en-US" dirty="0"/>
-              <a:t>) over time</a:t>
-            </a:r>
-          </a:p>
-          <a:p>
-            <a:r>
-              <a:rPr lang="en-US" dirty="0"/>
-              <a:t>Select a few high-performing models (Due Nov 21</a:t>
-            </a:r>
-            <a:r>
-              <a:rPr lang="en-US" baseline="30000" dirty="0"/>
-              <a:t>st</a:t>
-            </a:r>
-            <a:r>
-              <a:rPr lang="en-US" dirty="0"/>
-              <a:t>)  - </a:t>
-            </a:r>
-            <a:r>
-              <a:rPr lang="en-US" dirty="0">
-                <a:hlinkClick r:id="rId2"/>
-              </a:rPr>
-              <a:t>helper notebook</a:t>
-            </a:r>
-            <a:endParaRPr lang="en-US" dirty="0"/>
-          </a:p>
-          <a:p>
-            <a:r>
-              <a:rPr lang="en-US" dirty="0"/>
-              <a:t>Understand what the models are doing (Due Nov 28</a:t>
-            </a:r>
-            <a:r>
-              <a:rPr lang="en-US" baseline="30000" dirty="0"/>
-              <a:t>th</a:t>
-            </a:r>
-            <a:r>
-              <a:rPr lang="en-US" dirty="0"/>
-              <a:t>)</a:t>
+              <a:t>Understand what the models are doing (Due next week)</a:t>
             </a:r>
           </a:p>
           <a:p>
@@ -20935,43 +24699,25 @@
           <a:p>
             <a:r>
               <a:rPr lang="en-US" dirty="0"/>
-              <a:t>Audit for Bias (Due Dec 5</a:t>
-            </a:r>
-            <a:r>
-              <a:rPr lang="en-US" baseline="30000" dirty="0"/>
-              <a:t>th</a:t>
-            </a:r>
-            <a:r>
-              <a:rPr lang="en-US" dirty="0"/>
-              <a:t>)</a:t>
+              <a:t>Audit for Bias (the week after)</a:t>
             </a:r>
           </a:p>
           <a:p>
             <a:r>
               <a:rPr lang="en-US" dirty="0"/>
-              <a:t>Presentations (Dec 7</a:t>
-            </a:r>
-            <a:r>
-              <a:rPr lang="en-US" baseline="30000" dirty="0"/>
-              <a:t>th</a:t>
-            </a:r>
-            <a:r>
-              <a:rPr lang="en-US" dirty="0"/>
-              <a:t>)</a:t>
+              <a:t>Before thanksgiving (finalize plan to run final set of models over the break)</a:t>
             </a:r>
           </a:p>
           <a:p>
             <a:r>
               <a:rPr lang="en-US" dirty="0"/>
-              <a:t>Final Report (Dec 14</a:t>
+              <a:t>Presentations (last day of classes)</a:t>
             </a:r>
-            <a:r>
-              <a:rPr lang="en-US" baseline="30000" dirty="0"/>
-              <a:t>th</a:t>
-            </a:r>
+          </a:p>
+          <a:p>
             <a:r>
               <a:rPr lang="en-US" dirty="0"/>
-              <a:t>)</a:t>
+              <a:t>Final Report (finals week)</a:t>
             </a:r>
           </a:p>
         </p:txBody>
@@ -20990,6 +24736,318 @@
 </file>
 
 <file path=ppt/slides/slide30.xml><?xml version="1.0" encoding="utf-8"?>
+<p:sld xmlns:a="http://schemas.openxmlformats.org/drawingml/2006/main" xmlns:r="http://schemas.openxmlformats.org/officeDocument/2006/relationships" xmlns:p="http://schemas.openxmlformats.org/presentationml/2006/main" show="0">
+  <p:cSld>
+    <p:spTree>
+      <p:nvGrpSpPr>
+        <p:cNvPr id="1" name="Shape 186"/>
+        <p:cNvGrpSpPr/>
+        <p:nvPr/>
+      </p:nvGrpSpPr>
+      <p:grpSpPr>
+        <a:xfrm>
+          <a:off x="0" y="0"/>
+          <a:ext cx="0" cy="0"/>
+          <a:chOff x="0" y="0"/>
+          <a:chExt cx="0" cy="0"/>
+        </a:xfrm>
+      </p:grpSpPr>
+      <p:sp>
+        <p:nvSpPr>
+          <p:cNvPr id="187" name="Google Shape;187;g72001f471e_0_12"/>
+          <p:cNvSpPr txBox="1">
+            <a:spLocks noGrp="1"/>
+          </p:cNvSpPr>
+          <p:nvPr>
+            <p:ph type="title"/>
+          </p:nvPr>
+        </p:nvSpPr>
+        <p:spPr>
+          <a:xfrm>
+            <a:off x="415600" y="86563"/>
+            <a:ext cx="11360700" cy="763500"/>
+          </a:xfrm>
+          <a:prstGeom prst="rect">
+            <a:avLst/>
+          </a:prstGeom>
+          <a:noFill/>
+          <a:ln>
+            <a:noFill/>
+          </a:ln>
+        </p:spPr>
+        <p:txBody>
+          <a:bodyPr spcFirstLastPara="1" wrap="square" lIns="121900" tIns="121900" rIns="121900" bIns="121900" anchor="t" anchorCtr="0">
+            <a:noAutofit/>
+          </a:bodyPr>
+          <a:lstStyle/>
+          <a:p>
+            <a:pPr marL="0" lvl="0" indent="0" algn="l" rtl="0">
+              <a:lnSpc>
+                <a:spcPct val="100000"/>
+              </a:lnSpc>
+              <a:spcBef>
+                <a:spcPts val="0"/>
+              </a:spcBef>
+              <a:spcAft>
+                <a:spcPts val="0"/>
+              </a:spcAft>
+              <a:buClr>
+                <a:srgbClr val="FFFFFF"/>
+              </a:buClr>
+              <a:buSzPts val="3700"/>
+              <a:buNone/>
+            </a:pPr>
+            <a:endParaRPr/>
+          </a:p>
+        </p:txBody>
+      </p:sp>
+      <p:sp>
+        <p:nvSpPr>
+          <p:cNvPr id="188" name="Google Shape;188;g72001f471e_0_12"/>
+          <p:cNvSpPr txBox="1">
+            <a:spLocks noGrp="1"/>
+          </p:cNvSpPr>
+          <p:nvPr>
+            <p:ph type="body" idx="1"/>
+          </p:nvPr>
+        </p:nvSpPr>
+        <p:spPr>
+          <a:xfrm>
+            <a:off x="415600" y="1536633"/>
+            <a:ext cx="11360700" cy="4555200"/>
+          </a:xfrm>
+          <a:prstGeom prst="rect">
+            <a:avLst/>
+          </a:prstGeom>
+          <a:noFill/>
+          <a:ln>
+            <a:noFill/>
+          </a:ln>
+        </p:spPr>
+        <p:txBody>
+          <a:bodyPr spcFirstLastPara="1" wrap="square" lIns="121900" tIns="121900" rIns="121900" bIns="121900" anchor="t" anchorCtr="0">
+            <a:noAutofit/>
+          </a:bodyPr>
+          <a:lstStyle/>
+          <a:p>
+            <a:pPr marL="457200" lvl="0" indent="-228600" algn="l" rtl="0">
+              <a:lnSpc>
+                <a:spcPct val="115000"/>
+              </a:lnSpc>
+              <a:spcBef>
+                <a:spcPts val="0"/>
+              </a:spcBef>
+              <a:spcAft>
+                <a:spcPts val="0"/>
+              </a:spcAft>
+              <a:buClr>
+                <a:srgbClr val="434343"/>
+              </a:buClr>
+              <a:buSzPts val="2400"/>
+              <a:buNone/>
+            </a:pPr>
+            <a:endParaRPr/>
+          </a:p>
+        </p:txBody>
+      </p:sp>
+      <p:pic>
+        <p:nvPicPr>
+          <p:cNvPr id="189" name="Google Shape;189;g72001f471e_0_12"/>
+          <p:cNvPicPr preferRelativeResize="0"/>
+          <p:nvPr/>
+        </p:nvPicPr>
+        <p:blipFill rotWithShape="1">
+          <a:blip r:embed="rId3">
+            <a:alphaModFix/>
+          </a:blip>
+          <a:srcRect/>
+          <a:stretch/>
+        </p:blipFill>
+        <p:spPr>
+          <a:xfrm>
+            <a:off x="745689" y="-1111783"/>
+            <a:ext cx="10770402" cy="13298477"/>
+          </a:xfrm>
+          <a:prstGeom prst="rect">
+            <a:avLst/>
+          </a:prstGeom>
+          <a:noFill/>
+          <a:ln>
+            <a:noFill/>
+          </a:ln>
+        </p:spPr>
+      </p:pic>
+    </p:spTree>
+  </p:cSld>
+  <p:clrMapOvr>
+    <a:masterClrMapping/>
+  </p:clrMapOvr>
+</p:sld>
+</file>
+
+<file path=ppt/slides/slide31.xml><?xml version="1.0" encoding="utf-8"?>
+<p:sld xmlns:a="http://schemas.openxmlformats.org/drawingml/2006/main" xmlns:r="http://schemas.openxmlformats.org/officeDocument/2006/relationships" xmlns:p="http://schemas.openxmlformats.org/presentationml/2006/main">
+  <p:cSld>
+    <p:spTree>
+      <p:nvGrpSpPr>
+        <p:cNvPr id="1" name="Shape 193"/>
+        <p:cNvGrpSpPr/>
+        <p:nvPr/>
+      </p:nvGrpSpPr>
+      <p:grpSpPr>
+        <a:xfrm>
+          <a:off x="0" y="0"/>
+          <a:ext cx="0" cy="0"/>
+          <a:chOff x="0" y="0"/>
+          <a:chExt cx="0" cy="0"/>
+        </a:xfrm>
+      </p:grpSpPr>
+      <p:sp>
+        <p:nvSpPr>
+          <p:cNvPr id="194" name="Google Shape;194;p33"/>
+          <p:cNvSpPr txBox="1">
+            <a:spLocks noGrp="1"/>
+          </p:cNvSpPr>
+          <p:nvPr>
+            <p:ph type="title"/>
+          </p:nvPr>
+        </p:nvSpPr>
+        <p:spPr>
+          <a:xfrm>
+            <a:off x="415600" y="86563"/>
+            <a:ext cx="11360700" cy="763500"/>
+          </a:xfrm>
+          <a:prstGeom prst="rect">
+            <a:avLst/>
+          </a:prstGeom>
+          <a:noFill/>
+          <a:ln>
+            <a:noFill/>
+          </a:ln>
+        </p:spPr>
+        <p:txBody>
+          <a:bodyPr spcFirstLastPara="1" wrap="square" lIns="121900" tIns="121900" rIns="121900" bIns="121900" anchor="t" anchorCtr="0">
+            <a:noAutofit/>
+          </a:bodyPr>
+          <a:lstStyle/>
+          <a:p>
+            <a:pPr marL="0" lvl="0" indent="0" algn="l" rtl="0">
+              <a:lnSpc>
+                <a:spcPct val="100000"/>
+              </a:lnSpc>
+              <a:spcBef>
+                <a:spcPts val="0"/>
+              </a:spcBef>
+              <a:spcAft>
+                <a:spcPts val="0"/>
+              </a:spcAft>
+              <a:buClr>
+                <a:srgbClr val="FFFFFF"/>
+              </a:buClr>
+              <a:buSzPts val="3700"/>
+              <a:buNone/>
+            </a:pPr>
+            <a:r>
+              <a:rPr lang="en-US"/>
+              <a:t>Sparse Models (RiskSLIM)</a:t>
+            </a:r>
+            <a:endParaRPr/>
+          </a:p>
+        </p:txBody>
+      </p:sp>
+      <p:sp>
+        <p:nvSpPr>
+          <p:cNvPr id="195" name="Google Shape;195;p33"/>
+          <p:cNvSpPr txBox="1">
+            <a:spLocks noGrp="1"/>
+          </p:cNvSpPr>
+          <p:nvPr>
+            <p:ph type="body" idx="1"/>
+          </p:nvPr>
+        </p:nvSpPr>
+        <p:spPr>
+          <a:xfrm>
+            <a:off x="415600" y="1536633"/>
+            <a:ext cx="11360700" cy="4555200"/>
+          </a:xfrm>
+          <a:prstGeom prst="rect">
+            <a:avLst/>
+          </a:prstGeom>
+          <a:noFill/>
+          <a:ln>
+            <a:noFill/>
+          </a:ln>
+        </p:spPr>
+        <p:txBody>
+          <a:bodyPr spcFirstLastPara="1" wrap="square" lIns="121900" tIns="121900" rIns="121900" bIns="121900" anchor="t" anchorCtr="0">
+            <a:noAutofit/>
+          </a:bodyPr>
+          <a:lstStyle/>
+          <a:p>
+            <a:pPr marL="457200" lvl="0" indent="-228600" algn="l" rtl="0">
+              <a:lnSpc>
+                <a:spcPct val="115000"/>
+              </a:lnSpc>
+              <a:spcBef>
+                <a:spcPts val="0"/>
+              </a:spcBef>
+              <a:spcAft>
+                <a:spcPts val="0"/>
+              </a:spcAft>
+              <a:buClr>
+                <a:srgbClr val="434343"/>
+              </a:buClr>
+              <a:buSzPts val="2400"/>
+              <a:buNone/>
+            </a:pPr>
+            <a:endParaRPr/>
+          </a:p>
+        </p:txBody>
+      </p:sp>
+      <p:pic>
+        <p:nvPicPr>
+          <p:cNvPr id="196" name="Google Shape;196;p33"/>
+          <p:cNvPicPr preferRelativeResize="0"/>
+          <p:nvPr/>
+        </p:nvPicPr>
+        <p:blipFill rotWithShape="1">
+          <a:blip r:embed="rId3">
+            <a:alphaModFix/>
+          </a:blip>
+          <a:srcRect/>
+          <a:stretch/>
+        </p:blipFill>
+        <p:spPr>
+          <a:xfrm>
+            <a:off x="297707" y="1271841"/>
+            <a:ext cx="11694763" cy="4460689"/>
+          </a:xfrm>
+          <a:prstGeom prst="rect">
+            <a:avLst/>
+          </a:prstGeom>
+          <a:solidFill>
+            <a:srgbClr val="FFC000"/>
+          </a:solidFill>
+          <a:ln w="57150" cap="flat" cmpd="sng">
+            <a:solidFill>
+              <a:schemeClr val="accent2"/>
+            </a:solidFill>
+            <a:prstDash val="solid"/>
+            <a:round/>
+            <a:headEnd type="none" w="sm" len="sm"/>
+            <a:tailEnd type="none" w="sm" len="sm"/>
+          </a:ln>
+        </p:spPr>
+      </p:pic>
+    </p:spTree>
+  </p:cSld>
+  <p:clrMapOvr>
+    <a:masterClrMapping/>
+  </p:clrMapOvr>
+</p:sld>
+</file>
+
+<file path=ppt/slides/slide32.xml><?xml version="1.0" encoding="utf-8"?>
 <p:sld xmlns:a="http://schemas.openxmlformats.org/drawingml/2006/main" xmlns:r="http://schemas.openxmlformats.org/officeDocument/2006/relationships" xmlns:p="http://schemas.openxmlformats.org/presentationml/2006/main">
   <p:cSld>
     <p:spTree>
@@ -21036,10 +25094,10 @@
       </p:sp>
       <p:sp>
         <p:nvSpPr>
-          <p:cNvPr id="5" name="Text Placeholder 4">
+          <p:cNvPr id="4" name="Text Placeholder 3">
             <a:extLst>
               <a:ext uri="{FF2B5EF4-FFF2-40B4-BE49-F238E27FC236}">
-                <a16:creationId xmlns:a16="http://schemas.microsoft.com/office/drawing/2014/main" id="{F4E0A5F0-1D89-954D-91FB-596CD9E690F2}"/>
+                <a16:creationId xmlns:a16="http://schemas.microsoft.com/office/drawing/2014/main" id="{B453ACC4-2523-B0D0-50B8-1F6C36BFEA31}"/>
               </a:ext>
             </a:extLst>
           </p:cNvPr>
@@ -21055,69 +25113,7 @@
           <a:bodyPr/>
           <a:lstStyle/>
           <a:p>
-            <a:pPr marL="76200" indent="0">
-              <a:buNone/>
-            </a:pPr>
-            <a:r>
-              <a:rPr lang="en-US" b="1" dirty="0"/>
-              <a:t>This week:</a:t>
-            </a:r>
-            <a:endParaRPr lang="en-US" dirty="0"/>
-          </a:p>
-          <a:p>
-            <a:r>
-              <a:rPr lang="en-US" dirty="0"/>
-              <a:t>Wednesday team check-ins</a:t>
-            </a:r>
-          </a:p>
-          <a:p>
-            <a:r>
-              <a:rPr lang="en-US" dirty="0">
-                <a:solidFill>
-                  <a:srgbClr val="C00000"/>
-                </a:solidFill>
-              </a:rPr>
-              <a:t>Thursday: Class Session in GHC 6115</a:t>
-            </a:r>
-          </a:p>
-          <a:p>
-            <a:pPr marL="76200" indent="0">
-              <a:buNone/>
-            </a:pPr>
-            <a:endParaRPr lang="en-US" dirty="0"/>
-          </a:p>
-          <a:p>
-            <a:pPr marL="76200" indent="0">
-              <a:buNone/>
-            </a:pPr>
-            <a:r>
-              <a:rPr lang="en-US" b="1" dirty="0"/>
-              <a:t>Coming up next week:</a:t>
-            </a:r>
-          </a:p>
-          <a:p>
-            <a:r>
-              <a:rPr lang="en-US" dirty="0"/>
-              <a:t>Monday: Update 7 (on Canvas): Model selection and ML Results Over Time</a:t>
-            </a:r>
-          </a:p>
-          <a:p>
-            <a:r>
-              <a:rPr lang="en-US" dirty="0"/>
-              <a:t>Tuesday: Feedback Form</a:t>
-            </a:r>
-          </a:p>
-          <a:p>
-            <a:r>
-              <a:rPr lang="en-US" dirty="0"/>
-              <a:t>Readings for Tuesday: Bias and Fairness</a:t>
-            </a:r>
-          </a:p>
-          <a:p>
-            <a:r>
-              <a:rPr lang="en-US" dirty="0"/>
-              <a:t>No Wednesday meetings (Thanksgiving) but happy to meet on Tuesday (or Wednesday) if any teams want to</a:t>
-            </a:r>
+            <a:endParaRPr lang="en-US"/>
           </a:p>
         </p:txBody>
       </p:sp>
@@ -21216,16 +25212,6 @@
             </a:r>
           </a:p>
           <a:p>
-            <a:r>
-              <a:rPr lang="en-US" dirty="0">
-                <a:solidFill>
-                  <a:srgbClr val="C00000"/>
-                </a:solidFill>
-              </a:rPr>
-              <a:t>Thursday: Class Session in GHC 6115</a:t>
-            </a:r>
-          </a:p>
-          <a:p>
             <a:pPr marL="76200" indent="0">
               <a:buNone/>
             </a:pPr>
@@ -21243,7 +25229,7 @@
           <a:p>
             <a:r>
               <a:rPr lang="en-US" dirty="0"/>
-              <a:t>Monday: Update 7 (on Canvas): Model selection and ML Results Over Time</a:t>
+              <a:t>Monday: Update 7 (on Canvas): Understanding the Models</a:t>
             </a:r>
           </a:p>
           <a:p>
@@ -21261,7 +25247,7 @@
           <a:p>
             <a:r>
               <a:rPr lang="en-US" dirty="0"/>
-              <a:t>No Wednesday meetings (Thanksgiving) but happy to meet on Tuesday (or Wednesday) if any teams want to</a:t>
+              <a:t>No Wednesday meetings (Thanksgiving) but need to have a final planning meeting on Monday or Tuesday with each team.</a:t>
             </a:r>
           </a:p>
         </p:txBody>
@@ -21392,7 +25378,7 @@
             <a:pPr lvl="1"/>
             <a:r>
               <a:rPr lang="en-US" dirty="0"/>
-              <a:t>Doing a first pass over plotting the results over time and doing simple model selection</a:t>
+              <a:t>Understanding models  - feature importances, list comparison, cross-tabs</a:t>
             </a:r>
           </a:p>
         </p:txBody>
@@ -21667,6 +25653,303 @@
   <p:cSld>
     <p:spTree>
       <p:nvGrpSpPr>
+        <p:cNvPr id="1" name=""/>
+        <p:cNvGrpSpPr/>
+        <p:nvPr/>
+      </p:nvGrpSpPr>
+      <p:grpSpPr>
+        <a:xfrm>
+          <a:off x="0" y="0"/>
+          <a:ext cx="0" cy="0"/>
+          <a:chOff x="0" y="0"/>
+          <a:chExt cx="0" cy="0"/>
+        </a:xfrm>
+      </p:grpSpPr>
+      <p:sp>
+        <p:nvSpPr>
+          <p:cNvPr id="2" name="Title 1">
+            <a:extLst>
+              <a:ext uri="{FF2B5EF4-FFF2-40B4-BE49-F238E27FC236}">
+                <a16:creationId xmlns:a16="http://schemas.microsoft.com/office/drawing/2014/main" id="{7729C082-9CE5-C186-BA53-3B5A07C9AF5C}"/>
+              </a:ext>
+            </a:extLst>
+          </p:cNvPr>
+          <p:cNvSpPr>
+            <a:spLocks noGrp="1"/>
+          </p:cNvSpPr>
+          <p:nvPr>
+            <p:ph type="title"/>
+          </p:nvPr>
+        </p:nvSpPr>
+        <p:spPr/>
+        <p:txBody>
+          <a:bodyPr/>
+          <a:lstStyle/>
+          <a:p>
+            <a:r>
+              <a:rPr lang="en-US" dirty="0"/>
+              <a:t>Recap: Selecting “high performing models”</a:t>
+            </a:r>
+          </a:p>
+        </p:txBody>
+      </p:sp>
+      <p:pic>
+        <p:nvPicPr>
+          <p:cNvPr id="4" name="Picture 3">
+            <a:extLst>
+              <a:ext uri="{FF2B5EF4-FFF2-40B4-BE49-F238E27FC236}">
+                <a16:creationId xmlns:a16="http://schemas.microsoft.com/office/drawing/2014/main" id="{A162616A-A26B-E5AE-2061-8FEF2487F891}"/>
+              </a:ext>
+            </a:extLst>
+          </p:cNvPr>
+          <p:cNvPicPr>
+            <a:picLocks noChangeAspect="1"/>
+          </p:cNvPicPr>
+          <p:nvPr/>
+        </p:nvPicPr>
+        <p:blipFill>
+          <a:blip r:embed="rId2"/>
+          <a:stretch>
+            <a:fillRect/>
+          </a:stretch>
+        </p:blipFill>
+        <p:spPr>
+          <a:xfrm>
+            <a:off x="0" y="1428167"/>
+            <a:ext cx="12192000" cy="1678013"/>
+          </a:xfrm>
+          <a:prstGeom prst="rect">
+            <a:avLst/>
+          </a:prstGeom>
+        </p:spPr>
+      </p:pic>
+      <p:pic>
+        <p:nvPicPr>
+          <p:cNvPr id="5" name="Picture 4">
+            <a:extLst>
+              <a:ext uri="{FF2B5EF4-FFF2-40B4-BE49-F238E27FC236}">
+                <a16:creationId xmlns:a16="http://schemas.microsoft.com/office/drawing/2014/main" id="{C96D4F6B-F2A6-7445-A11E-A8B355ED3D6C}"/>
+              </a:ext>
+            </a:extLst>
+          </p:cNvPr>
+          <p:cNvPicPr>
+            <a:picLocks noChangeAspect="1"/>
+          </p:cNvPicPr>
+          <p:nvPr/>
+        </p:nvPicPr>
+        <p:blipFill>
+          <a:blip r:embed="rId3"/>
+          <a:stretch>
+            <a:fillRect/>
+          </a:stretch>
+        </p:blipFill>
+        <p:spPr>
+          <a:xfrm>
+            <a:off x="6002767" y="3324530"/>
+            <a:ext cx="6189233" cy="3318025"/>
+          </a:xfrm>
+          <a:prstGeom prst="rect">
+            <a:avLst/>
+          </a:prstGeom>
+        </p:spPr>
+      </p:pic>
+      <p:pic>
+        <p:nvPicPr>
+          <p:cNvPr id="6" name="Picture 5">
+            <a:extLst>
+              <a:ext uri="{FF2B5EF4-FFF2-40B4-BE49-F238E27FC236}">
+                <a16:creationId xmlns:a16="http://schemas.microsoft.com/office/drawing/2014/main" id="{D1FBE58E-3604-AE3C-AC9F-C387AC2A1843}"/>
+              </a:ext>
+            </a:extLst>
+          </p:cNvPr>
+          <p:cNvPicPr>
+            <a:picLocks noChangeAspect="1"/>
+          </p:cNvPicPr>
+          <p:nvPr/>
+        </p:nvPicPr>
+        <p:blipFill>
+          <a:blip r:embed="rId4"/>
+          <a:stretch>
+            <a:fillRect/>
+          </a:stretch>
+        </p:blipFill>
+        <p:spPr>
+          <a:xfrm>
+            <a:off x="0" y="3429000"/>
+            <a:ext cx="5821178" cy="3160068"/>
+          </a:xfrm>
+          <a:prstGeom prst="rect">
+            <a:avLst/>
+          </a:prstGeom>
+        </p:spPr>
+      </p:pic>
+    </p:spTree>
+    <p:extLst>
+      <p:ext uri="{BB962C8B-B14F-4D97-AF65-F5344CB8AC3E}">
+        <p14:creationId xmlns:p14="http://schemas.microsoft.com/office/powerpoint/2010/main" val="2801402893"/>
+      </p:ext>
+    </p:extLst>
+  </p:cSld>
+  <p:clrMapOvr>
+    <a:masterClrMapping/>
+  </p:clrMapOvr>
+</p:sld>
+</file>
+
+<file path=ppt/slides/slide8.xml><?xml version="1.0" encoding="utf-8"?>
+<p:sld xmlns:a="http://schemas.openxmlformats.org/drawingml/2006/main" xmlns:r="http://schemas.openxmlformats.org/officeDocument/2006/relationships" xmlns:p="http://schemas.openxmlformats.org/presentationml/2006/main">
+  <p:cSld>
+    <p:spTree>
+      <p:nvGrpSpPr>
+        <p:cNvPr id="1" name=""/>
+        <p:cNvGrpSpPr/>
+        <p:nvPr/>
+      </p:nvGrpSpPr>
+      <p:grpSpPr>
+        <a:xfrm>
+          <a:off x="0" y="0"/>
+          <a:ext cx="0" cy="0"/>
+          <a:chOff x="0" y="0"/>
+          <a:chExt cx="0" cy="0"/>
+        </a:xfrm>
+      </p:grpSpPr>
+      <p:sp>
+        <p:nvSpPr>
+          <p:cNvPr id="2" name="Title 1">
+            <a:extLst>
+              <a:ext uri="{FF2B5EF4-FFF2-40B4-BE49-F238E27FC236}">
+                <a16:creationId xmlns:a16="http://schemas.microsoft.com/office/drawing/2014/main" id="{D6AC79B4-571D-B3D8-FACB-47A85C93BC0F}"/>
+              </a:ext>
+            </a:extLst>
+          </p:cNvPr>
+          <p:cNvSpPr>
+            <a:spLocks noGrp="1"/>
+          </p:cNvSpPr>
+          <p:nvPr>
+            <p:ph type="title"/>
+          </p:nvPr>
+        </p:nvSpPr>
+        <p:spPr/>
+        <p:txBody>
+          <a:bodyPr/>
+          <a:lstStyle/>
+          <a:p>
+            <a:r>
+              <a:rPr lang="en-US"/>
+              <a:t>Are my top models similar or different?</a:t>
+            </a:r>
+            <a:endParaRPr lang="en-US" dirty="0"/>
+          </a:p>
+        </p:txBody>
+      </p:sp>
+      <p:sp>
+        <p:nvSpPr>
+          <p:cNvPr id="3" name="Text Placeholder 2">
+            <a:extLst>
+              <a:ext uri="{FF2B5EF4-FFF2-40B4-BE49-F238E27FC236}">
+                <a16:creationId xmlns:a16="http://schemas.microsoft.com/office/drawing/2014/main" id="{776949BC-1960-F567-AAB7-DC0980AB33D8}"/>
+              </a:ext>
+            </a:extLst>
+          </p:cNvPr>
+          <p:cNvSpPr>
+            <a:spLocks noGrp="1"/>
+          </p:cNvSpPr>
+          <p:nvPr>
+            <p:ph type="body" idx="1"/>
+          </p:nvPr>
+        </p:nvSpPr>
+        <p:spPr/>
+        <p:txBody>
+          <a:bodyPr/>
+          <a:lstStyle/>
+          <a:p>
+            <a:r>
+              <a:rPr lang="en-US"/>
+              <a:t>In terms of:</a:t>
+            </a:r>
+          </a:p>
+          <a:p>
+            <a:pPr lvl="1"/>
+            <a:r>
+              <a:rPr lang="en-US"/>
+              <a:t>Additional metrics (auc, precision/recall near k, etc.)</a:t>
+            </a:r>
+          </a:p>
+          <a:p>
+            <a:pPr lvl="1"/>
+            <a:r>
+              <a:rPr lang="en-US"/>
+              <a:t>Feature importance (overlap, rank correlation)</a:t>
+            </a:r>
+          </a:p>
+          <a:p>
+            <a:pPr lvl="1"/>
+            <a:r>
+              <a:rPr lang="en-US"/>
+              <a:t>Top k list overlap</a:t>
+            </a:r>
+          </a:p>
+          <a:p>
+            <a:pPr lvl="1"/>
+            <a:r>
+              <a:rPr lang="en-US"/>
+              <a:t>Top k rank correlation</a:t>
+            </a:r>
+          </a:p>
+          <a:p>
+            <a:pPr lvl="1"/>
+            <a:endParaRPr lang="en-US" dirty="0"/>
+          </a:p>
+        </p:txBody>
+      </p:sp>
+      <p:pic>
+        <p:nvPicPr>
+          <p:cNvPr id="4" name="Picture 3">
+            <a:extLst>
+              <a:ext uri="{FF2B5EF4-FFF2-40B4-BE49-F238E27FC236}">
+                <a16:creationId xmlns:a16="http://schemas.microsoft.com/office/drawing/2014/main" id="{AD4CE3AA-42E1-BC4F-76E4-FA704BC9FB0A}"/>
+              </a:ext>
+            </a:extLst>
+          </p:cNvPr>
+          <p:cNvPicPr>
+            <a:picLocks noChangeAspect="1"/>
+          </p:cNvPicPr>
+          <p:nvPr/>
+        </p:nvPicPr>
+        <p:blipFill>
+          <a:blip r:embed="rId2"/>
+          <a:stretch>
+            <a:fillRect/>
+          </a:stretch>
+        </p:blipFill>
+        <p:spPr>
+          <a:xfrm>
+            <a:off x="7306420" y="1579418"/>
+            <a:ext cx="4469880" cy="4390061"/>
+          </a:xfrm>
+          <a:prstGeom prst="rect">
+            <a:avLst/>
+          </a:prstGeom>
+        </p:spPr>
+      </p:pic>
+    </p:spTree>
+    <p:extLst>
+      <p:ext uri="{BB962C8B-B14F-4D97-AF65-F5344CB8AC3E}">
+        <p14:creationId xmlns:p14="http://schemas.microsoft.com/office/powerpoint/2010/main" val="3785262710"/>
+      </p:ext>
+    </p:extLst>
+  </p:cSld>
+  <p:clrMapOvr>
+    <a:masterClrMapping/>
+  </p:clrMapOvr>
+</p:sld>
+</file>
+
+<file path=ppt/slides/slide9.xml><?xml version="1.0" encoding="utf-8"?>
+<p:sld xmlns:a="http://schemas.openxmlformats.org/drawingml/2006/main" xmlns:r="http://schemas.openxmlformats.org/officeDocument/2006/relationships" xmlns:p="http://schemas.openxmlformats.org/presentationml/2006/main">
+  <p:cSld>
+    <p:spTree>
+      <p:nvGrpSpPr>
         <p:cNvPr id="1" name="Shape 65"/>
         <p:cNvGrpSpPr/>
         <p:nvPr/>
@@ -21691,8 +25974,64 @@
         </p:nvSpPr>
         <p:spPr>
           <a:xfrm>
-            <a:off x="415600" y="86563"/>
+            <a:off x="415600" y="593367"/>
             <a:ext cx="11360700" cy="763500"/>
+          </a:xfrm>
+        </p:spPr>
+        <p:txBody>
+          <a:bodyPr spcFirstLastPara="1" wrap="square" lIns="121900" tIns="121900" rIns="121900" bIns="121900" anchor="ctr" anchorCtr="0">
+            <a:normAutofit/>
+          </a:bodyPr>
+          <a:lstStyle/>
+          <a:p>
+            <a:pPr marL="0" lvl="0" indent="0" rtl="0">
+              <a:lnSpc>
+                <a:spcPct val="90000"/>
+              </a:lnSpc>
+              <a:spcBef>
+                <a:spcPts val="0"/>
+              </a:spcBef>
+              <a:spcAft>
+                <a:spcPts val="0"/>
+              </a:spcAft>
+              <a:buClr>
+                <a:srgbClr val="FFFFFF"/>
+              </a:buClr>
+              <a:buSzPts val="3700"/>
+              <a:buNone/>
+            </a:pPr>
+            <a:r>
+              <a:rPr lang="en-US" sz="3700"/>
+              <a:t>Why do we want Interpretability?</a:t>
+            </a:r>
+          </a:p>
+        </p:txBody>
+      </p:sp>
+      <p:pic>
+        <p:nvPicPr>
+          <p:cNvPr id="68" name="Picture 67" descr="Wood human figure">
+            <a:extLst>
+              <a:ext uri="{FF2B5EF4-FFF2-40B4-BE49-F238E27FC236}">
+                <a16:creationId xmlns:a16="http://schemas.microsoft.com/office/drawing/2014/main" id="{7048C786-404E-5398-944F-633798E4A1C3}"/>
+              </a:ext>
+            </a:extLst>
+          </p:cNvPr>
+          <p:cNvPicPr>
+            <a:picLocks noChangeAspect="1"/>
+          </p:cNvPicPr>
+          <p:nvPr/>
+        </p:nvPicPr>
+        <p:blipFill>
+          <a:blip r:embed="rId3"/>
+          <a:srcRect r="1" b="42604"/>
+          <a:stretch>
+            <a:fillRect/>
+          </a:stretch>
+        </p:blipFill>
+        <p:spPr>
+          <a:xfrm>
+            <a:off x="415600" y="1547367"/>
+            <a:ext cx="11360700" cy="4352544"/>
           </a:xfrm>
           <a:prstGeom prst="rect">
             <a:avLst/>
@@ -21702,955 +26041,7 @@
             <a:noFill/>
           </a:ln>
         </p:spPr>
-        <p:txBody>
-          <a:bodyPr spcFirstLastPara="1" wrap="square" lIns="121900" tIns="121900" rIns="121900" bIns="121900" anchor="t" anchorCtr="0">
-            <a:noAutofit/>
-          </a:bodyPr>
-          <a:lstStyle/>
-          <a:p>
-            <a:pPr marL="0" lvl="0" indent="0" algn="l" rtl="0">
-              <a:lnSpc>
-                <a:spcPct val="100000"/>
-              </a:lnSpc>
-              <a:spcBef>
-                <a:spcPts val="0"/>
-              </a:spcBef>
-              <a:spcAft>
-                <a:spcPts val="0"/>
-              </a:spcAft>
-              <a:buClr>
-                <a:srgbClr val="FFFFFF"/>
-              </a:buClr>
-              <a:buSzPts val="3700"/>
-              <a:buNone/>
-            </a:pPr>
-            <a:r>
-              <a:rPr lang="en-US"/>
-              <a:t>Why do we want Interpretability?</a:t>
-            </a:r>
-            <a:endParaRPr/>
-          </a:p>
-        </p:txBody>
-      </p:sp>
-    </p:spTree>
-  </p:cSld>
-  <p:clrMapOvr>
-    <a:masterClrMapping/>
-  </p:clrMapOvr>
-</p:sld>
-</file>
-
-<file path=ppt/slides/slide8.xml><?xml version="1.0" encoding="utf-8"?>
-<p:sld xmlns:a="http://schemas.openxmlformats.org/drawingml/2006/main" xmlns:r="http://schemas.openxmlformats.org/officeDocument/2006/relationships" xmlns:p="http://schemas.openxmlformats.org/presentationml/2006/main">
-  <p:cSld>
-    <p:spTree>
-      <p:nvGrpSpPr>
-        <p:cNvPr id="1" name="Shape 70"/>
-        <p:cNvGrpSpPr/>
-        <p:nvPr/>
-      </p:nvGrpSpPr>
-      <p:grpSpPr>
-        <a:xfrm>
-          <a:off x="0" y="0"/>
-          <a:ext cx="0" cy="0"/>
-          <a:chOff x="0" y="0"/>
-          <a:chExt cx="0" cy="0"/>
-        </a:xfrm>
-      </p:grpSpPr>
-      <p:sp>
-        <p:nvSpPr>
-          <p:cNvPr id="71" name="Google Shape;71;g71c82016f7_0_0"/>
-          <p:cNvSpPr txBox="1">
-            <a:spLocks noGrp="1"/>
-          </p:cNvSpPr>
-          <p:nvPr>
-            <p:ph type="title"/>
-          </p:nvPr>
-        </p:nvSpPr>
-        <p:spPr>
-          <a:xfrm>
-            <a:off x="415600" y="86563"/>
-            <a:ext cx="11360700" cy="763500"/>
-          </a:xfrm>
-          <a:prstGeom prst="rect">
-            <a:avLst/>
-          </a:prstGeom>
-          <a:noFill/>
-          <a:ln>
-            <a:noFill/>
-          </a:ln>
-        </p:spPr>
-        <p:txBody>
-          <a:bodyPr spcFirstLastPara="1" wrap="square" lIns="121900" tIns="121900" rIns="121900" bIns="121900" anchor="t" anchorCtr="0">
-            <a:noAutofit/>
-          </a:bodyPr>
-          <a:lstStyle/>
-          <a:p>
-            <a:pPr marL="0" lvl="0" indent="0" algn="l" rtl="0">
-              <a:lnSpc>
-                <a:spcPct val="100000"/>
-              </a:lnSpc>
-              <a:spcBef>
-                <a:spcPts val="0"/>
-              </a:spcBef>
-              <a:spcAft>
-                <a:spcPts val="0"/>
-              </a:spcAft>
-              <a:buClr>
-                <a:srgbClr val="FFFFFF"/>
-              </a:buClr>
-              <a:buSzPts val="3700"/>
-              <a:buNone/>
-            </a:pPr>
-            <a:r>
-              <a:rPr lang="en-US"/>
-              <a:t>Why do we want Interpretability?</a:t>
-            </a:r>
-            <a:endParaRPr/>
-          </a:p>
-        </p:txBody>
-      </p:sp>
-      <p:sp>
-        <p:nvSpPr>
-          <p:cNvPr id="72" name="Google Shape;72;g71c82016f7_0_0"/>
-          <p:cNvSpPr txBox="1">
-            <a:spLocks noGrp="1"/>
-          </p:cNvSpPr>
-          <p:nvPr>
-            <p:ph type="body" idx="1"/>
-          </p:nvPr>
-        </p:nvSpPr>
-        <p:spPr>
-          <a:xfrm>
-            <a:off x="415600" y="1536633"/>
-            <a:ext cx="11360700" cy="4555200"/>
-          </a:xfrm>
-          <a:prstGeom prst="rect">
-            <a:avLst/>
-          </a:prstGeom>
-          <a:noFill/>
-          <a:ln>
-            <a:noFill/>
-          </a:ln>
-        </p:spPr>
-        <p:txBody>
-          <a:bodyPr spcFirstLastPara="1" wrap="square" lIns="121900" tIns="121900" rIns="121900" bIns="121900" anchor="t" anchorCtr="0">
-            <a:noAutofit/>
-          </a:bodyPr>
-          <a:lstStyle/>
-          <a:p>
-            <a:pPr marL="457200" lvl="0" indent="-381000" algn="l" rtl="0">
-              <a:lnSpc>
-                <a:spcPct val="115000"/>
-              </a:lnSpc>
-              <a:spcBef>
-                <a:spcPts val="0"/>
-              </a:spcBef>
-              <a:spcAft>
-                <a:spcPts val="0"/>
-              </a:spcAft>
-              <a:buClr>
-                <a:srgbClr val="434343"/>
-              </a:buClr>
-              <a:buSzPts val="2400"/>
-              <a:buChar char="●"/>
-            </a:pPr>
-            <a:r>
-              <a:rPr lang="en-US"/>
-              <a:t>Debugging the Model</a:t>
-            </a:r>
-            <a:endParaRPr/>
-          </a:p>
-          <a:p>
-            <a:pPr marL="457200" lvl="0" indent="-381000" algn="l" rtl="0">
-              <a:lnSpc>
-                <a:spcPct val="115000"/>
-              </a:lnSpc>
-              <a:spcBef>
-                <a:spcPts val="0"/>
-              </a:spcBef>
-              <a:spcAft>
-                <a:spcPts val="0"/>
-              </a:spcAft>
-              <a:buClr>
-                <a:srgbClr val="434343"/>
-              </a:buClr>
-              <a:buSzPts val="2400"/>
-              <a:buChar char="●"/>
-            </a:pPr>
-            <a:r>
-              <a:rPr lang="en-US"/>
-              <a:t>Improving the performance of the system</a:t>
-            </a:r>
-            <a:endParaRPr/>
-          </a:p>
-          <a:p>
-            <a:pPr marL="457200" lvl="0" indent="-381000" algn="l" rtl="0">
-              <a:lnSpc>
-                <a:spcPct val="115000"/>
-              </a:lnSpc>
-              <a:spcBef>
-                <a:spcPts val="0"/>
-              </a:spcBef>
-              <a:spcAft>
-                <a:spcPts val="0"/>
-              </a:spcAft>
-              <a:buClr>
-                <a:srgbClr val="434343"/>
-              </a:buClr>
-              <a:buSzPts val="2400"/>
-              <a:buChar char="●"/>
-            </a:pPr>
-            <a:r>
-              <a:rPr lang="en-US"/>
-              <a:t>Creating and increasing trust and adoption</a:t>
-            </a:r>
-            <a:endParaRPr/>
-          </a:p>
-          <a:p>
-            <a:pPr marL="457200" lvl="0" indent="-381000" algn="l" rtl="0">
-              <a:lnSpc>
-                <a:spcPct val="115000"/>
-              </a:lnSpc>
-              <a:spcBef>
-                <a:spcPts val="0"/>
-              </a:spcBef>
-              <a:spcAft>
-                <a:spcPts val="0"/>
-              </a:spcAft>
-              <a:buClr>
-                <a:srgbClr val="434343"/>
-              </a:buClr>
-              <a:buSzPts val="2400"/>
-              <a:buChar char="●"/>
-            </a:pPr>
-            <a:r>
-              <a:rPr lang="en-US"/>
-              <a:t>Selecting appropriate actions/interventions</a:t>
-            </a:r>
-            <a:endParaRPr/>
-          </a:p>
-          <a:p>
-            <a:pPr marL="457200" lvl="0" indent="-381000" algn="l" rtl="0">
-              <a:lnSpc>
-                <a:spcPct val="115000"/>
-              </a:lnSpc>
-              <a:spcBef>
-                <a:spcPts val="0"/>
-              </a:spcBef>
-              <a:spcAft>
-                <a:spcPts val="0"/>
-              </a:spcAft>
-              <a:buClr>
-                <a:srgbClr val="434343"/>
-              </a:buClr>
-              <a:buSzPts val="2400"/>
-              <a:buChar char="●"/>
-            </a:pPr>
-            <a:r>
-              <a:rPr lang="en-US"/>
-              <a:t>Legal Recourse </a:t>
-            </a:r>
-            <a:endParaRPr/>
-          </a:p>
-        </p:txBody>
-      </p:sp>
-    </p:spTree>
-  </p:cSld>
-  <p:clrMapOvr>
-    <a:masterClrMapping/>
-  </p:clrMapOvr>
-</p:sld>
-</file>
-
-<file path=ppt/slides/slide9.xml><?xml version="1.0" encoding="utf-8"?>
-<p:sld xmlns:a="http://schemas.openxmlformats.org/drawingml/2006/main" xmlns:r="http://schemas.openxmlformats.org/officeDocument/2006/relationships" xmlns:p="http://schemas.openxmlformats.org/presentationml/2006/main">
-  <p:cSld>
-    <p:spTree>
-      <p:nvGrpSpPr>
-        <p:cNvPr id="1" name="Shape 76"/>
-        <p:cNvGrpSpPr/>
-        <p:nvPr/>
-      </p:nvGrpSpPr>
-      <p:grpSpPr>
-        <a:xfrm>
-          <a:off x="0" y="0"/>
-          <a:ext cx="0" cy="0"/>
-          <a:chOff x="0" y="0"/>
-          <a:chExt cx="0" cy="0"/>
-        </a:xfrm>
-      </p:grpSpPr>
-      <p:sp>
-        <p:nvSpPr>
-          <p:cNvPr id="77" name="Google Shape;77;p26"/>
-          <p:cNvSpPr txBox="1">
-            <a:spLocks noGrp="1"/>
-          </p:cNvSpPr>
-          <p:nvPr>
-            <p:ph type="title"/>
-          </p:nvPr>
-        </p:nvSpPr>
-        <p:spPr>
-          <a:xfrm>
-            <a:off x="415600" y="86563"/>
-            <a:ext cx="11360700" cy="763500"/>
-          </a:xfrm>
-          <a:prstGeom prst="rect">
-            <a:avLst/>
-          </a:prstGeom>
-          <a:noFill/>
-          <a:ln>
-            <a:noFill/>
-          </a:ln>
-        </p:spPr>
-        <p:txBody>
-          <a:bodyPr spcFirstLastPara="1" wrap="square" lIns="121900" tIns="121900" rIns="121900" bIns="121900" anchor="t" anchorCtr="0">
-            <a:noAutofit/>
-          </a:bodyPr>
-          <a:lstStyle/>
-          <a:p>
-            <a:pPr marL="0" lvl="0" indent="0" algn="l" rtl="0">
-              <a:lnSpc>
-                <a:spcPct val="100000"/>
-              </a:lnSpc>
-              <a:spcBef>
-                <a:spcPts val="0"/>
-              </a:spcBef>
-              <a:spcAft>
-                <a:spcPts val="0"/>
-              </a:spcAft>
-              <a:buClr>
-                <a:srgbClr val="FFFFFF"/>
-              </a:buClr>
-              <a:buSzPts val="3700"/>
-              <a:buNone/>
-            </a:pPr>
-            <a:r>
-              <a:rPr lang="en-US"/>
-              <a:t>Global Vs Local</a:t>
-            </a:r>
-            <a:endParaRPr/>
-          </a:p>
-        </p:txBody>
-      </p:sp>
-      <p:graphicFrame>
-        <p:nvGraphicFramePr>
-          <p:cNvPr id="78" name="Google Shape;78;p26"/>
-          <p:cNvGraphicFramePr/>
-          <p:nvPr/>
-        </p:nvGraphicFramePr>
-        <p:xfrm>
-          <a:off x="263476" y="1762929"/>
-          <a:ext cx="11664950" cy="3173270"/>
-        </p:xfrm>
-        <a:graphic>
-          <a:graphicData uri="http://schemas.openxmlformats.org/drawingml/2006/table">
-            <a:tbl>
-              <a:tblPr firstRow="1" bandRow="1">
-                <a:noFill/>
-                <a:tableStyleId>{5A04CC6A-533F-41F1-990F-45FB056E221C}</a:tableStyleId>
-              </a:tblPr>
-              <a:tblGrid>
-                <a:gridCol w="2052875">
-                  <a:extLst>
-                    <a:ext uri="{9D8B030D-6E8A-4147-A177-3AD203B41FA5}">
-                      <a16:colId xmlns:a16="http://schemas.microsoft.com/office/drawing/2014/main" val="20000"/>
-                    </a:ext>
-                  </a:extLst>
-                </a:gridCol>
-                <a:gridCol w="3657600">
-                  <a:extLst>
-                    <a:ext uri="{9D8B030D-6E8A-4147-A177-3AD203B41FA5}">
-                      <a16:colId xmlns:a16="http://schemas.microsoft.com/office/drawing/2014/main" val="20001"/>
-                    </a:ext>
-                  </a:extLst>
-                </a:gridCol>
-                <a:gridCol w="3657600">
-                  <a:extLst>
-                    <a:ext uri="{9D8B030D-6E8A-4147-A177-3AD203B41FA5}">
-                      <a16:colId xmlns:a16="http://schemas.microsoft.com/office/drawing/2014/main" val="20002"/>
-                    </a:ext>
-                  </a:extLst>
-                </a:gridCol>
-                <a:gridCol w="2296875">
-                  <a:extLst>
-                    <a:ext uri="{9D8B030D-6E8A-4147-A177-3AD203B41FA5}">
-                      <a16:colId xmlns:a16="http://schemas.microsoft.com/office/drawing/2014/main" val="20003"/>
-                    </a:ext>
-                  </a:extLst>
-                </a:gridCol>
-              </a:tblGrid>
-              <a:tr h="494450">
-                <a:tc>
-                  <a:txBody>
-                    <a:bodyPr/>
-                    <a:lstStyle/>
-                    <a:p>
-                      <a:pPr marL="0" marR="0" lvl="0" indent="0" algn="l" rtl="0">
-                        <a:lnSpc>
-                          <a:spcPct val="100000"/>
-                        </a:lnSpc>
-                        <a:spcBef>
-                          <a:spcPts val="0"/>
-                        </a:spcBef>
-                        <a:spcAft>
-                          <a:spcPts val="0"/>
-                        </a:spcAft>
-                        <a:buNone/>
-                      </a:pPr>
-                      <a:r>
-                        <a:rPr lang="en-US" sz="2000" u="none" strike="noStrike" cap="none"/>
-                        <a:t>Use Case</a:t>
-                      </a:r>
-                      <a:endParaRPr/>
-                    </a:p>
-                  </a:txBody>
-                  <a:tcPr marL="121925" marR="121925" marT="60950" marB="60950"/>
-                </a:tc>
-                <a:tc>
-                  <a:txBody>
-                    <a:bodyPr/>
-                    <a:lstStyle/>
-                    <a:p>
-                      <a:pPr marL="0" marR="0" lvl="0" indent="0" algn="l" rtl="0">
-                        <a:lnSpc>
-                          <a:spcPct val="100000"/>
-                        </a:lnSpc>
-                        <a:spcBef>
-                          <a:spcPts val="0"/>
-                        </a:spcBef>
-                        <a:spcAft>
-                          <a:spcPts val="0"/>
-                        </a:spcAft>
-                        <a:buNone/>
-                      </a:pPr>
-                      <a:r>
-                        <a:rPr lang="en-US" sz="2000" u="none" strike="noStrike" cap="none"/>
-                        <a:t>User</a:t>
-                      </a:r>
-                      <a:endParaRPr/>
-                    </a:p>
-                  </a:txBody>
-                  <a:tcPr marL="121925" marR="121925" marT="60950" marB="60950"/>
-                </a:tc>
-                <a:tc>
-                  <a:txBody>
-                    <a:bodyPr/>
-                    <a:lstStyle/>
-                    <a:p>
-                      <a:pPr marL="0" marR="0" lvl="0" indent="0" algn="l" rtl="0">
-                        <a:lnSpc>
-                          <a:spcPct val="100000"/>
-                        </a:lnSpc>
-                        <a:spcBef>
-                          <a:spcPts val="0"/>
-                        </a:spcBef>
-                        <a:spcAft>
-                          <a:spcPts val="0"/>
-                        </a:spcAft>
-                        <a:buNone/>
-                      </a:pPr>
-                      <a:r>
-                        <a:rPr lang="en-US" sz="2000" u="none" strike="noStrike" cap="none"/>
-                        <a:t>Goal</a:t>
-                      </a:r>
-                      <a:endParaRPr/>
-                    </a:p>
-                  </a:txBody>
-                  <a:tcPr marL="121925" marR="121925" marT="60950" marB="60950"/>
-                </a:tc>
-                <a:tc>
-                  <a:txBody>
-                    <a:bodyPr/>
-                    <a:lstStyle/>
-                    <a:p>
-                      <a:pPr marL="0" marR="0" lvl="0" indent="0" algn="l" rtl="0">
-                        <a:lnSpc>
-                          <a:spcPct val="100000"/>
-                        </a:lnSpc>
-                        <a:spcBef>
-                          <a:spcPts val="0"/>
-                        </a:spcBef>
-                        <a:spcAft>
-                          <a:spcPts val="0"/>
-                        </a:spcAft>
-                        <a:buNone/>
-                      </a:pPr>
-                      <a:r>
-                        <a:rPr lang="en-US" sz="2000" u="none" strike="noStrike" cap="none"/>
-                        <a:t>Global or Local</a:t>
-                      </a:r>
-                      <a:endParaRPr/>
-                    </a:p>
-                  </a:txBody>
-                  <a:tcPr marL="121925" marR="121925" marT="60950" marB="60950"/>
-                </a:tc>
-                <a:extLst>
-                  <a:ext uri="{0D108BD9-81ED-4DB2-BD59-A6C34878D82A}">
-                    <a16:rowId xmlns:a16="http://schemas.microsoft.com/office/drawing/2014/main" val="10000"/>
-                  </a:ext>
-                </a:extLst>
-              </a:tr>
-              <a:tr h="494450">
-                <a:tc>
-                  <a:txBody>
-                    <a:bodyPr/>
-                    <a:lstStyle/>
-                    <a:p>
-                      <a:pPr marL="0" marR="0" lvl="0" indent="0" algn="l" rtl="0">
-                        <a:lnSpc>
-                          <a:spcPct val="100000"/>
-                        </a:lnSpc>
-                        <a:spcBef>
-                          <a:spcPts val="0"/>
-                        </a:spcBef>
-                        <a:spcAft>
-                          <a:spcPts val="0"/>
-                        </a:spcAft>
-                        <a:buNone/>
-                      </a:pPr>
-                      <a:r>
-                        <a:rPr lang="en-US" sz="1900" u="none" strike="noStrike" cap="none"/>
-                        <a:t>Debugging</a:t>
-                      </a:r>
-                      <a:endParaRPr/>
-                    </a:p>
-                  </a:txBody>
-                  <a:tcPr marL="121925" marR="121925" marT="60950" marB="60950"/>
-                </a:tc>
-                <a:tc>
-                  <a:txBody>
-                    <a:bodyPr/>
-                    <a:lstStyle/>
-                    <a:p>
-                      <a:pPr marL="0" lvl="0" indent="0" algn="l" rtl="0">
-                        <a:spcBef>
-                          <a:spcPts val="0"/>
-                        </a:spcBef>
-                        <a:spcAft>
-                          <a:spcPts val="0"/>
-                        </a:spcAft>
-                        <a:buNone/>
-                      </a:pPr>
-                      <a:endParaRPr/>
-                    </a:p>
-                  </a:txBody>
-                  <a:tcPr marL="121925" marR="121925" marT="60950" marB="60950"/>
-                </a:tc>
-                <a:tc>
-                  <a:txBody>
-                    <a:bodyPr/>
-                    <a:lstStyle/>
-                    <a:p>
-                      <a:pPr marL="0" lvl="0" indent="0" algn="l" rtl="0">
-                        <a:spcBef>
-                          <a:spcPts val="0"/>
-                        </a:spcBef>
-                        <a:spcAft>
-                          <a:spcPts val="0"/>
-                        </a:spcAft>
-                        <a:buNone/>
-                      </a:pPr>
-                      <a:endParaRPr/>
-                    </a:p>
-                  </a:txBody>
-                  <a:tcPr marL="121925" marR="121925" marT="60950" marB="60950"/>
-                </a:tc>
-                <a:tc>
-                  <a:txBody>
-                    <a:bodyPr/>
-                    <a:lstStyle/>
-                    <a:p>
-                      <a:pPr marL="0" lvl="0" indent="0" algn="l" rtl="0">
-                        <a:spcBef>
-                          <a:spcPts val="0"/>
-                        </a:spcBef>
-                        <a:spcAft>
-                          <a:spcPts val="0"/>
-                        </a:spcAft>
-                        <a:buNone/>
-                      </a:pPr>
-                      <a:endParaRPr/>
-                    </a:p>
-                  </a:txBody>
-                  <a:tcPr marL="121925" marR="121925" marT="60950" marB="60950"/>
-                </a:tc>
-                <a:extLst>
-                  <a:ext uri="{0D108BD9-81ED-4DB2-BD59-A6C34878D82A}">
-                    <a16:rowId xmlns:a16="http://schemas.microsoft.com/office/drawing/2014/main" val="10001"/>
-                  </a:ext>
-                </a:extLst>
-              </a:tr>
-              <a:tr h="690875">
-                <a:tc>
-                  <a:txBody>
-                    <a:bodyPr/>
-                    <a:lstStyle/>
-                    <a:p>
-                      <a:pPr marL="0" marR="0" lvl="0" indent="0" algn="l" rtl="0">
-                        <a:lnSpc>
-                          <a:spcPct val="100000"/>
-                        </a:lnSpc>
-                        <a:spcBef>
-                          <a:spcPts val="0"/>
-                        </a:spcBef>
-                        <a:spcAft>
-                          <a:spcPts val="0"/>
-                        </a:spcAft>
-                        <a:buNone/>
-                      </a:pPr>
-                      <a:r>
-                        <a:rPr lang="en-US" sz="1900" u="none" strike="noStrike" cap="none"/>
-                        <a:t>Improving performance</a:t>
-                      </a:r>
-                      <a:endParaRPr/>
-                    </a:p>
-                  </a:txBody>
-                  <a:tcPr marL="121925" marR="121925" marT="60950" marB="60950"/>
-                </a:tc>
-                <a:tc>
-                  <a:txBody>
-                    <a:bodyPr/>
-                    <a:lstStyle/>
-                    <a:p>
-                      <a:pPr marL="0" lvl="0" indent="0" algn="l" rtl="0">
-                        <a:spcBef>
-                          <a:spcPts val="0"/>
-                        </a:spcBef>
-                        <a:spcAft>
-                          <a:spcPts val="0"/>
-                        </a:spcAft>
-                        <a:buNone/>
-                      </a:pPr>
-                      <a:endParaRPr/>
-                    </a:p>
-                  </a:txBody>
-                  <a:tcPr marL="121925" marR="121925" marT="60950" marB="60950"/>
-                </a:tc>
-                <a:tc>
-                  <a:txBody>
-                    <a:bodyPr/>
-                    <a:lstStyle/>
-                    <a:p>
-                      <a:pPr marL="0" lvl="0" indent="0" algn="l" rtl="0">
-                        <a:spcBef>
-                          <a:spcPts val="0"/>
-                        </a:spcBef>
-                        <a:spcAft>
-                          <a:spcPts val="0"/>
-                        </a:spcAft>
-                        <a:buNone/>
-                      </a:pPr>
-                      <a:endParaRPr/>
-                    </a:p>
-                  </a:txBody>
-                  <a:tcPr marL="121925" marR="121925" marT="60950" marB="60950"/>
-                </a:tc>
-                <a:tc>
-                  <a:txBody>
-                    <a:bodyPr/>
-                    <a:lstStyle/>
-                    <a:p>
-                      <a:pPr marL="0" lvl="0" indent="0" algn="l" rtl="0">
-                        <a:spcBef>
-                          <a:spcPts val="0"/>
-                        </a:spcBef>
-                        <a:spcAft>
-                          <a:spcPts val="0"/>
-                        </a:spcAft>
-                        <a:buNone/>
-                      </a:pPr>
-                      <a:endParaRPr/>
-                    </a:p>
-                  </a:txBody>
-                  <a:tcPr marL="121925" marR="121925" marT="60950" marB="60950"/>
-                </a:tc>
-                <a:extLst>
-                  <a:ext uri="{0D108BD9-81ED-4DB2-BD59-A6C34878D82A}">
-                    <a16:rowId xmlns:a16="http://schemas.microsoft.com/office/drawing/2014/main" val="10002"/>
-                  </a:ext>
-                </a:extLst>
-              </a:tr>
-              <a:tr h="494450">
-                <a:tc>
-                  <a:txBody>
-                    <a:bodyPr/>
-                    <a:lstStyle/>
-                    <a:p>
-                      <a:pPr marL="0" marR="0" lvl="0" indent="0" algn="l" rtl="0">
-                        <a:lnSpc>
-                          <a:spcPct val="100000"/>
-                        </a:lnSpc>
-                        <a:spcBef>
-                          <a:spcPts val="0"/>
-                        </a:spcBef>
-                        <a:spcAft>
-                          <a:spcPts val="0"/>
-                        </a:spcAft>
-                        <a:buNone/>
-                      </a:pPr>
-                      <a:r>
-                        <a:rPr lang="en-US" sz="1900" u="none" strike="noStrike" cap="none"/>
-                        <a:t>Trust</a:t>
-                      </a:r>
-                      <a:endParaRPr/>
-                    </a:p>
-                  </a:txBody>
-                  <a:tcPr marL="121925" marR="121925" marT="60950" marB="60950"/>
-                </a:tc>
-                <a:tc>
-                  <a:txBody>
-                    <a:bodyPr/>
-                    <a:lstStyle/>
-                    <a:p>
-                      <a:pPr marL="0" lvl="0" indent="0" algn="l" rtl="0">
-                        <a:spcBef>
-                          <a:spcPts val="0"/>
-                        </a:spcBef>
-                        <a:spcAft>
-                          <a:spcPts val="0"/>
-                        </a:spcAft>
-                        <a:buNone/>
-                      </a:pPr>
-                      <a:endParaRPr/>
-                    </a:p>
-                  </a:txBody>
-                  <a:tcPr marL="121925" marR="121925" marT="60950" marB="60950"/>
-                </a:tc>
-                <a:tc>
-                  <a:txBody>
-                    <a:bodyPr/>
-                    <a:lstStyle/>
-                    <a:p>
-                      <a:pPr marL="0" marR="0" lvl="0" indent="0" algn="l" rtl="0">
-                        <a:lnSpc>
-                          <a:spcPct val="100000"/>
-                        </a:lnSpc>
-                        <a:spcBef>
-                          <a:spcPts val="0"/>
-                        </a:spcBef>
-                        <a:spcAft>
-                          <a:spcPts val="0"/>
-                        </a:spcAft>
-                        <a:buNone/>
-                      </a:pPr>
-                      <a:endParaRPr sz="1900" u="none" strike="noStrike" cap="none"/>
-                    </a:p>
-                  </a:txBody>
-                  <a:tcPr marL="121925" marR="121925" marT="60950" marB="60950"/>
-                </a:tc>
-                <a:tc>
-                  <a:txBody>
-                    <a:bodyPr/>
-                    <a:lstStyle/>
-                    <a:p>
-                      <a:pPr marL="0" lvl="0" indent="0" algn="l" rtl="0">
-                        <a:spcBef>
-                          <a:spcPts val="0"/>
-                        </a:spcBef>
-                        <a:spcAft>
-                          <a:spcPts val="0"/>
-                        </a:spcAft>
-                        <a:buNone/>
-                      </a:pPr>
-                      <a:endParaRPr/>
-                    </a:p>
-                  </a:txBody>
-                  <a:tcPr marL="121925" marR="121925" marT="60950" marB="60950"/>
-                </a:tc>
-                <a:extLst>
-                  <a:ext uri="{0D108BD9-81ED-4DB2-BD59-A6C34878D82A}">
-                    <a16:rowId xmlns:a16="http://schemas.microsoft.com/office/drawing/2014/main" val="10003"/>
-                  </a:ext>
-                </a:extLst>
-              </a:tr>
-              <a:tr h="494450">
-                <a:tc>
-                  <a:txBody>
-                    <a:bodyPr/>
-                    <a:lstStyle/>
-                    <a:p>
-                      <a:pPr marL="0" marR="0" lvl="0" indent="0" algn="l" rtl="0">
-                        <a:lnSpc>
-                          <a:spcPct val="100000"/>
-                        </a:lnSpc>
-                        <a:spcBef>
-                          <a:spcPts val="0"/>
-                        </a:spcBef>
-                        <a:spcAft>
-                          <a:spcPts val="0"/>
-                        </a:spcAft>
-                        <a:buNone/>
-                      </a:pPr>
-                      <a:r>
-                        <a:rPr lang="en-US" sz="1900" u="none" strike="noStrike" cap="none"/>
-                        <a:t>Interventions</a:t>
-                      </a:r>
-                      <a:endParaRPr/>
-                    </a:p>
-                  </a:txBody>
-                  <a:tcPr marL="121925" marR="121925" marT="60950" marB="60950"/>
-                </a:tc>
-                <a:tc>
-                  <a:txBody>
-                    <a:bodyPr/>
-                    <a:lstStyle/>
-                    <a:p>
-                      <a:pPr marL="0" lvl="0" indent="0" algn="l" rtl="0">
-                        <a:spcBef>
-                          <a:spcPts val="0"/>
-                        </a:spcBef>
-                        <a:spcAft>
-                          <a:spcPts val="0"/>
-                        </a:spcAft>
-                        <a:buNone/>
-                      </a:pPr>
-                      <a:endParaRPr/>
-                    </a:p>
-                  </a:txBody>
-                  <a:tcPr marL="121925" marR="121925" marT="60950" marB="60950"/>
-                </a:tc>
-                <a:tc>
-                  <a:txBody>
-                    <a:bodyPr/>
-                    <a:lstStyle/>
-                    <a:p>
-                      <a:pPr marL="0" marR="0" lvl="0" indent="0" algn="l" rtl="0">
-                        <a:lnSpc>
-                          <a:spcPct val="100000"/>
-                        </a:lnSpc>
-                        <a:spcBef>
-                          <a:spcPts val="0"/>
-                        </a:spcBef>
-                        <a:spcAft>
-                          <a:spcPts val="0"/>
-                        </a:spcAft>
-                        <a:buNone/>
-                      </a:pPr>
-                      <a:endParaRPr sz="1900" u="none" strike="noStrike" cap="none"/>
-                    </a:p>
-                  </a:txBody>
-                  <a:tcPr marL="121925" marR="121925" marT="60950" marB="60950"/>
-                </a:tc>
-                <a:tc>
-                  <a:txBody>
-                    <a:bodyPr/>
-                    <a:lstStyle/>
-                    <a:p>
-                      <a:pPr marL="0" lvl="0" indent="0" algn="l" rtl="0">
-                        <a:spcBef>
-                          <a:spcPts val="0"/>
-                        </a:spcBef>
-                        <a:spcAft>
-                          <a:spcPts val="0"/>
-                        </a:spcAft>
-                        <a:buNone/>
-                      </a:pPr>
-                      <a:endParaRPr/>
-                    </a:p>
-                  </a:txBody>
-                  <a:tcPr marL="121925" marR="121925" marT="60950" marB="60950"/>
-                </a:tc>
-                <a:extLst>
-                  <a:ext uri="{0D108BD9-81ED-4DB2-BD59-A6C34878D82A}">
-                    <a16:rowId xmlns:a16="http://schemas.microsoft.com/office/drawing/2014/main" val="10004"/>
-                  </a:ext>
-                </a:extLst>
-              </a:tr>
-              <a:tr h="494450">
-                <a:tc>
-                  <a:txBody>
-                    <a:bodyPr/>
-                    <a:lstStyle/>
-                    <a:p>
-                      <a:pPr marL="0" marR="0" lvl="0" indent="0" algn="l" rtl="0">
-                        <a:lnSpc>
-                          <a:spcPct val="100000"/>
-                        </a:lnSpc>
-                        <a:spcBef>
-                          <a:spcPts val="0"/>
-                        </a:spcBef>
-                        <a:spcAft>
-                          <a:spcPts val="0"/>
-                        </a:spcAft>
-                        <a:buNone/>
-                      </a:pPr>
-                      <a:r>
-                        <a:rPr lang="en-US" sz="1900" u="none" strike="noStrike" cap="none"/>
-                        <a:t>Recourse</a:t>
-                      </a:r>
-                      <a:endParaRPr/>
-                    </a:p>
-                  </a:txBody>
-                  <a:tcPr marL="121925" marR="121925" marT="60950" marB="60950"/>
-                </a:tc>
-                <a:tc>
-                  <a:txBody>
-                    <a:bodyPr/>
-                    <a:lstStyle/>
-                    <a:p>
-                      <a:pPr marL="0" lvl="0" indent="0" algn="l" rtl="0">
-                        <a:spcBef>
-                          <a:spcPts val="0"/>
-                        </a:spcBef>
-                        <a:spcAft>
-                          <a:spcPts val="0"/>
-                        </a:spcAft>
-                        <a:buNone/>
-                      </a:pPr>
-                      <a:endParaRPr/>
-                    </a:p>
-                  </a:txBody>
-                  <a:tcPr marL="121925" marR="121925" marT="60950" marB="60950"/>
-                </a:tc>
-                <a:tc>
-                  <a:txBody>
-                    <a:bodyPr/>
-                    <a:lstStyle/>
-                    <a:p>
-                      <a:pPr marL="0" lvl="0" indent="0" algn="l" rtl="0">
-                        <a:spcBef>
-                          <a:spcPts val="0"/>
-                        </a:spcBef>
-                        <a:spcAft>
-                          <a:spcPts val="0"/>
-                        </a:spcAft>
-                        <a:buNone/>
-                      </a:pPr>
-                      <a:endParaRPr/>
-                    </a:p>
-                  </a:txBody>
-                  <a:tcPr marL="121925" marR="121925" marT="60950" marB="60950"/>
-                </a:tc>
-                <a:tc>
-                  <a:txBody>
-                    <a:bodyPr/>
-                    <a:lstStyle/>
-                    <a:p>
-                      <a:pPr marL="0" lvl="0" indent="0" algn="l" rtl="0">
-                        <a:spcBef>
-                          <a:spcPts val="0"/>
-                        </a:spcBef>
-                        <a:spcAft>
-                          <a:spcPts val="0"/>
-                        </a:spcAft>
-                        <a:buNone/>
-                      </a:pPr>
-                      <a:endParaRPr/>
-                    </a:p>
-                  </a:txBody>
-                  <a:tcPr marL="121925" marR="121925" marT="60950" marB="60950"/>
-                </a:tc>
-                <a:extLst>
-                  <a:ext uri="{0D108BD9-81ED-4DB2-BD59-A6C34878D82A}">
-                    <a16:rowId xmlns:a16="http://schemas.microsoft.com/office/drawing/2014/main" val="10005"/>
-                  </a:ext>
-                </a:extLst>
-              </a:tr>
-            </a:tbl>
-          </a:graphicData>
-        </a:graphic>
-      </p:graphicFrame>
+      </p:pic>
     </p:spTree>
   </p:cSld>
   <p:clrMapOvr>
